--- a/ComicCraft_10_Slides_Presentation.pptx
+++ b/ComicCraft_10_Slides_Presentation.pptx
@@ -511,18 +511,18 @@
           <a:lstStyle/>
           <a:p>
             <a:r>
-              <a:t>[Tanglish Tip] First slide kaati Good Morning Sir/Ma'am solli project name matrum one-line summary sollunga.</a:t>
+              <a:t>[Quick Tip] Project name matrum one-line idea mattum simple-aa sollunga.</a:t>
             </a:r>
           </a:p>
           <a:p/>
           <a:p>
             <a:r>
-              <a:t>[What to Speak in English]</a:t>
-            </a:r>
-          </a:p>
-          <a:p>
-            <a:r>
-              <a:t>Good morning respected examiners. Our Naan Mudhalvan project is ComicCraft — an AI Comic Story Creator built with Python and FastAPI. It turns a single-sentence story idea into a complete 3 to 8 panel illustrated comic book with web preview and A4 PDF export.</a:t>
+              <a:t>[Simple Explanation]</a:t>
+            </a:r>
+          </a:p>
+          <a:p>
+            <a:r>
+              <a:t>ComicCraft is an AI Comic Story Creator built with Python and FastAPI. It takes a short story idea from the user and automatically turns it into an illustrated comic book with web preview and A4 PDF download.</a:t>
             </a:r>
           </a:p>
         </p:txBody>
@@ -592,18 +592,18 @@
           <a:lstStyle/>
           <a:p>
             <a:r>
-              <a:t>[Tanglish Tip] 11 automated pytest pass aachu, ~80% coverage, future-la async queue + Tamil support add pannalam nu solli Thank You sollunga!</a:t>
+              <a:t>[Quick Tip] 11 pytest pass, future enhancements (background queue, cloud storage, Tamil support), matrum simple conclusion solli mudinga!</a:t>
             </a:r>
           </a:p>
           <a:p/>
           <a:p>
             <a:r>
-              <a:t>[What to Speak in English]</a:t>
-            </a:r>
-          </a:p>
-          <a:p>
-            <a:r>
-              <a:t>To conclude, ComicCraft is verified by 11 automated pytest tests with 80% code coverage, proving every route, PDF export, and fallback path works offline. In the future, we plan to add background job queues, cloud storage, single-panel regeneration, and Tamil language support. Thank you, and we are happy to show the live demo and answer your questions!</a:t>
+              <a:t>[Simple Explanation]</a:t>
+            </a:r>
+          </a:p>
+          <a:p>
+            <a:r>
+              <a:t>ComicCraft is verified with 11 automated offline tests and ~80% coverage. Future enhancements include background queues, cloud user libraries, single-panel editing, and Tamil support. Thank you!</a:t>
             </a:r>
           </a:p>
         </p:txBody>
@@ -673,18 +673,18 @@
           <a:lstStyle/>
           <a:p>
             <a:r>
-              <a:t>[Tanglish Tip] Abstract matrum 4 steps (Plan -&gt; Write -&gt; Illustrate -&gt; Publish) epdi nadakuthunu explain pannunga.</a:t>
+              <a:t>[Quick Tip] User oru story idea kudutha Plan -&gt; Write -&gt; Illustrate -&gt; Publish nu 4 step-la PDF ready aagidum.</a:t>
             </a:r>
           </a:p>
           <a:p/>
           <a:p>
             <a:r>
-              <a:t>[What to Speak in English]</a:t>
-            </a:r>
-          </a:p>
-          <a:p>
-            <a:r>
-              <a:t>ComicCraft simplifies comic creation into four automated stages: Plan, Write, Illustrate, and Publish. Using a two-stage Google Gemini JSON workflow validated by Pydantic v2, it creates consistent scripts and panel illustrations, then packages them into a web preview and an A4 PDF—even working offline without API keys.</a:t>
+              <a:t>[Simple Explanation]</a:t>
+            </a:r>
+          </a:p>
+          <a:p>
+            <a:r>
+              <a:t>ComicCraft accepts a simple creative brief and runs four automated steps—Plan, Write, Illustrate, and Publish—using Google Gemini AI, Pydantic validation, and fpdf2 PDF generation.</a:t>
             </a:r>
           </a:p>
         </p:txBody>
@@ -754,18 +754,18 @@
           <a:lstStyle/>
           <a:p>
             <a:r>
-              <a:t>[Tanglish Tip] Left side-la 4 problems (text split bug, character dress change, API failure) solli, right side-la namma 4 solutions/objectives sollunga.</a:t>
+              <a:t>[Quick Tip] Left side 4 problems, right side atha solve panra 4 objectives.</a:t>
             </a:r>
           </a:p>
           <a:p/>
           <a:p>
             <a:r>
-              <a:t>[What to Speak in English]</a:t>
-            </a:r>
-          </a:p>
-          <a:p>
-            <a:r>
-              <a:t>Manual comic creation requires three separate skills, while naive AI scripts fail due to plain-text splitting, character drift across panels, and API rate limits. Our objective with ComicCraft was to build a single unified studio using strict Pydantic JSON contracts, a Character Bible for visual consistency, and offline-ready fallbacks.</a:t>
+              <a:t>[Simple Explanation]</a:t>
+            </a:r>
+          </a:p>
+          <a:p>
+            <a:r>
+              <a:t>Manual comics take too much effort, and basic AI scripts suffer from broken text parsing, changing characters, and API crashes. Our objective is to solve all four using structured JSON, a Character Bible, and offline fallbacks.</a:t>
             </a:r>
           </a:p>
         </p:txBody>
@@ -835,18 +835,18 @@
           <a:lstStyle/>
           <a:p>
             <a:r>
-              <a:t>[Tanglish Tip] Table-la Existing-kum namma ComicCraft-kum ulla 5 mukkiyamaana vithyasangala point panni kaatunga.</a:t>
+              <a:t>[Quick Tip] Existing vs Proposed table-la ulla 5 simple points-ah apdiye compare panni sollunga.</a:t>
             </a:r>
           </a:p>
           <a:p/>
           <a:p>
             <a:r>
-              <a:t>[What to Speak in English]</a:t>
-            </a:r>
-          </a:p>
-          <a:p>
-            <a:r>
-              <a:t>Compared to manual workflows and fragile AI scripts, ComicCraft introduces five major upgrades: a single integrated FastAPI pipeline, Pydantic-validated JSON outputs, Character Bible continuity, multi-layer fallback resilience, and isolated UUID storage with atomic manifests.</a:t>
+              <a:t>[Simple Explanation]</a:t>
+            </a:r>
+          </a:p>
+          <a:p>
+            <a:r>
+              <a:t>Unlike existing manual tools or fragile chat scripts, ComicCraft unifies story writing, consistent artwork, offline reliability, and A4 PDF export into one smooth web application.</a:t>
             </a:r>
           </a:p>
         </p:txBody>
@@ -916,18 +916,18 @@
           <a:lstStyle/>
           <a:p>
             <a:r>
-              <a:t>[Tanglish Tip] FastAPI, Pydantic v2, Google Gemini SDK, Pillow/HuggingFace, matrum fpdf2 ethukku use pannom nu sollunga. Database kedaiyathu — local UUID storage!</a:t>
+              <a:t>[Quick Tip] 6 cards-la ulla main technologies mattum sollunga: FastAPI, Pydantic, Gemini, Pillow/HuggingFace, Jinja2, fpdf2.</a:t>
             </a:r>
           </a:p>
           <a:p/>
           <a:p>
             <a:r>
-              <a:t>[What to Speak in English]</a:t>
-            </a:r>
-          </a:p>
-          <a:p>
-            <a:r>
-              <a:t>Our stack is built on Python 3.11 and FastAPI served by Uvicorn. We use Pydantic v2 for strict validation, google-genai for two-stage story generation, Pillow, Hugging Face Hub, and Diffusers for panel illustrations, and fpdf2 with bundled DejaVu fonts for Unicode PDF export. No external database or GPU is required for default operation.</a:t>
+              <a:t>[Simple Explanation]</a:t>
+            </a:r>
+          </a:p>
+          <a:p>
+            <a:r>
+              <a:t>ComicCraft is built with Python 3.11, FastAPI, and Pydantic v2. It uses Google Gemini for scripts, Pillow, Hugging Face, or Diffusers for artwork, Jinja2 for the web interface, and fpdf2 for PDF export.</a:t>
             </a:r>
           </a:p>
         </p:txBody>
@@ -997,18 +997,18 @@
           <a:lstStyle/>
           <a:p>
             <a:r>
-              <a:t>[Tanglish Tip] Top-to-bottom architecture explain pannunga: Clients -&gt; FastAPI -&gt; ComicService Orchestrator -&gt; 4 Services (Story, Image, PDF, Repository).</a:t>
+              <a:t>[Quick Tip] User -&gt; FastAPI -&gt; ComicService -&gt; 4 Services (Story, Image, PDF, Storage).</a:t>
             </a:r>
           </a:p>
           <a:p/>
           <a:p>
             <a:r>
-              <a:t>[What to Speak in English]</a:t>
-            </a:r>
-          </a:p>
-          <a:p>
-            <a:r>
-              <a:t>Both our browser interface and REST JSON endpoints share the same FastAPI layer and ComicService orchestrator. Blocking operations run inside FastAPI's threadpool. ComicService coordinates four modular services: ResilientStoryService, ResilientImageService, PDFService, and ComicRepository for isolated UUID storage.</a:t>
+              <a:t>[Simple Explanation]</a:t>
+            </a:r>
+          </a:p>
+          <a:p>
+            <a:r>
+              <a:t>User requests come through FastAPI and Pydantic validation into ComicService. ComicService coordinates four clean modules: Story Service, Image Service, PDF Service, and Storage Service.</a:t>
             </a:r>
           </a:p>
         </p:txBody>
@@ -1078,18 +1078,18 @@
           <a:lstStyle/>
           <a:p>
             <a:r>
-              <a:t>[Tanglish Tip] Viva-la kandippa kepanga! Stage 1 Outline + Character Bible uruvakkum, Stage 2 Dialogue &amp; Prompts ezhuthum. SHA-256 seed naala reproducible images varum.</a:t>
+              <a:t>[Quick Tip] Stage 1 Outline + Character Bible, Stage 2 Full Script, Stage 4 Panel Images.</a:t>
             </a:r>
           </a:p>
           <a:p/>
           <a:p>
             <a:r>
-              <a:t>[What to Speak in English]</a:t>
-            </a:r>
-          </a:p>
-          <a:p>
-            <a:r>
-              <a:t>This slide shows our core AI engineering. First, ComicPrompt validates user input. Stage 1 calls Gemini Flash-Lite in JSON mode to build a validated outline and a Character Bible. Stage 2 calls Gemini Flash to expand each panel into captions, narration, dialogue, and prompts that repeat the Character Bible so our hero looks consistent across all panels.</a:t>
+              <a:t>[Simple Explanation]</a:t>
+            </a:r>
+          </a:p>
+          <a:p>
+            <a:r>
+              <a:t>Instead of a single prompt, ComicCraft uses two Gemini stages. Stage 1 plans the outline and creates a Character Bible. Stage 2 writes captions and dialogues while repeating the Character Bible in every panel prompt.</a:t>
             </a:r>
           </a:p>
         </p:txBody>
@@ -1159,18 +1159,18 @@
           <a:lstStyle/>
           <a:p>
             <a:r>
-              <a:t>[Tanglish Tip] 429 error vantha retry pannum, 404 vantha udane adutha model pogum, internet illana Offline Demo mode work aagum! Path traversal regex guard pathiyum sollunga.</a:t>
+              <a:t>[Quick Tip] API fail aanalum app crash aagathu — retry pannum, illana Offline Demo + Placeholder image vachu PDF kudukum!</a:t>
             </a:r>
           </a:p>
           <a:p/>
           <a:p>
             <a:r>
-              <a:t>[What to Speak in English]</a:t>
-            </a:r>
-          </a:p>
-          <a:p>
-            <a:r>
-              <a:t>Reliability is a first-class feature in ComicCraft. Transient 429 or 503 errors trigger exponential backoff with jitter, while 404 errors immediately switch to fallback models. Even if one image panel fails, only that panel switches to a labeled placeholder rather than losing the whole comic. On disk, strict hex-UUID validation and atomic JSON writes keep storage safe.</a:t>
+              <a:t>[Simple Explanation]</a:t>
+            </a:r>
+          </a:p>
+          <a:p>
+            <a:r>
+              <a:t>ComicCraft is designed never to crash during use. It automatically retries transient errors, switches to backup models, protects individual panels with placeholder images, and saves every comic inside a safe UUID folder.</a:t>
             </a:r>
           </a:p>
         </p:txBody>
@@ -1240,18 +1240,18 @@
           <a:lstStyle/>
           <a:p>
             <a:r>
-              <a:t>[Tanglish Tip] Moonu real output screenshots: 1) User Input Form, 2) Generated Panels Preview, 3) Download aana A4 PDF Cover + Panel page.</a:t>
+              <a:t>[Quick Tip] Moonu screenshots: 1) Input Form, 2) Generated Comic Panels, 3) Final A4 PDF Output.</a:t>
             </a:r>
           </a:p>
           <a:p/>
           <a:p>
             <a:r>
-              <a:t>[What to Speak in English]</a:t>
-            </a:r>
-          </a:p>
-          <a:p>
-            <a:r>
-              <a:t>Here are real screenshots captured from our running application. On the left is the browser creation form with live character counting and provider status. In the center is the responsive comic preview displaying panel artwork, captions, and dialogue. On the right is the exported A4 PDF featuring a styled dark cover page and per-panel pages.</a:t>
+              <a:t>[Simple Explanation]</a:t>
+            </a:r>
+          </a:p>
+          <a:p>
+            <a:r>
+              <a:t>Here are actual outputs from ComicCraft: the story input studio on the left, the generated multi-panel web preview in the middle, and the final A4 PDF cover and panel page on the right.</a:t>
             </a:r>
           </a:p>
         </p:txBody>
@@ -4359,8 +4359,767 @@
         </p:nvSpPr>
         <p:spPr>
           <a:xfrm>
-            <a:off x="8092440" y="1051560"/>
-            <a:ext cx="3520440" cy="4343400"/>
+            <a:off x="822960" y="1143000"/>
+            <a:ext cx="2697480" cy="347472"/>
+          </a:xfrm>
+          <a:prstGeom prst="roundRect">
+            <a:avLst>
+              <a:gd name="adj" fmla="val 4000"/>
+            </a:avLst>
+          </a:prstGeom>
+          <a:solidFill>
+            <a:srgbClr val="1E293B"/>
+          </a:solidFill>
+          <a:ln w="12700">
+            <a:solidFill>
+              <a:srgbClr val="F59E0B"/>
+            </a:solidFill>
+          </a:ln>
+        </p:spPr>
+        <p:style>
+          <a:lnRef idx="1">
+            <a:schemeClr val="accent1"/>
+          </a:lnRef>
+          <a:fillRef idx="3">
+            <a:schemeClr val="accent1"/>
+          </a:fillRef>
+          <a:effectRef idx="2">
+            <a:schemeClr val="accent1"/>
+          </a:effectRef>
+          <a:fontRef idx="minor">
+            <a:schemeClr val="lt1"/>
+          </a:fontRef>
+        </p:style>
+        <p:txBody>
+          <a:bodyPr rtlCol="0" anchor="ctr"/>
+          <a:lstStyle/>
+          <a:p>
+            <a:pPr algn="ctr"/>
+          </a:p>
+        </p:txBody>
+      </p:sp>
+      <p:sp>
+        <p:nvSpPr>
+          <p:cNvPr id="5" name="TextBox 4"/>
+          <p:cNvSpPr txBox="1"/>
+          <p:nvPr/>
+        </p:nvSpPr>
+        <p:spPr>
+          <a:xfrm>
+            <a:off x="822960" y="1143000"/>
+            <a:ext cx="2697480" cy="347472"/>
+          </a:xfrm>
+          <a:prstGeom prst="rect">
+            <a:avLst/>
+          </a:prstGeom>
+          <a:noFill/>
+        </p:spPr>
+        <p:txBody>
+          <a:bodyPr wrap="square" anchor="ctr" lIns="36576" rIns="36576" tIns="18288" bIns="18288">
+            <a:spAutoFit/>
+          </a:bodyPr>
+          <a:lstStyle/>
+          <a:p>
+            <a:pPr algn="ctr"/>
+            <a:r>
+              <a:rPr sz="1100" b="1">
+                <a:solidFill>
+                  <a:srgbClr val="F59E0B"/>
+                </a:solidFill>
+                <a:latin typeface="Calibri"/>
+              </a:rPr>
+              <a:t>AI COMIC STORY STUDIO</a:t>
+            </a:r>
+          </a:p>
+        </p:txBody>
+      </p:sp>
+      <p:sp>
+        <p:nvSpPr>
+          <p:cNvPr id="6" name="Rounded Rectangle 5"/>
+          <p:cNvSpPr/>
+          <p:nvPr/>
+        </p:nvSpPr>
+        <p:spPr>
+          <a:xfrm>
+            <a:off x="822960" y="1810512"/>
+            <a:ext cx="731520" cy="731520"/>
+          </a:xfrm>
+          <a:prstGeom prst="roundRect">
+            <a:avLst>
+              <a:gd name="adj" fmla="val 4000"/>
+            </a:avLst>
+          </a:prstGeom>
+          <a:solidFill>
+            <a:srgbClr val="F59E0B"/>
+          </a:solidFill>
+          <a:ln>
+            <a:noFill/>
+          </a:ln>
+        </p:spPr>
+        <p:style>
+          <a:lnRef idx="1">
+            <a:schemeClr val="accent1"/>
+          </a:lnRef>
+          <a:fillRef idx="3">
+            <a:schemeClr val="accent1"/>
+          </a:fillRef>
+          <a:effectRef idx="2">
+            <a:schemeClr val="accent1"/>
+          </a:effectRef>
+          <a:fontRef idx="minor">
+            <a:schemeClr val="lt1"/>
+          </a:fontRef>
+        </p:style>
+        <p:txBody>
+          <a:bodyPr rtlCol="0" anchor="ctr"/>
+          <a:lstStyle/>
+          <a:p>
+            <a:pPr algn="ctr"/>
+          </a:p>
+        </p:txBody>
+      </p:sp>
+      <p:sp>
+        <p:nvSpPr>
+          <p:cNvPr id="7" name="TextBox 6"/>
+          <p:cNvSpPr txBox="1"/>
+          <p:nvPr/>
+        </p:nvSpPr>
+        <p:spPr>
+          <a:xfrm>
+            <a:off x="822960" y="1810512"/>
+            <a:ext cx="731520" cy="731520"/>
+          </a:xfrm>
+          <a:prstGeom prst="rect">
+            <a:avLst/>
+          </a:prstGeom>
+          <a:noFill/>
+        </p:spPr>
+        <p:txBody>
+          <a:bodyPr wrap="square" anchor="ctr" lIns="36576" rIns="36576" tIns="18288" bIns="18288">
+            <a:spAutoFit/>
+          </a:bodyPr>
+          <a:lstStyle/>
+          <a:p>
+            <a:pPr algn="ctr"/>
+            <a:r>
+              <a:rPr sz="2700" b="1">
+                <a:solidFill>
+                  <a:srgbClr val="0F172A"/>
+                </a:solidFill>
+                <a:latin typeface="Calibri"/>
+              </a:rPr>
+              <a:t>C!</a:t>
+            </a:r>
+          </a:p>
+        </p:txBody>
+      </p:sp>
+      <p:sp>
+        <p:nvSpPr>
+          <p:cNvPr id="8" name="TextBox 7"/>
+          <p:cNvSpPr txBox="1"/>
+          <p:nvPr/>
+        </p:nvSpPr>
+        <p:spPr>
+          <a:xfrm>
+            <a:off x="1719072" y="1719072"/>
+            <a:ext cx="5943600" cy="841248"/>
+          </a:xfrm>
+          <a:prstGeom prst="rect">
+            <a:avLst/>
+          </a:prstGeom>
+          <a:noFill/>
+        </p:spPr>
+        <p:txBody>
+          <a:bodyPr wrap="square" anchor="t" lIns="36576" rIns="36576" tIns="18288" bIns="18288">
+            <a:spAutoFit/>
+          </a:bodyPr>
+          <a:lstStyle/>
+          <a:p>
+            <a:pPr algn="l"/>
+            <a:r>
+              <a:rPr sz="4800" b="1">
+                <a:solidFill>
+                  <a:srgbClr val="FFFFFF"/>
+                </a:solidFill>
+                <a:latin typeface="Calibri"/>
+              </a:rPr>
+              <a:t>ComicCraft</a:t>
+            </a:r>
+          </a:p>
+        </p:txBody>
+      </p:sp>
+      <p:sp>
+        <p:nvSpPr>
+          <p:cNvPr id="9" name="TextBox 8"/>
+          <p:cNvSpPr txBox="1"/>
+          <p:nvPr/>
+        </p:nvSpPr>
+        <p:spPr>
+          <a:xfrm>
+            <a:off x="822960" y="2697480"/>
+            <a:ext cx="6766560" cy="530352"/>
+          </a:xfrm>
+          <a:prstGeom prst="rect">
+            <a:avLst/>
+          </a:prstGeom>
+          <a:noFill/>
+        </p:spPr>
+        <p:txBody>
+          <a:bodyPr wrap="square" anchor="t" lIns="36576" rIns="36576" tIns="18288" bIns="18288">
+            <a:spAutoFit/>
+          </a:bodyPr>
+          <a:lstStyle/>
+          <a:p>
+            <a:pPr algn="l"/>
+            <a:r>
+              <a:rPr sz="2300" b="1">
+                <a:solidFill>
+                  <a:srgbClr val="2DD4BF"/>
+                </a:solidFill>
+                <a:latin typeface="Calibri"/>
+              </a:rPr>
+              <a:t>AI Comic Story Creator Using Gemini Models</a:t>
+            </a:r>
+          </a:p>
+        </p:txBody>
+      </p:sp>
+      <p:sp>
+        <p:nvSpPr>
+          <p:cNvPr id="10" name="TextBox 9"/>
+          <p:cNvSpPr txBox="1"/>
+          <p:nvPr/>
+        </p:nvSpPr>
+        <p:spPr>
+          <a:xfrm>
+            <a:off x="822960" y="3364992"/>
+            <a:ext cx="6583680" cy="804672"/>
+          </a:xfrm>
+          <a:prstGeom prst="rect">
+            <a:avLst/>
+          </a:prstGeom>
+          <a:noFill/>
+        </p:spPr>
+        <p:txBody>
+          <a:bodyPr wrap="square" anchor="t" lIns="36576" rIns="36576" tIns="18288" bIns="18288">
+            <a:spAutoFit/>
+          </a:bodyPr>
+          <a:lstStyle/>
+          <a:p>
+            <a:pPr algn="l"/>
+            <a:r>
+              <a:rPr sz="1500" b="0">
+                <a:solidFill>
+                  <a:srgbClr val="E2E8F0"/>
+                </a:solidFill>
+                <a:latin typeface="Calibri"/>
+              </a:rPr>
+              <a:t>Turns a single story idea into a structured, illustrated comic book with live web preview and downloadable A4 PDF export.</a:t>
+            </a:r>
+          </a:p>
+        </p:txBody>
+      </p:sp>
+      <p:sp>
+        <p:nvSpPr>
+          <p:cNvPr id="11" name="Rounded Rectangle 10"/>
+          <p:cNvSpPr/>
+          <p:nvPr/>
+        </p:nvSpPr>
+        <p:spPr>
+          <a:xfrm>
+            <a:off x="822960" y="4462272"/>
+            <a:ext cx="1481328" cy="347472"/>
+          </a:xfrm>
+          <a:prstGeom prst="roundRect">
+            <a:avLst>
+              <a:gd name="adj" fmla="val 4000"/>
+            </a:avLst>
+          </a:prstGeom>
+          <a:solidFill>
+            <a:srgbClr val="1E293B"/>
+          </a:solidFill>
+          <a:ln w="11430">
+            <a:solidFill>
+              <a:srgbClr val="0D9488"/>
+            </a:solidFill>
+          </a:ln>
+        </p:spPr>
+        <p:style>
+          <a:lnRef idx="1">
+            <a:schemeClr val="accent1"/>
+          </a:lnRef>
+          <a:fillRef idx="3">
+            <a:schemeClr val="accent1"/>
+          </a:fillRef>
+          <a:effectRef idx="2">
+            <a:schemeClr val="accent1"/>
+          </a:effectRef>
+          <a:fontRef idx="minor">
+            <a:schemeClr val="lt1"/>
+          </a:fontRef>
+        </p:style>
+        <p:txBody>
+          <a:bodyPr rtlCol="0" anchor="ctr"/>
+          <a:lstStyle/>
+          <a:p>
+            <a:pPr algn="ctr"/>
+          </a:p>
+        </p:txBody>
+      </p:sp>
+      <p:sp>
+        <p:nvSpPr>
+          <p:cNvPr id="12" name="TextBox 11"/>
+          <p:cNvSpPr txBox="1"/>
+          <p:nvPr/>
+        </p:nvSpPr>
+        <p:spPr>
+          <a:xfrm>
+            <a:off x="822960" y="4462272"/>
+            <a:ext cx="1481328" cy="347472"/>
+          </a:xfrm>
+          <a:prstGeom prst="rect">
+            <a:avLst/>
+          </a:prstGeom>
+          <a:noFill/>
+        </p:spPr>
+        <p:txBody>
+          <a:bodyPr wrap="square" anchor="ctr" lIns="36576" rIns="36576" tIns="18288" bIns="18288">
+            <a:spAutoFit/>
+          </a:bodyPr>
+          <a:lstStyle/>
+          <a:p>
+            <a:pPr algn="ctr"/>
+            <a:r>
+              <a:rPr sz="1100" b="1">
+                <a:solidFill>
+                  <a:srgbClr val="2DD4BF"/>
+                </a:solidFill>
+                <a:latin typeface="Calibri"/>
+              </a:rPr>
+              <a:t>Python 3.11+</a:t>
+            </a:r>
+          </a:p>
+        </p:txBody>
+      </p:sp>
+      <p:sp>
+        <p:nvSpPr>
+          <p:cNvPr id="13" name="Rounded Rectangle 12"/>
+          <p:cNvSpPr/>
+          <p:nvPr/>
+        </p:nvSpPr>
+        <p:spPr>
+          <a:xfrm>
+            <a:off x="2450592" y="4462272"/>
+            <a:ext cx="1024128" cy="347472"/>
+          </a:xfrm>
+          <a:prstGeom prst="roundRect">
+            <a:avLst>
+              <a:gd name="adj" fmla="val 4000"/>
+            </a:avLst>
+          </a:prstGeom>
+          <a:solidFill>
+            <a:srgbClr val="1E293B"/>
+          </a:solidFill>
+          <a:ln w="11430">
+            <a:solidFill>
+              <a:srgbClr val="0D9488"/>
+            </a:solidFill>
+          </a:ln>
+        </p:spPr>
+        <p:style>
+          <a:lnRef idx="1">
+            <a:schemeClr val="accent1"/>
+          </a:lnRef>
+          <a:fillRef idx="3">
+            <a:schemeClr val="accent1"/>
+          </a:fillRef>
+          <a:effectRef idx="2">
+            <a:schemeClr val="accent1"/>
+          </a:effectRef>
+          <a:fontRef idx="minor">
+            <a:schemeClr val="lt1"/>
+          </a:fontRef>
+        </p:style>
+        <p:txBody>
+          <a:bodyPr rtlCol="0" anchor="ctr"/>
+          <a:lstStyle/>
+          <a:p>
+            <a:pPr algn="ctr"/>
+          </a:p>
+        </p:txBody>
+      </p:sp>
+      <p:sp>
+        <p:nvSpPr>
+          <p:cNvPr id="14" name="TextBox 13"/>
+          <p:cNvSpPr txBox="1"/>
+          <p:nvPr/>
+        </p:nvSpPr>
+        <p:spPr>
+          <a:xfrm>
+            <a:off x="2450592" y="4462272"/>
+            <a:ext cx="1024128" cy="347472"/>
+          </a:xfrm>
+          <a:prstGeom prst="rect">
+            <a:avLst/>
+          </a:prstGeom>
+          <a:noFill/>
+        </p:spPr>
+        <p:txBody>
+          <a:bodyPr wrap="square" anchor="ctr" lIns="36576" rIns="36576" tIns="18288" bIns="18288">
+            <a:spAutoFit/>
+          </a:bodyPr>
+          <a:lstStyle/>
+          <a:p>
+            <a:pPr algn="ctr"/>
+            <a:r>
+              <a:rPr sz="1100" b="1">
+                <a:solidFill>
+                  <a:srgbClr val="2DD4BF"/>
+                </a:solidFill>
+                <a:latin typeface="Calibri"/>
+              </a:rPr>
+              <a:t>FastAPI</a:t>
+            </a:r>
+          </a:p>
+        </p:txBody>
+      </p:sp>
+      <p:sp>
+        <p:nvSpPr>
+          <p:cNvPr id="15" name="Rounded Rectangle 14"/>
+          <p:cNvSpPr/>
+          <p:nvPr/>
+        </p:nvSpPr>
+        <p:spPr>
+          <a:xfrm>
+            <a:off x="3621024" y="4462272"/>
+            <a:ext cx="1847088" cy="347472"/>
+          </a:xfrm>
+          <a:prstGeom prst="roundRect">
+            <a:avLst>
+              <a:gd name="adj" fmla="val 4000"/>
+            </a:avLst>
+          </a:prstGeom>
+          <a:solidFill>
+            <a:srgbClr val="1E293B"/>
+          </a:solidFill>
+          <a:ln w="11430">
+            <a:solidFill>
+              <a:srgbClr val="0D9488"/>
+            </a:solidFill>
+          </a:ln>
+        </p:spPr>
+        <p:style>
+          <a:lnRef idx="1">
+            <a:schemeClr val="accent1"/>
+          </a:lnRef>
+          <a:fillRef idx="3">
+            <a:schemeClr val="accent1"/>
+          </a:fillRef>
+          <a:effectRef idx="2">
+            <a:schemeClr val="accent1"/>
+          </a:effectRef>
+          <a:fontRef idx="minor">
+            <a:schemeClr val="lt1"/>
+          </a:fontRef>
+        </p:style>
+        <p:txBody>
+          <a:bodyPr rtlCol="0" anchor="ctr"/>
+          <a:lstStyle/>
+          <a:p>
+            <a:pPr algn="ctr"/>
+          </a:p>
+        </p:txBody>
+      </p:sp>
+      <p:sp>
+        <p:nvSpPr>
+          <p:cNvPr id="16" name="TextBox 15"/>
+          <p:cNvSpPr txBox="1"/>
+          <p:nvPr/>
+        </p:nvSpPr>
+        <p:spPr>
+          <a:xfrm>
+            <a:off x="3621024" y="4462272"/>
+            <a:ext cx="1847088" cy="347472"/>
+          </a:xfrm>
+          <a:prstGeom prst="rect">
+            <a:avLst/>
+          </a:prstGeom>
+          <a:noFill/>
+        </p:spPr>
+        <p:txBody>
+          <a:bodyPr wrap="square" anchor="ctr" lIns="36576" rIns="36576" tIns="18288" bIns="18288">
+            <a:spAutoFit/>
+          </a:bodyPr>
+          <a:lstStyle/>
+          <a:p>
+            <a:pPr algn="ctr"/>
+            <a:r>
+              <a:rPr sz="1100" b="1">
+                <a:solidFill>
+                  <a:srgbClr val="2DD4BF"/>
+                </a:solidFill>
+                <a:latin typeface="Calibri"/>
+              </a:rPr>
+              <a:t>Google Gemini AI</a:t>
+            </a:r>
+          </a:p>
+        </p:txBody>
+      </p:sp>
+      <p:sp>
+        <p:nvSpPr>
+          <p:cNvPr id="17" name="Rounded Rectangle 16"/>
+          <p:cNvSpPr/>
+          <p:nvPr/>
+        </p:nvSpPr>
+        <p:spPr>
+          <a:xfrm>
+            <a:off x="822960" y="4919472"/>
+            <a:ext cx="1389888" cy="347472"/>
+          </a:xfrm>
+          <a:prstGeom prst="roundRect">
+            <a:avLst>
+              <a:gd name="adj" fmla="val 4000"/>
+            </a:avLst>
+          </a:prstGeom>
+          <a:solidFill>
+            <a:srgbClr val="1E293B"/>
+          </a:solidFill>
+          <a:ln w="11430">
+            <a:solidFill>
+              <a:srgbClr val="0D9488"/>
+            </a:solidFill>
+          </a:ln>
+        </p:spPr>
+        <p:style>
+          <a:lnRef idx="1">
+            <a:schemeClr val="accent1"/>
+          </a:lnRef>
+          <a:fillRef idx="3">
+            <a:schemeClr val="accent1"/>
+          </a:fillRef>
+          <a:effectRef idx="2">
+            <a:schemeClr val="accent1"/>
+          </a:effectRef>
+          <a:fontRef idx="minor">
+            <a:schemeClr val="lt1"/>
+          </a:fontRef>
+        </p:style>
+        <p:txBody>
+          <a:bodyPr rtlCol="0" anchor="ctr"/>
+          <a:lstStyle/>
+          <a:p>
+            <a:pPr algn="ctr"/>
+          </a:p>
+        </p:txBody>
+      </p:sp>
+      <p:sp>
+        <p:nvSpPr>
+          <p:cNvPr id="18" name="TextBox 17"/>
+          <p:cNvSpPr txBox="1"/>
+          <p:nvPr/>
+        </p:nvSpPr>
+        <p:spPr>
+          <a:xfrm>
+            <a:off x="822960" y="4919472"/>
+            <a:ext cx="1389888" cy="347472"/>
+          </a:xfrm>
+          <a:prstGeom prst="rect">
+            <a:avLst/>
+          </a:prstGeom>
+          <a:noFill/>
+        </p:spPr>
+        <p:txBody>
+          <a:bodyPr wrap="square" anchor="ctr" lIns="36576" rIns="36576" tIns="18288" bIns="18288">
+            <a:spAutoFit/>
+          </a:bodyPr>
+          <a:lstStyle/>
+          <a:p>
+            <a:pPr algn="ctr"/>
+            <a:r>
+              <a:rPr sz="1100" b="1">
+                <a:solidFill>
+                  <a:srgbClr val="2DD4BF"/>
+                </a:solidFill>
+                <a:latin typeface="Calibri"/>
+              </a:rPr>
+              <a:t>Pydantic v2</a:t>
+            </a:r>
+          </a:p>
+        </p:txBody>
+      </p:sp>
+      <p:sp>
+        <p:nvSpPr>
+          <p:cNvPr id="19" name="Rounded Rectangle 18"/>
+          <p:cNvSpPr/>
+          <p:nvPr/>
+        </p:nvSpPr>
+        <p:spPr>
+          <a:xfrm>
+            <a:off x="2359152" y="4919472"/>
+            <a:ext cx="1847088" cy="347472"/>
+          </a:xfrm>
+          <a:prstGeom prst="roundRect">
+            <a:avLst>
+              <a:gd name="adj" fmla="val 4000"/>
+            </a:avLst>
+          </a:prstGeom>
+          <a:solidFill>
+            <a:srgbClr val="1E293B"/>
+          </a:solidFill>
+          <a:ln w="11430">
+            <a:solidFill>
+              <a:srgbClr val="0D9488"/>
+            </a:solidFill>
+          </a:ln>
+        </p:spPr>
+        <p:style>
+          <a:lnRef idx="1">
+            <a:schemeClr val="accent1"/>
+          </a:lnRef>
+          <a:fillRef idx="3">
+            <a:schemeClr val="accent1"/>
+          </a:fillRef>
+          <a:effectRef idx="2">
+            <a:schemeClr val="accent1"/>
+          </a:effectRef>
+          <a:fontRef idx="minor">
+            <a:schemeClr val="lt1"/>
+          </a:fontRef>
+        </p:style>
+        <p:txBody>
+          <a:bodyPr rtlCol="0" anchor="ctr"/>
+          <a:lstStyle/>
+          <a:p>
+            <a:pPr algn="ctr"/>
+          </a:p>
+        </p:txBody>
+      </p:sp>
+      <p:sp>
+        <p:nvSpPr>
+          <p:cNvPr id="20" name="TextBox 19"/>
+          <p:cNvSpPr txBox="1"/>
+          <p:nvPr/>
+        </p:nvSpPr>
+        <p:spPr>
+          <a:xfrm>
+            <a:off x="2359152" y="4919472"/>
+            <a:ext cx="1847088" cy="347472"/>
+          </a:xfrm>
+          <a:prstGeom prst="rect">
+            <a:avLst/>
+          </a:prstGeom>
+          <a:noFill/>
+        </p:spPr>
+        <p:txBody>
+          <a:bodyPr wrap="square" anchor="ctr" lIns="36576" rIns="36576" tIns="18288" bIns="18288">
+            <a:spAutoFit/>
+          </a:bodyPr>
+          <a:lstStyle/>
+          <a:p>
+            <a:pPr algn="ctr"/>
+            <a:r>
+              <a:rPr sz="1100" b="1">
+                <a:solidFill>
+                  <a:srgbClr val="2DD4BF"/>
+                </a:solidFill>
+                <a:latin typeface="Calibri"/>
+              </a:rPr>
+              <a:t>SDXL / Diffusers</a:t>
+            </a:r>
+          </a:p>
+        </p:txBody>
+      </p:sp>
+      <p:sp>
+        <p:nvSpPr>
+          <p:cNvPr id="21" name="Rounded Rectangle 20"/>
+          <p:cNvSpPr/>
+          <p:nvPr/>
+        </p:nvSpPr>
+        <p:spPr>
+          <a:xfrm>
+            <a:off x="4352544" y="4919472"/>
+            <a:ext cx="1847088" cy="347472"/>
+          </a:xfrm>
+          <a:prstGeom prst="roundRect">
+            <a:avLst>
+              <a:gd name="adj" fmla="val 4000"/>
+            </a:avLst>
+          </a:prstGeom>
+          <a:solidFill>
+            <a:srgbClr val="1E293B"/>
+          </a:solidFill>
+          <a:ln w="11430">
+            <a:solidFill>
+              <a:srgbClr val="0D9488"/>
+            </a:solidFill>
+          </a:ln>
+        </p:spPr>
+        <p:style>
+          <a:lnRef idx="1">
+            <a:schemeClr val="accent1"/>
+          </a:lnRef>
+          <a:fillRef idx="3">
+            <a:schemeClr val="accent1"/>
+          </a:fillRef>
+          <a:effectRef idx="2">
+            <a:schemeClr val="accent1"/>
+          </a:effectRef>
+          <a:fontRef idx="minor">
+            <a:schemeClr val="lt1"/>
+          </a:fontRef>
+        </p:style>
+        <p:txBody>
+          <a:bodyPr rtlCol="0" anchor="ctr"/>
+          <a:lstStyle/>
+          <a:p>
+            <a:pPr algn="ctr"/>
+          </a:p>
+        </p:txBody>
+      </p:sp>
+      <p:sp>
+        <p:nvSpPr>
+          <p:cNvPr id="22" name="TextBox 21"/>
+          <p:cNvSpPr txBox="1"/>
+          <p:nvPr/>
+        </p:nvSpPr>
+        <p:spPr>
+          <a:xfrm>
+            <a:off x="4352544" y="4919472"/>
+            <a:ext cx="1847088" cy="347472"/>
+          </a:xfrm>
+          <a:prstGeom prst="rect">
+            <a:avLst/>
+          </a:prstGeom>
+          <a:noFill/>
+        </p:spPr>
+        <p:txBody>
+          <a:bodyPr wrap="square" anchor="ctr" lIns="36576" rIns="36576" tIns="18288" bIns="18288">
+            <a:spAutoFit/>
+          </a:bodyPr>
+          <a:lstStyle/>
+          <a:p>
+            <a:pPr algn="ctr"/>
+            <a:r>
+              <a:rPr sz="1100" b="1">
+                <a:solidFill>
+                  <a:srgbClr val="2DD4BF"/>
+                </a:solidFill>
+                <a:latin typeface="Calibri"/>
+              </a:rPr>
+              <a:t>fpdf2 PDF Export</a:t>
+            </a:r>
+          </a:p>
+        </p:txBody>
+      </p:sp>
+      <p:sp>
+        <p:nvSpPr>
+          <p:cNvPr id="23" name="Rounded Rectangle 22"/>
+          <p:cNvSpPr/>
+          <p:nvPr/>
+        </p:nvSpPr>
+        <p:spPr>
+          <a:xfrm>
+            <a:off x="8001000" y="1143000"/>
+            <a:ext cx="3566160" cy="4526280"/>
           </a:xfrm>
           <a:prstGeom prst="roundRect">
             <a:avLst>
@@ -4400,14 +5159,14 @@
       </p:sp>
       <p:sp>
         <p:nvSpPr>
-          <p:cNvPr id="5" name="TextBox 4"/>
+          <p:cNvPr id="24" name="TextBox 23"/>
           <p:cNvSpPr txBox="1"/>
           <p:nvPr/>
         </p:nvSpPr>
         <p:spPr>
           <a:xfrm>
-            <a:off x="8366760" y="1280160"/>
-            <a:ext cx="2971800" cy="320040"/>
+            <a:off x="8275320" y="1371600"/>
+            <a:ext cx="3017520" cy="320040"/>
           </a:xfrm>
           <a:prstGeom prst="rect">
             <a:avLst/>
@@ -4422,27 +5181,27 @@
           <a:p>
             <a:pPr algn="l"/>
             <a:r>
-              <a:rPr sz="1100" b="1">
+              <a:rPr sz="1150" b="1">
                 <a:solidFill>
                   <a:srgbClr val="F59E0B"/>
                 </a:solidFill>
                 <a:latin typeface="Calibri"/>
               </a:rPr>
-              <a:t>END-TO-END AI PIPELINE</a:t>
-            </a:r>
-          </a:p>
-        </p:txBody>
-      </p:sp>
-      <p:sp>
-        <p:nvSpPr>
-          <p:cNvPr id="6" name="Rounded Rectangle 5"/>
+              <a:t>HOW COMICCRAFT WORKS</a:t>
+            </a:r>
+          </a:p>
+        </p:txBody>
+      </p:sp>
+      <p:sp>
+        <p:nvSpPr>
+          <p:cNvPr id="25" name="Rounded Rectangle 24"/>
           <p:cNvSpPr/>
           <p:nvPr/>
         </p:nvSpPr>
         <p:spPr>
           <a:xfrm>
-            <a:off x="8366760" y="1755648"/>
-            <a:ext cx="2971800" cy="749808"/>
+            <a:off x="8275320" y="1865376"/>
+            <a:ext cx="3017520" cy="804672"/>
           </a:xfrm>
           <a:prstGeom prst="roundRect">
             <a:avLst>
@@ -4482,13 +5241,13 @@
       </p:sp>
       <p:sp>
         <p:nvSpPr>
-          <p:cNvPr id="7" name="Rounded Rectangle 6"/>
+          <p:cNvPr id="26" name="Rounded Rectangle 25"/>
           <p:cNvSpPr/>
           <p:nvPr/>
         </p:nvSpPr>
         <p:spPr>
           <a:xfrm>
-            <a:off x="8485632" y="1901952"/>
+            <a:off x="8412480" y="2039112"/>
             <a:ext cx="457200" cy="457200"/>
           </a:xfrm>
           <a:prstGeom prst="roundRect">
@@ -4527,13 +5286,13 @@
       </p:sp>
       <p:sp>
         <p:nvSpPr>
-          <p:cNvPr id="8" name="TextBox 7"/>
+          <p:cNvPr id="27" name="TextBox 26"/>
           <p:cNvSpPr txBox="1"/>
           <p:nvPr/>
         </p:nvSpPr>
         <p:spPr>
           <a:xfrm>
-            <a:off x="8485632" y="1901952"/>
+            <a:off x="8412480" y="2039112"/>
             <a:ext cx="457200" cy="457200"/>
           </a:xfrm>
           <a:prstGeom prst="rect">
@@ -4562,14 +5321,14 @@
       </p:sp>
       <p:sp>
         <p:nvSpPr>
-          <p:cNvPr id="9" name="TextBox 8"/>
+          <p:cNvPr id="28" name="TextBox 27"/>
           <p:cNvSpPr txBox="1"/>
           <p:nvPr/>
         </p:nvSpPr>
         <p:spPr>
           <a:xfrm>
-            <a:off x="9052560" y="1874519"/>
-            <a:ext cx="2194560" cy="274320"/>
+            <a:off x="9006840" y="2002536"/>
+            <a:ext cx="2148840" cy="274320"/>
           </a:xfrm>
           <a:prstGeom prst="rect">
             <a:avLst/>
@@ -4584,27 +5343,27 @@
           <a:p>
             <a:pPr algn="l"/>
             <a:r>
-              <a:rPr sz="1250" b="1">
+              <a:rPr sz="1300" b="1">
                 <a:solidFill>
                   <a:srgbClr val="FFFFFF"/>
                 </a:solidFill>
                 <a:latin typeface="Calibri"/>
               </a:rPr>
-              <a:t>Story Brief Input</a:t>
-            </a:r>
-          </a:p>
-        </p:txBody>
-      </p:sp>
-      <p:sp>
-        <p:nvSpPr>
-          <p:cNvPr id="10" name="TextBox 9"/>
+              <a:t>Plan Story</a:t>
+            </a:r>
+          </a:p>
+        </p:txBody>
+      </p:sp>
+      <p:sp>
+        <p:nvSpPr>
+          <p:cNvPr id="29" name="TextBox 28"/>
           <p:cNvSpPr txBox="1"/>
           <p:nvPr/>
         </p:nvSpPr>
         <p:spPr>
           <a:xfrm>
-            <a:off x="9052560" y="2148840"/>
-            <a:ext cx="2194560" cy="256032"/>
+            <a:off x="9006840" y="2286000"/>
+            <a:ext cx="2148840" cy="256032"/>
           </a:xfrm>
           <a:prstGeom prst="rect">
             <a:avLst/>
@@ -4619,27 +5378,27 @@
           <a:p>
             <a:pPr algn="l"/>
             <a:r>
-              <a:rPr sz="1000" b="0">
+              <a:rPr sz="1050" b="0">
                 <a:solidFill>
                   <a:srgbClr val="64748B"/>
                 </a:solidFill>
                 <a:latin typeface="Calibri"/>
               </a:rPr>
-              <a:t>Idea, Hero, Tone, 3–8 Panels</a:t>
-            </a:r>
-          </a:p>
-        </p:txBody>
-      </p:sp>
-      <p:sp>
-        <p:nvSpPr>
-          <p:cNvPr id="11" name="Rounded Rectangle 10"/>
+              <a:t>Outline &amp; Character Bible</a:t>
+            </a:r>
+          </a:p>
+        </p:txBody>
+      </p:sp>
+      <p:sp>
+        <p:nvSpPr>
+          <p:cNvPr id="30" name="Rounded Rectangle 29"/>
           <p:cNvSpPr/>
           <p:nvPr/>
         </p:nvSpPr>
         <p:spPr>
           <a:xfrm>
-            <a:off x="8366760" y="2633472"/>
-            <a:ext cx="2971800" cy="749808"/>
+            <a:off x="8275320" y="2779776"/>
+            <a:ext cx="3017520" cy="804672"/>
           </a:xfrm>
           <a:prstGeom prst="roundRect">
             <a:avLst>
@@ -4679,13 +5438,13 @@
       </p:sp>
       <p:sp>
         <p:nvSpPr>
-          <p:cNvPr id="12" name="Rounded Rectangle 11"/>
+          <p:cNvPr id="31" name="Rounded Rectangle 30"/>
           <p:cNvSpPr/>
           <p:nvPr/>
         </p:nvSpPr>
         <p:spPr>
           <a:xfrm>
-            <a:off x="8485632" y="2779776"/>
+            <a:off x="8412480" y="2953512"/>
             <a:ext cx="457200" cy="457200"/>
           </a:xfrm>
           <a:prstGeom prst="roundRect">
@@ -4724,13 +5483,13 @@
       </p:sp>
       <p:sp>
         <p:nvSpPr>
-          <p:cNvPr id="13" name="TextBox 12"/>
+          <p:cNvPr id="32" name="TextBox 31"/>
           <p:cNvSpPr txBox="1"/>
           <p:nvPr/>
         </p:nvSpPr>
         <p:spPr>
           <a:xfrm>
-            <a:off x="8485632" y="2779776"/>
+            <a:off x="8412480" y="2953512"/>
             <a:ext cx="457200" cy="457200"/>
           </a:xfrm>
           <a:prstGeom prst="rect">
@@ -4759,14 +5518,14 @@
       </p:sp>
       <p:sp>
         <p:nvSpPr>
-          <p:cNvPr id="14" name="TextBox 13"/>
+          <p:cNvPr id="33" name="TextBox 32"/>
           <p:cNvSpPr txBox="1"/>
           <p:nvPr/>
         </p:nvSpPr>
         <p:spPr>
           <a:xfrm>
-            <a:off x="9052560" y="2752344"/>
-            <a:ext cx="2194560" cy="274320"/>
+            <a:off x="9006840" y="2916936"/>
+            <a:ext cx="2148840" cy="274320"/>
           </a:xfrm>
           <a:prstGeom prst="rect">
             <a:avLst/>
@@ -4781,27 +5540,27 @@
           <a:p>
             <a:pPr algn="l"/>
             <a:r>
-              <a:rPr sz="1250" b="1">
+              <a:rPr sz="1300" b="1">
                 <a:solidFill>
                   <a:srgbClr val="FFFFFF"/>
                 </a:solidFill>
                 <a:latin typeface="Calibri"/>
               </a:rPr>
-              <a:t>2-Stage Gemini JSON</a:t>
-            </a:r>
-          </a:p>
-        </p:txBody>
-      </p:sp>
-      <p:sp>
-        <p:nvSpPr>
-          <p:cNvPr id="15" name="TextBox 14"/>
+              <a:t>Write Script</a:t>
+            </a:r>
+          </a:p>
+        </p:txBody>
+      </p:sp>
+      <p:sp>
+        <p:nvSpPr>
+          <p:cNvPr id="34" name="TextBox 33"/>
           <p:cNvSpPr txBox="1"/>
           <p:nvPr/>
         </p:nvSpPr>
         <p:spPr>
           <a:xfrm>
-            <a:off x="9052560" y="3026664"/>
-            <a:ext cx="2194560" cy="256032"/>
+            <a:off x="9006840" y="3200400"/>
+            <a:ext cx="2148840" cy="256032"/>
           </a:xfrm>
           <a:prstGeom prst="rect">
             <a:avLst/>
@@ -4816,27 +5575,27 @@
           <a:p>
             <a:pPr algn="l"/>
             <a:r>
-              <a:rPr sz="1000" b="0">
+              <a:rPr sz="1050" b="0">
                 <a:solidFill>
                   <a:srgbClr val="64748B"/>
                 </a:solidFill>
                 <a:latin typeface="Calibri"/>
               </a:rPr>
-              <a:t>Outline + Character Bible + Script</a:t>
-            </a:r>
-          </a:p>
-        </p:txBody>
-      </p:sp>
-      <p:sp>
-        <p:nvSpPr>
-          <p:cNvPr id="16" name="Rounded Rectangle 15"/>
+              <a:t>Captions &amp; Dialogues</a:t>
+            </a:r>
+          </a:p>
+        </p:txBody>
+      </p:sp>
+      <p:sp>
+        <p:nvSpPr>
+          <p:cNvPr id="35" name="Rounded Rectangle 34"/>
           <p:cNvSpPr/>
           <p:nvPr/>
         </p:nvSpPr>
         <p:spPr>
           <a:xfrm>
-            <a:off x="8366760" y="3511296"/>
-            <a:ext cx="2971800" cy="749808"/>
+            <a:off x="8275320" y="3694176"/>
+            <a:ext cx="3017520" cy="804672"/>
           </a:xfrm>
           <a:prstGeom prst="roundRect">
             <a:avLst>
@@ -4876,13 +5635,13 @@
       </p:sp>
       <p:sp>
         <p:nvSpPr>
-          <p:cNvPr id="17" name="Rounded Rectangle 16"/>
+          <p:cNvPr id="36" name="Rounded Rectangle 35"/>
           <p:cNvSpPr/>
           <p:nvPr/>
         </p:nvSpPr>
         <p:spPr>
           <a:xfrm>
-            <a:off x="8485632" y="3657600"/>
+            <a:off x="8412480" y="3867912"/>
             <a:ext cx="457200" cy="457200"/>
           </a:xfrm>
           <a:prstGeom prst="roundRect">
@@ -4921,13 +5680,13 @@
       </p:sp>
       <p:sp>
         <p:nvSpPr>
-          <p:cNvPr id="18" name="TextBox 17"/>
+          <p:cNvPr id="37" name="TextBox 36"/>
           <p:cNvSpPr txBox="1"/>
           <p:nvPr/>
         </p:nvSpPr>
         <p:spPr>
           <a:xfrm>
-            <a:off x="8485632" y="3657600"/>
+            <a:off x="8412480" y="3867912"/>
             <a:ext cx="457200" cy="457200"/>
           </a:xfrm>
           <a:prstGeom prst="rect">
@@ -4956,14 +5715,14 @@
       </p:sp>
       <p:sp>
         <p:nvSpPr>
-          <p:cNvPr id="19" name="TextBox 18"/>
+          <p:cNvPr id="38" name="TextBox 37"/>
           <p:cNvSpPr txBox="1"/>
           <p:nvPr/>
         </p:nvSpPr>
         <p:spPr>
           <a:xfrm>
-            <a:off x="9052560" y="3630168"/>
-            <a:ext cx="2194560" cy="274320"/>
+            <a:off x="9006840" y="3831336"/>
+            <a:ext cx="2148840" cy="274320"/>
           </a:xfrm>
           <a:prstGeom prst="rect">
             <a:avLst/>
@@ -4978,27 +5737,27 @@
           <a:p>
             <a:pPr algn="l"/>
             <a:r>
-              <a:rPr sz="1250" b="1">
+              <a:rPr sz="1300" b="1">
                 <a:solidFill>
                   <a:srgbClr val="FFFFFF"/>
                 </a:solidFill>
                 <a:latin typeface="Calibri"/>
               </a:rPr>
-              <a:t>Pluggable Panel Art</a:t>
-            </a:r>
-          </a:p>
-        </p:txBody>
-      </p:sp>
-      <p:sp>
-        <p:nvSpPr>
-          <p:cNvPr id="20" name="TextBox 19"/>
+              <a:t>Draw Panels</a:t>
+            </a:r>
+          </a:p>
+        </p:txBody>
+      </p:sp>
+      <p:sp>
+        <p:nvSpPr>
+          <p:cNvPr id="39" name="TextBox 38"/>
           <p:cNvSpPr txBox="1"/>
           <p:nvPr/>
         </p:nvSpPr>
         <p:spPr>
           <a:xfrm>
-            <a:off x="9052560" y="3904487"/>
-            <a:ext cx="2194560" cy="256032"/>
+            <a:off x="9006840" y="4114800"/>
+            <a:ext cx="2148840" cy="256032"/>
           </a:xfrm>
           <a:prstGeom prst="rect">
             <a:avLst/>
@@ -5013,27 +5772,27 @@
           <a:p>
             <a:pPr algn="l"/>
             <a:r>
-              <a:rPr sz="1000" b="0">
+              <a:rPr sz="1050" b="0">
                 <a:solidFill>
                   <a:srgbClr val="64748B"/>
                 </a:solidFill>
                 <a:latin typeface="Calibri"/>
               </a:rPr>
-              <a:t>Placeholder / HF SDXL / Diffusers</a:t>
-            </a:r>
-          </a:p>
-        </p:txBody>
-      </p:sp>
-      <p:sp>
-        <p:nvSpPr>
-          <p:cNvPr id="21" name="Rounded Rectangle 20"/>
+              <a:t>AI or Placeholder Artwork</a:t>
+            </a:r>
+          </a:p>
+        </p:txBody>
+      </p:sp>
+      <p:sp>
+        <p:nvSpPr>
+          <p:cNvPr id="40" name="Rounded Rectangle 39"/>
           <p:cNvSpPr/>
           <p:nvPr/>
         </p:nvSpPr>
         <p:spPr>
           <a:xfrm>
-            <a:off x="8366760" y="4389120"/>
-            <a:ext cx="2971800" cy="749808"/>
+            <a:off x="8275320" y="4608576"/>
+            <a:ext cx="3017520" cy="804672"/>
           </a:xfrm>
           <a:prstGeom prst="roundRect">
             <a:avLst>
@@ -5073,13 +5832,13 @@
       </p:sp>
       <p:sp>
         <p:nvSpPr>
-          <p:cNvPr id="22" name="Rounded Rectangle 21"/>
+          <p:cNvPr id="41" name="Rounded Rectangle 40"/>
           <p:cNvSpPr/>
           <p:nvPr/>
         </p:nvSpPr>
         <p:spPr>
           <a:xfrm>
-            <a:off x="8485632" y="4535424"/>
+            <a:off x="8412480" y="4782312"/>
             <a:ext cx="457200" cy="457200"/>
           </a:xfrm>
           <a:prstGeom prst="roundRect">
@@ -5118,13 +5877,13 @@
       </p:sp>
       <p:sp>
         <p:nvSpPr>
-          <p:cNvPr id="23" name="TextBox 22"/>
+          <p:cNvPr id="42" name="TextBox 41"/>
           <p:cNvSpPr txBox="1"/>
           <p:nvPr/>
         </p:nvSpPr>
         <p:spPr>
           <a:xfrm>
-            <a:off x="8485632" y="4535424"/>
+            <a:off x="8412480" y="4782312"/>
             <a:ext cx="457200" cy="457200"/>
           </a:xfrm>
           <a:prstGeom prst="rect">
@@ -5153,14 +5912,14 @@
       </p:sp>
       <p:sp>
         <p:nvSpPr>
-          <p:cNvPr id="24" name="TextBox 23"/>
+          <p:cNvPr id="43" name="TextBox 42"/>
           <p:cNvSpPr txBox="1"/>
           <p:nvPr/>
         </p:nvSpPr>
         <p:spPr>
           <a:xfrm>
-            <a:off x="9052560" y="4507992"/>
-            <a:ext cx="2194560" cy="274320"/>
+            <a:off x="9006840" y="4745736"/>
+            <a:ext cx="2148840" cy="274320"/>
           </a:xfrm>
           <a:prstGeom prst="rect">
             <a:avLst/>
@@ -5175,27 +5934,27 @@
           <a:p>
             <a:pPr algn="l"/>
             <a:r>
-              <a:rPr sz="1250" b="1">
+              <a:rPr sz="1300" b="1">
                 <a:solidFill>
                   <a:srgbClr val="FFFFFF"/>
                 </a:solidFill>
                 <a:latin typeface="Calibri"/>
               </a:rPr>
-              <a:t>Web &amp; A4 PDF Export</a:t>
-            </a:r>
-          </a:p>
-        </p:txBody>
-      </p:sp>
-      <p:sp>
-        <p:nvSpPr>
-          <p:cNvPr id="25" name="TextBox 24"/>
+              <a:t>Export PDF</a:t>
+            </a:r>
+          </a:p>
+        </p:txBody>
+      </p:sp>
+      <p:sp>
+        <p:nvSpPr>
+          <p:cNvPr id="44" name="TextBox 43"/>
           <p:cNvSpPr txBox="1"/>
           <p:nvPr/>
         </p:nvSpPr>
         <p:spPr>
           <a:xfrm>
-            <a:off x="9052560" y="4782312"/>
-            <a:ext cx="2194560" cy="256032"/>
+            <a:off x="9006840" y="5029200"/>
+            <a:ext cx="2148840" cy="256032"/>
           </a:xfrm>
           <a:prstGeom prst="rect">
             <a:avLst/>
@@ -5210,889 +5969,13 @@
           <a:p>
             <a:pPr algn="l"/>
             <a:r>
-              <a:rPr sz="1000" b="0">
+              <a:rPr sz="1050" b="0">
                 <a:solidFill>
                   <a:srgbClr val="64748B"/>
                 </a:solidFill>
                 <a:latin typeface="Calibri"/>
               </a:rPr>
-              <a:t>UUID Workspace + fpdf2 Output</a:t>
-            </a:r>
-          </a:p>
-        </p:txBody>
-      </p:sp>
-      <p:sp>
-        <p:nvSpPr>
-          <p:cNvPr id="26" name="Rounded Rectangle 25"/>
-          <p:cNvSpPr/>
-          <p:nvPr/>
-        </p:nvSpPr>
-        <p:spPr>
-          <a:xfrm>
-            <a:off x="777240" y="960120"/>
-            <a:ext cx="4160520" cy="365760"/>
-          </a:xfrm>
-          <a:prstGeom prst="roundRect">
-            <a:avLst>
-              <a:gd name="adj" fmla="val 4000"/>
-            </a:avLst>
-          </a:prstGeom>
-          <a:solidFill>
-            <a:srgbClr val="1E293B"/>
-          </a:solidFill>
-          <a:ln w="12700">
-            <a:solidFill>
-              <a:srgbClr val="F59E0B"/>
-            </a:solidFill>
-          </a:ln>
-        </p:spPr>
-        <p:style>
-          <a:lnRef idx="1">
-            <a:schemeClr val="accent1"/>
-          </a:lnRef>
-          <a:fillRef idx="3">
-            <a:schemeClr val="accent1"/>
-          </a:fillRef>
-          <a:effectRef idx="2">
-            <a:schemeClr val="accent1"/>
-          </a:effectRef>
-          <a:fontRef idx="minor">
-            <a:schemeClr val="lt1"/>
-          </a:fontRef>
-        </p:style>
-        <p:txBody>
-          <a:bodyPr rtlCol="0" anchor="ctr"/>
-          <a:lstStyle/>
-          <a:p>
-            <a:pPr algn="ctr"/>
-          </a:p>
-        </p:txBody>
-      </p:sp>
-      <p:sp>
-        <p:nvSpPr>
-          <p:cNvPr id="27" name="TextBox 26"/>
-          <p:cNvSpPr txBox="1"/>
-          <p:nvPr/>
-        </p:nvSpPr>
-        <p:spPr>
-          <a:xfrm>
-            <a:off x="777240" y="960120"/>
-            <a:ext cx="4160520" cy="365760"/>
-          </a:xfrm>
-          <a:prstGeom prst="rect">
-            <a:avLst/>
-          </a:prstGeom>
-          <a:noFill/>
-        </p:spPr>
-        <p:txBody>
-          <a:bodyPr wrap="square" anchor="ctr" lIns="36576" rIns="36576" tIns="18288" bIns="18288">
-            <a:spAutoFit/>
-          </a:bodyPr>
-          <a:lstStyle/>
-          <a:p>
-            <a:pPr algn="ctr"/>
-            <a:r>
-              <a:rPr sz="1100" b="1">
-                <a:solidFill>
-                  <a:srgbClr val="F59E0B"/>
-                </a:solidFill>
-                <a:latin typeface="Calibri"/>
-              </a:rPr>
-              <a:t>NAAN MUDHALVAN  •  PROJECT PRACTICAL &amp; VIVA</a:t>
-            </a:r>
-          </a:p>
-        </p:txBody>
-      </p:sp>
-      <p:sp>
-        <p:nvSpPr>
-          <p:cNvPr id="28" name="Rounded Rectangle 27"/>
-          <p:cNvSpPr/>
-          <p:nvPr/>
-        </p:nvSpPr>
-        <p:spPr>
-          <a:xfrm>
-            <a:off x="777240" y="1627632"/>
-            <a:ext cx="713232" cy="713232"/>
-          </a:xfrm>
-          <a:prstGeom prst="roundRect">
-            <a:avLst>
-              <a:gd name="adj" fmla="val 4000"/>
-            </a:avLst>
-          </a:prstGeom>
-          <a:solidFill>
-            <a:srgbClr val="F59E0B"/>
-          </a:solidFill>
-          <a:ln>
-            <a:noFill/>
-          </a:ln>
-        </p:spPr>
-        <p:style>
-          <a:lnRef idx="1">
-            <a:schemeClr val="accent1"/>
-          </a:lnRef>
-          <a:fillRef idx="3">
-            <a:schemeClr val="accent1"/>
-          </a:fillRef>
-          <a:effectRef idx="2">
-            <a:schemeClr val="accent1"/>
-          </a:effectRef>
-          <a:fontRef idx="minor">
-            <a:schemeClr val="lt1"/>
-          </a:fontRef>
-        </p:style>
-        <p:txBody>
-          <a:bodyPr rtlCol="0" anchor="ctr"/>
-          <a:lstStyle/>
-          <a:p>
-            <a:pPr algn="ctr"/>
-          </a:p>
-        </p:txBody>
-      </p:sp>
-      <p:sp>
-        <p:nvSpPr>
-          <p:cNvPr id="29" name="TextBox 28"/>
-          <p:cNvSpPr txBox="1"/>
-          <p:nvPr/>
-        </p:nvSpPr>
-        <p:spPr>
-          <a:xfrm>
-            <a:off x="777240" y="1627632"/>
-            <a:ext cx="713232" cy="713232"/>
-          </a:xfrm>
-          <a:prstGeom prst="rect">
-            <a:avLst/>
-          </a:prstGeom>
-          <a:noFill/>
-        </p:spPr>
-        <p:txBody>
-          <a:bodyPr wrap="square" anchor="ctr" lIns="36576" rIns="36576" tIns="18288" bIns="18288">
-            <a:spAutoFit/>
-          </a:bodyPr>
-          <a:lstStyle/>
-          <a:p>
-            <a:pPr algn="ctr"/>
-            <a:r>
-              <a:rPr sz="2600" b="1">
-                <a:solidFill>
-                  <a:srgbClr val="0F172A"/>
-                </a:solidFill>
-                <a:latin typeface="Calibri"/>
-              </a:rPr>
-              <a:t>C!</a:t>
-            </a:r>
-          </a:p>
-        </p:txBody>
-      </p:sp>
-      <p:sp>
-        <p:nvSpPr>
-          <p:cNvPr id="30" name="TextBox 29"/>
-          <p:cNvSpPr txBox="1"/>
-          <p:nvPr/>
-        </p:nvSpPr>
-        <p:spPr>
-          <a:xfrm>
-            <a:off x="1645920" y="1554480"/>
-            <a:ext cx="6126480" cy="822960"/>
-          </a:xfrm>
-          <a:prstGeom prst="rect">
-            <a:avLst/>
-          </a:prstGeom>
-          <a:noFill/>
-        </p:spPr>
-        <p:txBody>
-          <a:bodyPr wrap="square" anchor="t" lIns="36576" rIns="36576" tIns="18288" bIns="18288">
-            <a:spAutoFit/>
-          </a:bodyPr>
-          <a:lstStyle/>
-          <a:p>
-            <a:pPr algn="l"/>
-            <a:r>
-              <a:rPr sz="4600" b="1">
-                <a:solidFill>
-                  <a:srgbClr val="FFFFFF"/>
-                </a:solidFill>
-                <a:latin typeface="Calibri"/>
-              </a:rPr>
-              <a:t>ComicCraft</a:t>
-            </a:r>
-          </a:p>
-        </p:txBody>
-      </p:sp>
-      <p:sp>
-        <p:nvSpPr>
-          <p:cNvPr id="31" name="TextBox 30"/>
-          <p:cNvSpPr txBox="1"/>
-          <p:nvPr/>
-        </p:nvSpPr>
-        <p:spPr>
-          <a:xfrm>
-            <a:off x="777240" y="2450592"/>
-            <a:ext cx="6949440" cy="548640"/>
-          </a:xfrm>
-          <a:prstGeom prst="rect">
-            <a:avLst/>
-          </a:prstGeom>
-          <a:noFill/>
-        </p:spPr>
-        <p:txBody>
-          <a:bodyPr wrap="square" anchor="t" lIns="36576" rIns="36576" tIns="18288" bIns="18288">
-            <a:spAutoFit/>
-          </a:bodyPr>
-          <a:lstStyle/>
-          <a:p>
-            <a:pPr algn="l"/>
-            <a:r>
-              <a:rPr sz="2300" b="1">
-                <a:solidFill>
-                  <a:srgbClr val="2DD4BF"/>
-                </a:solidFill>
-                <a:latin typeface="Calibri"/>
-              </a:rPr>
-              <a:t>AI Comic Story Creator Using Gemini Models</a:t>
-            </a:r>
-          </a:p>
-        </p:txBody>
-      </p:sp>
-      <p:sp>
-        <p:nvSpPr>
-          <p:cNvPr id="32" name="TextBox 31"/>
-          <p:cNvSpPr txBox="1"/>
-          <p:nvPr/>
-        </p:nvSpPr>
-        <p:spPr>
-          <a:xfrm>
-            <a:off x="777240" y="3127248"/>
-            <a:ext cx="6858000" cy="868680"/>
-          </a:xfrm>
-          <a:prstGeom prst="rect">
-            <a:avLst/>
-          </a:prstGeom>
-          <a:noFill/>
-        </p:spPr>
-        <p:txBody>
-          <a:bodyPr wrap="square" anchor="t" lIns="36576" rIns="36576" tIns="18288" bIns="18288">
-            <a:spAutoFit/>
-          </a:bodyPr>
-          <a:lstStyle/>
-          <a:p>
-            <a:pPr algn="l"/>
-            <a:r>
-              <a:rPr sz="1400" b="0">
-                <a:solidFill>
-                  <a:srgbClr val="E2E8F0"/>
-                </a:solidFill>
-                <a:latin typeface="Calibri"/>
-              </a:rPr>
-              <a:t>A resilient FastAPI web application that converts a short story brief into a structured, visually consistent multi-panel comic book with responsive browser preview, REST JSON API, and downloadable A4 PDF export.</a:t>
-            </a:r>
-          </a:p>
-        </p:txBody>
-      </p:sp>
-      <p:sp>
-        <p:nvSpPr>
-          <p:cNvPr id="33" name="Rounded Rectangle 32"/>
-          <p:cNvSpPr/>
-          <p:nvPr/>
-        </p:nvSpPr>
-        <p:spPr>
-          <a:xfrm>
-            <a:off x="777240" y="4160520"/>
-            <a:ext cx="1422806" cy="347472"/>
-          </a:xfrm>
-          <a:prstGeom prst="roundRect">
-            <a:avLst>
-              <a:gd name="adj" fmla="val 4000"/>
-            </a:avLst>
-          </a:prstGeom>
-          <a:solidFill>
-            <a:srgbClr val="1E293B"/>
-          </a:solidFill>
-          <a:ln w="11430">
-            <a:solidFill>
-              <a:srgbClr val="0D9488"/>
-            </a:solidFill>
-          </a:ln>
-        </p:spPr>
-        <p:style>
-          <a:lnRef idx="1">
-            <a:schemeClr val="accent1"/>
-          </a:lnRef>
-          <a:fillRef idx="3">
-            <a:schemeClr val="accent1"/>
-          </a:fillRef>
-          <a:effectRef idx="2">
-            <a:schemeClr val="accent1"/>
-          </a:effectRef>
-          <a:fontRef idx="minor">
-            <a:schemeClr val="lt1"/>
-          </a:fontRef>
-        </p:style>
-        <p:txBody>
-          <a:bodyPr rtlCol="0" anchor="ctr"/>
-          <a:lstStyle/>
-          <a:p>
-            <a:pPr algn="ctr"/>
-          </a:p>
-        </p:txBody>
-      </p:sp>
-      <p:sp>
-        <p:nvSpPr>
-          <p:cNvPr id="34" name="TextBox 33"/>
-          <p:cNvSpPr txBox="1"/>
-          <p:nvPr/>
-        </p:nvSpPr>
-        <p:spPr>
-          <a:xfrm>
-            <a:off x="777240" y="4160520"/>
-            <a:ext cx="1422806" cy="347472"/>
-          </a:xfrm>
-          <a:prstGeom prst="rect">
-            <a:avLst/>
-          </a:prstGeom>
-          <a:noFill/>
-        </p:spPr>
-        <p:txBody>
-          <a:bodyPr wrap="square" anchor="ctr" lIns="36576" rIns="36576" tIns="18288" bIns="18288">
-            <a:spAutoFit/>
-          </a:bodyPr>
-          <a:lstStyle/>
-          <a:p>
-            <a:pPr algn="ctr"/>
-            <a:r>
-              <a:rPr sz="1050" b="1">
-                <a:solidFill>
-                  <a:srgbClr val="2DD4BF"/>
-                </a:solidFill>
-                <a:latin typeface="Calibri"/>
-              </a:rPr>
-              <a:t>Python 3.11+</a:t>
-            </a:r>
-          </a:p>
-        </p:txBody>
-      </p:sp>
-      <p:sp>
-        <p:nvSpPr>
-          <p:cNvPr id="35" name="Rounded Rectangle 34"/>
-          <p:cNvSpPr/>
-          <p:nvPr/>
-        </p:nvSpPr>
-        <p:spPr>
-          <a:xfrm>
-            <a:off x="2346350" y="4160520"/>
-            <a:ext cx="1870862" cy="347472"/>
-          </a:xfrm>
-          <a:prstGeom prst="roundRect">
-            <a:avLst>
-              <a:gd name="adj" fmla="val 4000"/>
-            </a:avLst>
-          </a:prstGeom>
-          <a:solidFill>
-            <a:srgbClr val="1E293B"/>
-          </a:solidFill>
-          <a:ln w="11430">
-            <a:solidFill>
-              <a:srgbClr val="0D9488"/>
-            </a:solidFill>
-          </a:ln>
-        </p:spPr>
-        <p:style>
-          <a:lnRef idx="1">
-            <a:schemeClr val="accent1"/>
-          </a:lnRef>
-          <a:fillRef idx="3">
-            <a:schemeClr val="accent1"/>
-          </a:fillRef>
-          <a:effectRef idx="2">
-            <a:schemeClr val="accent1"/>
-          </a:effectRef>
-          <a:fontRef idx="minor">
-            <a:schemeClr val="lt1"/>
-          </a:fontRef>
-        </p:style>
-        <p:txBody>
-          <a:bodyPr rtlCol="0" anchor="ctr"/>
-          <a:lstStyle/>
-          <a:p>
-            <a:pPr algn="ctr"/>
-          </a:p>
-        </p:txBody>
-      </p:sp>
-      <p:sp>
-        <p:nvSpPr>
-          <p:cNvPr id="36" name="TextBox 35"/>
-          <p:cNvSpPr txBox="1"/>
-          <p:nvPr/>
-        </p:nvSpPr>
-        <p:spPr>
-          <a:xfrm>
-            <a:off x="2346350" y="4160520"/>
-            <a:ext cx="1870862" cy="347472"/>
-          </a:xfrm>
-          <a:prstGeom prst="rect">
-            <a:avLst/>
-          </a:prstGeom>
-          <a:noFill/>
-        </p:spPr>
-        <p:txBody>
-          <a:bodyPr wrap="square" anchor="ctr" lIns="36576" rIns="36576" tIns="18288" bIns="18288">
-            <a:spAutoFit/>
-          </a:bodyPr>
-          <a:lstStyle/>
-          <a:p>
-            <a:pPr algn="ctr"/>
-            <a:r>
-              <a:rPr sz="1050" b="1">
-                <a:solidFill>
-                  <a:srgbClr val="2DD4BF"/>
-                </a:solidFill>
-                <a:latin typeface="Calibri"/>
-              </a:rPr>
-              <a:t>FastAPI + Uvicorn</a:t>
-            </a:r>
-          </a:p>
-        </p:txBody>
-      </p:sp>
-      <p:sp>
-        <p:nvSpPr>
-          <p:cNvPr id="37" name="Rounded Rectangle 36"/>
-          <p:cNvSpPr/>
-          <p:nvPr/>
-        </p:nvSpPr>
-        <p:spPr>
-          <a:xfrm>
-            <a:off x="4363516" y="4160520"/>
-            <a:ext cx="1960473" cy="347472"/>
-          </a:xfrm>
-          <a:prstGeom prst="roundRect">
-            <a:avLst>
-              <a:gd name="adj" fmla="val 4000"/>
-            </a:avLst>
-          </a:prstGeom>
-          <a:solidFill>
-            <a:srgbClr val="1E293B"/>
-          </a:solidFill>
-          <a:ln w="11430">
-            <a:solidFill>
-              <a:srgbClr val="0D9488"/>
-            </a:solidFill>
-          </a:ln>
-        </p:spPr>
-        <p:style>
-          <a:lnRef idx="1">
-            <a:schemeClr val="accent1"/>
-          </a:lnRef>
-          <a:fillRef idx="3">
-            <a:schemeClr val="accent1"/>
-          </a:fillRef>
-          <a:effectRef idx="2">
-            <a:schemeClr val="accent1"/>
-          </a:effectRef>
-          <a:fontRef idx="minor">
-            <a:schemeClr val="lt1"/>
-          </a:fontRef>
-        </p:style>
-        <p:txBody>
-          <a:bodyPr rtlCol="0" anchor="ctr"/>
-          <a:lstStyle/>
-          <a:p>
-            <a:pPr algn="ctr"/>
-          </a:p>
-        </p:txBody>
-      </p:sp>
-      <p:sp>
-        <p:nvSpPr>
-          <p:cNvPr id="38" name="TextBox 37"/>
-          <p:cNvSpPr txBox="1"/>
-          <p:nvPr/>
-        </p:nvSpPr>
-        <p:spPr>
-          <a:xfrm>
-            <a:off x="4363516" y="4160520"/>
-            <a:ext cx="1960473" cy="347472"/>
-          </a:xfrm>
-          <a:prstGeom prst="rect">
-            <a:avLst/>
-          </a:prstGeom>
-          <a:noFill/>
-        </p:spPr>
-        <p:txBody>
-          <a:bodyPr wrap="square" anchor="ctr" lIns="36576" rIns="36576" tIns="18288" bIns="18288">
-            <a:spAutoFit/>
-          </a:bodyPr>
-          <a:lstStyle/>
-          <a:p>
-            <a:pPr algn="ctr"/>
-            <a:r>
-              <a:rPr sz="1050" b="1">
-                <a:solidFill>
-                  <a:srgbClr val="2DD4BF"/>
-                </a:solidFill>
-                <a:latin typeface="Calibri"/>
-              </a:rPr>
-              <a:t>Google Gemini JSON</a:t>
-            </a:r>
-          </a:p>
-        </p:txBody>
-      </p:sp>
-      <p:sp>
-        <p:nvSpPr>
-          <p:cNvPr id="39" name="Rounded Rectangle 38"/>
-          <p:cNvSpPr/>
-          <p:nvPr/>
-        </p:nvSpPr>
-        <p:spPr>
-          <a:xfrm>
-            <a:off x="777240" y="4599431"/>
-            <a:ext cx="1333195" cy="347472"/>
-          </a:xfrm>
-          <a:prstGeom prst="roundRect">
-            <a:avLst>
-              <a:gd name="adj" fmla="val 4000"/>
-            </a:avLst>
-          </a:prstGeom>
-          <a:solidFill>
-            <a:srgbClr val="1E293B"/>
-          </a:solidFill>
-          <a:ln w="11430">
-            <a:solidFill>
-              <a:srgbClr val="0D9488"/>
-            </a:solidFill>
-          </a:ln>
-        </p:spPr>
-        <p:style>
-          <a:lnRef idx="1">
-            <a:schemeClr val="accent1"/>
-          </a:lnRef>
-          <a:fillRef idx="3">
-            <a:schemeClr val="accent1"/>
-          </a:fillRef>
-          <a:effectRef idx="2">
-            <a:schemeClr val="accent1"/>
-          </a:effectRef>
-          <a:fontRef idx="minor">
-            <a:schemeClr val="lt1"/>
-          </a:fontRef>
-        </p:style>
-        <p:txBody>
-          <a:bodyPr rtlCol="0" anchor="ctr"/>
-          <a:lstStyle/>
-          <a:p>
-            <a:pPr algn="ctr"/>
-          </a:p>
-        </p:txBody>
-      </p:sp>
-      <p:sp>
-        <p:nvSpPr>
-          <p:cNvPr id="40" name="TextBox 39"/>
-          <p:cNvSpPr txBox="1"/>
-          <p:nvPr/>
-        </p:nvSpPr>
-        <p:spPr>
-          <a:xfrm>
-            <a:off x="777240" y="4599431"/>
-            <a:ext cx="1333195" cy="347472"/>
-          </a:xfrm>
-          <a:prstGeom prst="rect">
-            <a:avLst/>
-          </a:prstGeom>
-          <a:noFill/>
-        </p:spPr>
-        <p:txBody>
-          <a:bodyPr wrap="square" anchor="ctr" lIns="36576" rIns="36576" tIns="18288" bIns="18288">
-            <a:spAutoFit/>
-          </a:bodyPr>
-          <a:lstStyle/>
-          <a:p>
-            <a:pPr algn="ctr"/>
-            <a:r>
-              <a:rPr sz="1050" b="1">
-                <a:solidFill>
-                  <a:srgbClr val="2DD4BF"/>
-                </a:solidFill>
-                <a:latin typeface="Calibri"/>
-              </a:rPr>
-              <a:t>Pydantic v2</a:t>
-            </a:r>
-          </a:p>
-        </p:txBody>
-      </p:sp>
-      <p:sp>
-        <p:nvSpPr>
-          <p:cNvPr id="41" name="Rounded Rectangle 40"/>
-          <p:cNvSpPr/>
-          <p:nvPr/>
-        </p:nvSpPr>
-        <p:spPr>
-          <a:xfrm>
-            <a:off x="2256739" y="4599431"/>
-            <a:ext cx="1781251" cy="347472"/>
-          </a:xfrm>
-          <a:prstGeom prst="roundRect">
-            <a:avLst>
-              <a:gd name="adj" fmla="val 4000"/>
-            </a:avLst>
-          </a:prstGeom>
-          <a:solidFill>
-            <a:srgbClr val="1E293B"/>
-          </a:solidFill>
-          <a:ln w="11430">
-            <a:solidFill>
-              <a:srgbClr val="0D9488"/>
-            </a:solidFill>
-          </a:ln>
-        </p:spPr>
-        <p:style>
-          <a:lnRef idx="1">
-            <a:schemeClr val="accent1"/>
-          </a:lnRef>
-          <a:fillRef idx="3">
-            <a:schemeClr val="accent1"/>
-          </a:fillRef>
-          <a:effectRef idx="2">
-            <a:schemeClr val="accent1"/>
-          </a:effectRef>
-          <a:fontRef idx="minor">
-            <a:schemeClr val="lt1"/>
-          </a:fontRef>
-        </p:style>
-        <p:txBody>
-          <a:bodyPr rtlCol="0" anchor="ctr"/>
-          <a:lstStyle/>
-          <a:p>
-            <a:pPr algn="ctr"/>
-          </a:p>
-        </p:txBody>
-      </p:sp>
-      <p:sp>
-        <p:nvSpPr>
-          <p:cNvPr id="42" name="TextBox 41"/>
-          <p:cNvSpPr txBox="1"/>
-          <p:nvPr/>
-        </p:nvSpPr>
-        <p:spPr>
-          <a:xfrm>
-            <a:off x="2256739" y="4599431"/>
-            <a:ext cx="1781251" cy="347472"/>
-          </a:xfrm>
-          <a:prstGeom prst="rect">
-            <a:avLst/>
-          </a:prstGeom>
-          <a:noFill/>
-        </p:spPr>
-        <p:txBody>
-          <a:bodyPr wrap="square" anchor="ctr" lIns="36576" rIns="36576" tIns="18288" bIns="18288">
-            <a:spAutoFit/>
-          </a:bodyPr>
-          <a:lstStyle/>
-          <a:p>
-            <a:pPr algn="ctr"/>
-            <a:r>
-              <a:rPr sz="1050" b="1">
-                <a:solidFill>
-                  <a:srgbClr val="2DD4BF"/>
-                </a:solidFill>
-                <a:latin typeface="Calibri"/>
-              </a:rPr>
-              <a:t>SDXL / Diffusers</a:t>
-            </a:r>
-          </a:p>
-        </p:txBody>
-      </p:sp>
-      <p:sp>
-        <p:nvSpPr>
-          <p:cNvPr id="43" name="Rounded Rectangle 42"/>
-          <p:cNvSpPr/>
-          <p:nvPr/>
-        </p:nvSpPr>
-        <p:spPr>
-          <a:xfrm>
-            <a:off x="4184294" y="4599431"/>
-            <a:ext cx="1870862" cy="347472"/>
-          </a:xfrm>
-          <a:prstGeom prst="roundRect">
-            <a:avLst>
-              <a:gd name="adj" fmla="val 4000"/>
-            </a:avLst>
-          </a:prstGeom>
-          <a:solidFill>
-            <a:srgbClr val="1E293B"/>
-          </a:solidFill>
-          <a:ln w="11430">
-            <a:solidFill>
-              <a:srgbClr val="0D9488"/>
-            </a:solidFill>
-          </a:ln>
-        </p:spPr>
-        <p:style>
-          <a:lnRef idx="1">
-            <a:schemeClr val="accent1"/>
-          </a:lnRef>
-          <a:fillRef idx="3">
-            <a:schemeClr val="accent1"/>
-          </a:fillRef>
-          <a:effectRef idx="2">
-            <a:schemeClr val="accent1"/>
-          </a:effectRef>
-          <a:fontRef idx="minor">
-            <a:schemeClr val="lt1"/>
-          </a:fontRef>
-        </p:style>
-        <p:txBody>
-          <a:bodyPr rtlCol="0" anchor="ctr"/>
-          <a:lstStyle/>
-          <a:p>
-            <a:pPr algn="ctr"/>
-          </a:p>
-        </p:txBody>
-      </p:sp>
-      <p:sp>
-        <p:nvSpPr>
-          <p:cNvPr id="44" name="TextBox 43"/>
-          <p:cNvSpPr txBox="1"/>
-          <p:nvPr/>
-        </p:nvSpPr>
-        <p:spPr>
-          <a:xfrm>
-            <a:off x="4184294" y="4599431"/>
-            <a:ext cx="1870862" cy="347472"/>
-          </a:xfrm>
-          <a:prstGeom prst="rect">
-            <a:avLst/>
-          </a:prstGeom>
-          <a:noFill/>
-        </p:spPr>
-        <p:txBody>
-          <a:bodyPr wrap="square" anchor="ctr" lIns="36576" rIns="36576" tIns="18288" bIns="18288">
-            <a:spAutoFit/>
-          </a:bodyPr>
-          <a:lstStyle/>
-          <a:p>
-            <a:pPr algn="ctr"/>
-            <a:r>
-              <a:rPr sz="1050" b="1">
-                <a:solidFill>
-                  <a:srgbClr val="2DD4BF"/>
-                </a:solidFill>
-                <a:latin typeface="Calibri"/>
-              </a:rPr>
-              <a:t>fpdf2 Unicode PDF</a:t>
-            </a:r>
-          </a:p>
-        </p:txBody>
-      </p:sp>
-      <p:sp>
-        <p:nvSpPr>
-          <p:cNvPr id="45" name="Rounded Rectangle 44"/>
-          <p:cNvSpPr/>
-          <p:nvPr/>
-        </p:nvSpPr>
-        <p:spPr>
-          <a:xfrm>
-            <a:off x="777240" y="5669280"/>
-            <a:ext cx="10835640" cy="658368"/>
-          </a:xfrm>
-          <a:prstGeom prst="roundRect">
-            <a:avLst>
-              <a:gd name="adj" fmla="val 4000"/>
-            </a:avLst>
-          </a:prstGeom>
-          <a:solidFill>
-            <a:srgbClr val="1E293B"/>
-          </a:solidFill>
-          <a:ln w="12700">
-            <a:solidFill>
-              <a:srgbClr val="334155"/>
-            </a:solidFill>
-          </a:ln>
-        </p:spPr>
-        <p:style>
-          <a:lnRef idx="1">
-            <a:schemeClr val="accent1"/>
-          </a:lnRef>
-          <a:fillRef idx="3">
-            <a:schemeClr val="accent1"/>
-          </a:fillRef>
-          <a:effectRef idx="2">
-            <a:schemeClr val="accent1"/>
-          </a:effectRef>
-          <a:fontRef idx="minor">
-            <a:schemeClr val="lt1"/>
-          </a:fontRef>
-        </p:style>
-        <p:txBody>
-          <a:bodyPr rtlCol="0" anchor="ctr"/>
-          <a:lstStyle/>
-          <a:p>
-            <a:pPr algn="ctr"/>
-          </a:p>
-        </p:txBody>
-      </p:sp>
-      <p:sp>
-        <p:nvSpPr>
-          <p:cNvPr id="46" name="TextBox 45"/>
-          <p:cNvSpPr txBox="1"/>
-          <p:nvPr/>
-        </p:nvSpPr>
-        <p:spPr>
-          <a:xfrm>
-            <a:off x="1005840" y="5669280"/>
-            <a:ext cx="5669280" cy="658368"/>
-          </a:xfrm>
-          <a:prstGeom prst="rect">
-            <a:avLst/>
-          </a:prstGeom>
-          <a:noFill/>
-        </p:spPr>
-        <p:txBody>
-          <a:bodyPr wrap="square" anchor="ctr" lIns="36576" rIns="36576" tIns="18288" bIns="18288">
-            <a:spAutoFit/>
-          </a:bodyPr>
-          <a:lstStyle/>
-          <a:p>
-            <a:pPr algn="l"/>
-            <a:r>
-              <a:rPr sz="1200" b="1">
-                <a:solidFill>
-                  <a:srgbClr val="FFFFFF"/>
-                </a:solidFill>
-                <a:latin typeface="Calibri"/>
-              </a:rPr>
-              <a:t>Department of Computer Science  |  Project Demonstration &amp; Viva</a:t>
-            </a:r>
-          </a:p>
-        </p:txBody>
-      </p:sp>
-      <p:sp>
-        <p:nvSpPr>
-          <p:cNvPr id="47" name="TextBox 46"/>
-          <p:cNvSpPr txBox="1"/>
-          <p:nvPr/>
-        </p:nvSpPr>
-        <p:spPr>
-          <a:xfrm>
-            <a:off x="6172200" y="5669280"/>
-            <a:ext cx="5212080" cy="658368"/>
-          </a:xfrm>
-          <a:prstGeom prst="rect">
-            <a:avLst/>
-          </a:prstGeom>
-          <a:noFill/>
-        </p:spPr>
-        <p:txBody>
-          <a:bodyPr wrap="square" anchor="ctr" lIns="36576" rIns="36576" tIns="18288" bIns="18288">
-            <a:spAutoFit/>
-          </a:bodyPr>
-          <a:lstStyle/>
-          <a:p>
-            <a:pPr algn="r"/>
-            <a:r>
-              <a:rPr sz="1150" b="1">
-                <a:solidFill>
-                  <a:srgbClr val="F59E0B"/>
-                </a:solidFill>
-                <a:latin typeface="Calibri"/>
-              </a:rPr>
-              <a:t>Zero-Credential Offline Demo Ready  •  11/11 Pytest Verified</a:t>
+              <a:t>Web Preview &amp; A4 Book</a:t>
             </a:r>
           </a:p>
         </p:txBody>
@@ -6319,7 +6202,7 @@
                 </a:solidFill>
                 <a:latin typeface="Calibri"/>
               </a:rPr>
-              <a:t>Testing, Future Enhancements &amp; Conclusion</a:t>
+              <a:t>Testing, Future Scope &amp; Conclusion</a:t>
             </a:r>
           </a:p>
         </p:txBody>
@@ -6354,7 +6237,7 @@
                 </a:solidFill>
                 <a:latin typeface="Calibri"/>
               </a:rPr>
-              <a:t>Verified offline test suite, roadmap for production scale, and final summary</a:t>
+              <a:t>Verified quality checks, upcoming features, and project summary</a:t>
             </a:r>
           </a:p>
         </p:txBody>
@@ -6411,7 +6294,7 @@
         <p:spPr>
           <a:xfrm>
             <a:off x="548640" y="6510528"/>
-            <a:ext cx="7772400" cy="228600"/>
+            <a:ext cx="7315200" cy="228600"/>
           </a:xfrm>
           <a:prstGeom prst="rect">
             <a:avLst/>
@@ -6432,7 +6315,7 @@
                 </a:solidFill>
                 <a:latin typeface="Calibri"/>
               </a:rPr>
-              <a:t>ComicCraft – AI Comic Story Creator Using Gemini Models  |  Naan Mudhalvan Project</a:t>
+              <a:t>ComicCraft — AI Comic Story Creator</a:t>
             </a:r>
           </a:p>
         </p:txBody>
@@ -6445,8 +6328,8 @@
         </p:nvSpPr>
         <p:spPr>
           <a:xfrm>
-            <a:off x="548640" y="1188720"/>
-            <a:ext cx="3529584" cy="4133087"/>
+            <a:off x="548640" y="1207008"/>
+            <a:ext cx="3529584" cy="4151376"/>
           </a:xfrm>
           <a:prstGeom prst="roundRect">
             <a:avLst>
@@ -6492,7 +6375,7 @@
         </p:nvSpPr>
         <p:spPr>
           <a:xfrm>
-            <a:off x="548640" y="1188720"/>
+            <a:off x="548640" y="1207008"/>
             <a:ext cx="3529584" cy="91440"/>
           </a:xfrm>
           <a:prstGeom prst="rect">
@@ -6535,7 +6418,7 @@
         </p:nvSpPr>
         <p:spPr>
           <a:xfrm>
-            <a:off x="731520" y="1353312"/>
+            <a:off x="731520" y="1389888"/>
             <a:ext cx="3163824" cy="329184"/>
           </a:xfrm>
           <a:prstGeom prst="rect">
@@ -6551,13 +6434,13 @@
           <a:p>
             <a:pPr algn="l"/>
             <a:r>
-              <a:rPr sz="1300" b="1">
+              <a:rPr sz="1350" b="1">
                 <a:solidFill>
                   <a:srgbClr val="0D9488"/>
                 </a:solidFill>
                 <a:latin typeface="Calibri"/>
               </a:rPr>
-              <a:t>AUTOMATED TESTING &amp; QA</a:t>
+              <a:t>TESTING &amp; QUALITY</a:t>
             </a:r>
           </a:p>
         </p:txBody>
@@ -6570,8 +6453,8 @@
         </p:nvSpPr>
         <p:spPr>
           <a:xfrm>
-            <a:off x="713232" y="1737360"/>
-            <a:ext cx="3200400" cy="3474720"/>
+            <a:off x="731520" y="1792224"/>
+            <a:ext cx="3163824" cy="3383280"/>
           </a:xfrm>
           <a:prstGeom prst="rect">
             <a:avLst/>
@@ -6586,112 +6469,112 @@
           <a:p>
             <a:pPr>
               <a:lnSpc>
-                <a:spcPct val="118000"/>
+                <a:spcPct val="122000"/>
               </a:lnSpc>
               <a:spcAft>
-                <a:spcPts val="1000"/>
+                <a:spcPts val="1200"/>
               </a:spcAft>
             </a:pPr>
             <a:r>
-              <a:rPr sz="1150" b="1">
+              <a:rPr sz="1200" b="1">
                 <a:solidFill>
                   <a:srgbClr val="0D9488"/>
                 </a:solidFill>
                 <a:latin typeface="Calibri"/>
               </a:rPr>
-              <a:t>▪ </a:t>
-            </a:r>
-            <a:r>
-              <a:rPr sz="1150" b="1">
+              <a:t>▪  </a:t>
+            </a:r>
+            <a:r>
+              <a:rPr sz="1200" b="1">
                 <a:solidFill>
                   <a:srgbClr val="0F172A"/>
                 </a:solidFill>
                 <a:latin typeface="Calibri"/>
               </a:rPr>
-              <a:t>11 / 11 Pytest Suite PASS: </a:t>
-            </a:r>
-            <a:r>
-              <a:rPr sz="1150" b="0">
+              <a:t>11 Automated Tests: </a:t>
+            </a:r>
+            <a:r>
+              <a:rPr sz="1200">
                 <a:solidFill>
                   <a:srgbClr val="334155"/>
                 </a:solidFill>
                 <a:latin typeface="Calibri"/>
               </a:rPr>
-              <a:t>Runs 100% offline using demo + placeholder providers and mocked Gemini clients—zero paid API calls.</a:t>
+              <a:t>All 11 pytest test cases pass completely offline with ~80% code coverage.</a:t>
             </a:r>
           </a:p>
           <a:p>
             <a:pPr>
               <a:lnSpc>
-                <a:spcPct val="118000"/>
+                <a:spcPct val="122000"/>
               </a:lnSpc>
               <a:spcAft>
-                <a:spcPts val="1000"/>
+                <a:spcPts val="1200"/>
               </a:spcAft>
             </a:pPr>
             <a:r>
-              <a:rPr sz="1150" b="1">
+              <a:rPr sz="1200" b="1">
                 <a:solidFill>
                   <a:srgbClr val="0D9488"/>
                 </a:solidFill>
                 <a:latin typeface="Calibri"/>
               </a:rPr>
-              <a:t>▪ </a:t>
-            </a:r>
-            <a:r>
-              <a:rPr sz="1150" b="1">
+              <a:t>▪  </a:t>
+            </a:r>
+            <a:r>
+              <a:rPr sz="1200" b="1">
                 <a:solidFill>
                   <a:srgbClr val="0F172A"/>
                 </a:solidFill>
                 <a:latin typeface="Calibri"/>
               </a:rPr>
-              <a:t>~80% Code Coverage: </a:t>
-            </a:r>
-            <a:r>
-              <a:rPr sz="1150" b="0">
+              <a:t>Verified Routes: </a:t>
+            </a:r>
+            <a:r>
+              <a:rPr sz="1200">
                 <a:solidFill>
                   <a:srgbClr val="334155"/>
                 </a:solidFill>
                 <a:latin typeface="Calibri"/>
               </a:rPr>
-              <a:t>99% coverage on pdf_service.py, 95% on config.py, and 93% on main.py.</a:t>
+              <a:t>Tested web creation form, REST JSON API, PDF export, and error handling.</a:t>
             </a:r>
           </a:p>
           <a:p>
             <a:pPr>
               <a:lnSpc>
-                <a:spcPct val="118000"/>
+                <a:spcPct val="122000"/>
               </a:lnSpc>
               <a:spcAft>
-                <a:spcPts val="1000"/>
+                <a:spcPts val="1200"/>
               </a:spcAft>
             </a:pPr>
             <a:r>
-              <a:rPr sz="1150" b="1">
+              <a:rPr sz="1200" b="1">
                 <a:solidFill>
                   <a:srgbClr val="0D9488"/>
                 </a:solidFill>
                 <a:latin typeface="Calibri"/>
               </a:rPr>
-              <a:t>▪ </a:t>
-            </a:r>
-            <a:r>
-              <a:rPr sz="1150" b="1">
+              <a:t>▪  </a:t>
+            </a:r>
+            <a:r>
+              <a:rPr sz="1200" b="1">
                 <a:solidFill>
                   <a:srgbClr val="0F172A"/>
                 </a:solidFill>
                 <a:latin typeface="Calibri"/>
               </a:rPr>
-              <a:t>End-to-End Verified: </a:t>
-            </a:r>
-            <a:r>
-              <a:rPr sz="1150" b="0">
+              <a:t>OpenAPI Docs: </a:t>
+            </a:r>
+            <a:r>
+              <a:rPr sz="1200">
                 <a:solidFill>
                   <a:srgbClr val="334155"/>
                 </a:solidFill>
                 <a:latin typeface="Calibri"/>
               </a:rPr>
-              <a:t>Tested /health, HTML form flow, REST 201 JSON lifecycle, PDF export, 422/404 handling, and 503/404 fallbacks.</a:t>
+              <a:t>Interactive Swagger UI at /docs allows direct testing of JSON API routes.</a:t>
             </a:r>
           </a:p>
         </p:txBody>
@@ -6704,8 +6587,8 @@
         </p:nvSpPr>
         <p:spPr>
           <a:xfrm>
-            <a:off x="4329683" y="1188720"/>
-            <a:ext cx="3529584" cy="4133087"/>
+            <a:off x="4329683" y="1207008"/>
+            <a:ext cx="3529584" cy="4151376"/>
           </a:xfrm>
           <a:prstGeom prst="roundRect">
             <a:avLst>
@@ -6751,7 +6634,7 @@
         </p:nvSpPr>
         <p:spPr>
           <a:xfrm>
-            <a:off x="4329683" y="1188720"/>
+            <a:off x="4329683" y="1207008"/>
             <a:ext cx="3529584" cy="91440"/>
           </a:xfrm>
           <a:prstGeom prst="rect">
@@ -6794,7 +6677,7 @@
         </p:nvSpPr>
         <p:spPr>
           <a:xfrm>
-            <a:off x="4512564" y="1353312"/>
+            <a:off x="4512564" y="1389888"/>
             <a:ext cx="3163824" cy="329184"/>
           </a:xfrm>
           <a:prstGeom prst="rect">
@@ -6810,7 +6693,7 @@
           <a:p>
             <a:pPr algn="l"/>
             <a:r>
-              <a:rPr sz="1300" b="1">
+              <a:rPr sz="1350" b="1">
                 <a:solidFill>
                   <a:srgbClr val="2563EB"/>
                 </a:solidFill>
@@ -6829,8 +6712,8 @@
         </p:nvSpPr>
         <p:spPr>
           <a:xfrm>
-            <a:off x="4494275" y="1737360"/>
-            <a:ext cx="3200400" cy="3474720"/>
+            <a:off x="4512564" y="1792224"/>
+            <a:ext cx="3163824" cy="3383280"/>
           </a:xfrm>
           <a:prstGeom prst="rect">
             <a:avLst/>
@@ -6845,112 +6728,112 @@
           <a:p>
             <a:pPr>
               <a:lnSpc>
-                <a:spcPct val="118000"/>
+                <a:spcPct val="122000"/>
               </a:lnSpc>
               <a:spcAft>
-                <a:spcPts val="1000"/>
+                <a:spcPts val="1200"/>
               </a:spcAft>
             </a:pPr>
             <a:r>
-              <a:rPr sz="1150" b="1">
-                <a:solidFill>
-                  <a:srgbClr val="0D9488"/>
-                </a:solidFill>
-                <a:latin typeface="Calibri"/>
-              </a:rPr>
-              <a:t>▪ </a:t>
-            </a:r>
-            <a:r>
-              <a:rPr sz="1150" b="1">
+              <a:rPr sz="1200" b="1">
+                <a:solidFill>
+                  <a:srgbClr val="2563EB"/>
+                </a:solidFill>
+                <a:latin typeface="Calibri"/>
+              </a:rPr>
+              <a:t>▪  </a:t>
+            </a:r>
+            <a:r>
+              <a:rPr sz="1200" b="1">
                 <a:solidFill>
                   <a:srgbClr val="0F172A"/>
                 </a:solidFill>
                 <a:latin typeface="Calibri"/>
               </a:rPr>
-              <a:t>Async Background Queue: </a:t>
-            </a:r>
-            <a:r>
-              <a:rPr sz="1150" b="0">
+              <a:t>Background Queue: </a:t>
+            </a:r>
+            <a:r>
+              <a:rPr sz="1200">
                 <a:solidFill>
                   <a:srgbClr val="334155"/>
                 </a:solidFill>
                 <a:latin typeface="Calibri"/>
               </a:rPr>
-              <a:t>Add Celery/Redis task queues with live progress polling for multi-minute diffusion generations.</a:t>
+              <a:t>Add async job queues with live progress bars for heavy AI image models.</a:t>
             </a:r>
           </a:p>
           <a:p>
             <a:pPr>
               <a:lnSpc>
-                <a:spcPct val="118000"/>
+                <a:spcPct val="122000"/>
               </a:lnSpc>
               <a:spcAft>
-                <a:spcPts val="1000"/>
+                <a:spcPts val="1200"/>
               </a:spcAft>
             </a:pPr>
             <a:r>
-              <a:rPr sz="1150" b="1">
-                <a:solidFill>
-                  <a:srgbClr val="0D9488"/>
-                </a:solidFill>
-                <a:latin typeface="Calibri"/>
-              </a:rPr>
-              <a:t>▪ </a:t>
-            </a:r>
-            <a:r>
-              <a:rPr sz="1150" b="1">
+              <a:rPr sz="1200" b="1">
+                <a:solidFill>
+                  <a:srgbClr val="2563EB"/>
+                </a:solidFill>
+                <a:latin typeface="Calibri"/>
+              </a:rPr>
+              <a:t>▪  </a:t>
+            </a:r>
+            <a:r>
+              <a:rPr sz="1200" b="1">
                 <a:solidFill>
                   <a:srgbClr val="0F172A"/>
                 </a:solidFill>
                 <a:latin typeface="Calibri"/>
               </a:rPr>
-              <a:t>Cloud Auth &amp; Storage: </a:t>
-            </a:r>
-            <a:r>
-              <a:rPr sz="1150" b="0">
+              <a:t>Cloud Accounts: </a:t>
+            </a:r>
+            <a:r>
+              <a:rPr sz="1200">
                 <a:solidFill>
                   <a:srgbClr val="334155"/>
                 </a:solidFill>
                 <a:latin typeface="Calibri"/>
               </a:rPr>
-              <a:t>Add user login, quotas, PostgreSQL metadata, and AWS S3 object storage for multi-user deployment.</a:t>
+              <a:t>Add user login and cloud storage for saving personal comic libraries.</a:t>
             </a:r>
           </a:p>
           <a:p>
             <a:pPr>
               <a:lnSpc>
-                <a:spcPct val="118000"/>
+                <a:spcPct val="122000"/>
               </a:lnSpc>
               <a:spcAft>
-                <a:spcPts val="1000"/>
+                <a:spcPts val="1200"/>
               </a:spcAft>
             </a:pPr>
             <a:r>
-              <a:rPr sz="1150" b="1">
-                <a:solidFill>
-                  <a:srgbClr val="0D9488"/>
-                </a:solidFill>
-                <a:latin typeface="Calibri"/>
-              </a:rPr>
-              <a:t>▪ </a:t>
-            </a:r>
-            <a:r>
-              <a:rPr sz="1150" b="1">
+              <a:rPr sz="1200" b="1">
+                <a:solidFill>
+                  <a:srgbClr val="2563EB"/>
+                </a:solidFill>
+                <a:latin typeface="Calibri"/>
+              </a:rPr>
+              <a:t>▪  </a:t>
+            </a:r>
+            <a:r>
+              <a:rPr sz="1200" b="1">
                 <a:solidFill>
                   <a:srgbClr val="0F172A"/>
                 </a:solidFill>
                 <a:latin typeface="Calibri"/>
               </a:rPr>
-              <a:t>Rich Editing &amp; Regional UI: </a:t>
-            </a:r>
-            <a:r>
-              <a:rPr sz="1150" b="0">
+              <a:t>More Creative Control: </a:t>
+            </a:r>
+            <a:r>
+              <a:rPr sz="1200">
                 <a:solidFill>
                   <a:srgbClr val="334155"/>
                 </a:solidFill>
                 <a:latin typeface="Calibri"/>
               </a:rPr>
-              <a:t>Support single-panel regeneration, multi-panel comic grid layouts, and Tamil language comic scripts.</a:t>
+              <a:t>Single-panel regeneration, multi-panel page grids, and Tamil language support.</a:t>
             </a:r>
           </a:p>
         </p:txBody>
@@ -6963,8 +6846,8 @@
         </p:nvSpPr>
         <p:spPr>
           <a:xfrm>
-            <a:off x="8110727" y="1188720"/>
-            <a:ext cx="3529584" cy="4133087"/>
+            <a:off x="8110727" y="1207008"/>
+            <a:ext cx="3529584" cy="4151376"/>
           </a:xfrm>
           <a:prstGeom prst="roundRect">
             <a:avLst>
@@ -7010,7 +6893,7 @@
         </p:nvSpPr>
         <p:spPr>
           <a:xfrm>
-            <a:off x="8110727" y="1188720"/>
+            <a:off x="8110727" y="1207008"/>
             <a:ext cx="3529584" cy="91440"/>
           </a:xfrm>
           <a:prstGeom prst="rect">
@@ -7053,7 +6936,7 @@
         </p:nvSpPr>
         <p:spPr>
           <a:xfrm>
-            <a:off x="8293607" y="1353312"/>
+            <a:off x="8293607" y="1389888"/>
             <a:ext cx="3163824" cy="329184"/>
           </a:xfrm>
           <a:prstGeom prst="rect">
@@ -7069,7 +6952,7 @@
           <a:p>
             <a:pPr algn="l"/>
             <a:r>
-              <a:rPr sz="1300" b="1">
+              <a:rPr sz="1350" b="1">
                 <a:solidFill>
                   <a:srgbClr val="B45309"/>
                 </a:solidFill>
@@ -7088,8 +6971,8 @@
         </p:nvSpPr>
         <p:spPr>
           <a:xfrm>
-            <a:off x="8275319" y="1737360"/>
-            <a:ext cx="3200400" cy="3474720"/>
+            <a:off x="8293607" y="1792224"/>
+            <a:ext cx="3163824" cy="3383280"/>
           </a:xfrm>
           <a:prstGeom prst="rect">
             <a:avLst/>
@@ -7104,112 +6987,112 @@
           <a:p>
             <a:pPr>
               <a:lnSpc>
-                <a:spcPct val="118000"/>
+                <a:spcPct val="122000"/>
               </a:lnSpc>
               <a:spcAft>
-                <a:spcPts val="1000"/>
+                <a:spcPts val="1200"/>
               </a:spcAft>
             </a:pPr>
             <a:r>
-              <a:rPr sz="1150" b="1">
-                <a:solidFill>
-                  <a:srgbClr val="0D9488"/>
-                </a:solidFill>
-                <a:latin typeface="Calibri"/>
-              </a:rPr>
-              <a:t>▪ </a:t>
-            </a:r>
-            <a:r>
-              <a:rPr sz="1150" b="1">
+              <a:rPr sz="1200" b="1">
+                <a:solidFill>
+                  <a:srgbClr val="B45309"/>
+                </a:solidFill>
+                <a:latin typeface="Calibri"/>
+              </a:rPr>
+              <a:t>▪  </a:t>
+            </a:r>
+            <a:r>
+              <a:rPr sz="1200" b="1">
                 <a:solidFill>
                   <a:srgbClr val="0F172A"/>
                 </a:solidFill>
                 <a:latin typeface="Calibri"/>
               </a:rPr>
-              <a:t>Complete Integrated Product: </a:t>
-            </a:r>
-            <a:r>
-              <a:rPr sz="1150" b="0">
+              <a:t>End-to-End Solution: </a:t>
+            </a:r>
+            <a:r>
+              <a:rPr sz="1200">
                 <a:solidFill>
                   <a:srgbClr val="334155"/>
                 </a:solidFill>
                 <a:latin typeface="Calibri"/>
               </a:rPr>
-              <a:t>Transforms a one-line story idea into a previewed, illustrated, A4 PDF comic book in one workflow.</a:t>
+              <a:t>Turns a simple story idea into an illustrated web comic and A4 PDF in minutes.</a:t>
             </a:r>
           </a:p>
           <a:p>
             <a:pPr>
               <a:lnSpc>
-                <a:spcPct val="118000"/>
+                <a:spcPct val="122000"/>
               </a:lnSpc>
               <a:spcAft>
-                <a:spcPts val="1000"/>
+                <a:spcPts val="1200"/>
               </a:spcAft>
             </a:pPr>
             <a:r>
-              <a:rPr sz="1150" b="1">
-                <a:solidFill>
-                  <a:srgbClr val="0D9488"/>
-                </a:solidFill>
-                <a:latin typeface="Calibri"/>
-              </a:rPr>
-              <a:t>▪ </a:t>
-            </a:r>
-            <a:r>
-              <a:rPr sz="1150" b="1">
+              <a:rPr sz="1200" b="1">
+                <a:solidFill>
+                  <a:srgbClr val="B45309"/>
+                </a:solidFill>
+                <a:latin typeface="Calibri"/>
+              </a:rPr>
+              <a:t>▪  </a:t>
+            </a:r>
+            <a:r>
+              <a:rPr sz="1200" b="1">
                 <a:solidFill>
                   <a:srgbClr val="0F172A"/>
                 </a:solidFill>
                 <a:latin typeface="Calibri"/>
               </a:rPr>
-              <a:t>Production-Grade AI Patterns: </a:t>
-            </a:r>
-            <a:r>
-              <a:rPr sz="1150" b="0">
+              <a:t>Consistent &amp; Structured: </a:t>
+            </a:r>
+            <a:r>
+              <a:rPr sz="1200">
                 <a:solidFill>
                   <a:srgbClr val="334155"/>
                 </a:solidFill>
                 <a:latin typeface="Calibri"/>
               </a:rPr>
-              <a:t>Replaces brittle text splitting with Pydantic v2 JSON validation and Character Bible visual continuity.</a:t>
+              <a:t>Uses two-stage Gemini JSON, Pydantic validation, and a Character Bible.</a:t>
             </a:r>
           </a:p>
           <a:p>
             <a:pPr>
               <a:lnSpc>
-                <a:spcPct val="118000"/>
+                <a:spcPct val="122000"/>
               </a:lnSpc>
               <a:spcAft>
-                <a:spcPts val="1000"/>
+                <a:spcPts val="1200"/>
               </a:spcAft>
             </a:pPr>
             <a:r>
-              <a:rPr sz="1150" b="1">
-                <a:solidFill>
-                  <a:srgbClr val="0D9488"/>
-                </a:solidFill>
-                <a:latin typeface="Calibri"/>
-              </a:rPr>
-              <a:t>▪ </a:t>
-            </a:r>
-            <a:r>
-              <a:rPr sz="1150" b="1">
+              <a:rPr sz="1200" b="1">
+                <a:solidFill>
+                  <a:srgbClr val="B45309"/>
+                </a:solidFill>
+                <a:latin typeface="Calibri"/>
+              </a:rPr>
+              <a:t>▪  </a:t>
+            </a:r>
+            <a:r>
+              <a:rPr sz="1200" b="1">
                 <a:solidFill>
                   <a:srgbClr val="0F172A"/>
                 </a:solidFill>
                 <a:latin typeface="Calibri"/>
               </a:rPr>
-              <a:t>Always Demonstrable: </a:t>
-            </a:r>
-            <a:r>
-              <a:rPr sz="1150" b="0">
+              <a:t>Reliable by Design: </a:t>
+            </a:r>
+            <a:r>
+              <a:rPr sz="1200">
                 <a:solidFill>
                   <a:srgbClr val="334155"/>
                 </a:solidFill>
                 <a:latin typeface="Calibri"/>
               </a:rPr>
-              <a:t>Layered retries and offline fallbacks guarantee smooth operation with or without external API credentials.</a:t>
+              <a:t>Works smoothly with cloud AI models as well as 100% offline in Demo Mode.</a:t>
             </a:r>
           </a:p>
         </p:txBody>
@@ -7222,8 +7105,8 @@
         </p:nvSpPr>
         <p:spPr>
           <a:xfrm>
-            <a:off x="548640" y="5504688"/>
-            <a:ext cx="11091672" cy="859536"/>
+            <a:off x="548640" y="5541264"/>
+            <a:ext cx="11091672" cy="768096"/>
           </a:xfrm>
           <a:prstGeom prst="roundRect">
             <a:avLst>
@@ -7267,8 +7150,8 @@
         </p:nvSpPr>
         <p:spPr>
           <a:xfrm>
-            <a:off x="548640" y="5504688"/>
-            <a:ext cx="128016" cy="859536"/>
+            <a:off x="548640" y="5541264"/>
+            <a:ext cx="128016" cy="768096"/>
           </a:xfrm>
           <a:prstGeom prst="rect">
             <a:avLst/>
@@ -7310,78 +7193,8 @@
         </p:nvSpPr>
         <p:spPr>
           <a:xfrm>
-            <a:off x="868680" y="5577840"/>
-            <a:ext cx="6720840" cy="402336"/>
-          </a:xfrm>
-          <a:prstGeom prst="rect">
-            <a:avLst/>
-          </a:prstGeom>
-          <a:noFill/>
-        </p:spPr>
-        <p:txBody>
-          <a:bodyPr wrap="square" anchor="t" lIns="36576" rIns="36576" tIns="18288" bIns="18288">
-            <a:spAutoFit/>
-          </a:bodyPr>
-          <a:lstStyle/>
-          <a:p>
-            <a:pPr algn="l"/>
-            <a:r>
-              <a:rPr sz="1550" b="1">
-                <a:solidFill>
-                  <a:srgbClr val="FFFFFF"/>
-                </a:solidFill>
-                <a:latin typeface="Calibri"/>
-              </a:rPr>
-              <a:t>Thank You!  —  Questions &amp; Live Demo Welcome</a:t>
-            </a:r>
-          </a:p>
-        </p:txBody>
-      </p:sp>
-      <p:sp>
-        <p:nvSpPr>
-          <p:cNvPr id="25" name="TextBox 24"/>
-          <p:cNvSpPr txBox="1"/>
-          <p:nvPr/>
-        </p:nvSpPr>
-        <p:spPr>
-          <a:xfrm>
-            <a:off x="868680" y="5971032"/>
-            <a:ext cx="6720840" cy="310896"/>
-          </a:xfrm>
-          <a:prstGeom prst="rect">
-            <a:avLst/>
-          </a:prstGeom>
-          <a:noFill/>
-        </p:spPr>
-        <p:txBody>
-          <a:bodyPr wrap="square" anchor="t" lIns="36576" rIns="36576" tIns="18288" bIns="18288">
-            <a:spAutoFit/>
-          </a:bodyPr>
-          <a:lstStyle/>
-          <a:p>
-            <a:pPr algn="l"/>
-            <a:r>
-              <a:rPr sz="1100" b="1">
-                <a:solidFill>
-                  <a:srgbClr val="2DD4BF"/>
-                </a:solidFill>
-                <a:latin typeface="Calibri"/>
-              </a:rPr>
-              <a:t>Run Live Demo:  uvicorn app.main:app --host 0.0.0.0 --port 8000</a:t>
-            </a:r>
-          </a:p>
-        </p:txBody>
-      </p:sp>
-      <p:sp>
-        <p:nvSpPr>
-          <p:cNvPr id="26" name="TextBox 25"/>
-          <p:cNvSpPr txBox="1"/>
-          <p:nvPr/>
-        </p:nvSpPr>
-        <p:spPr>
-          <a:xfrm>
-            <a:off x="7498079" y="5504688"/>
-            <a:ext cx="3931920" cy="859536"/>
+            <a:off x="868680" y="5541264"/>
+            <a:ext cx="5029200" cy="768096"/>
           </a:xfrm>
           <a:prstGeom prst="rect">
             <a:avLst/>
@@ -7394,15 +7207,50 @@
           </a:bodyPr>
           <a:lstStyle/>
           <a:p>
+            <a:pPr algn="l"/>
+            <a:r>
+              <a:rPr sz="2000" b="1">
+                <a:solidFill>
+                  <a:srgbClr val="FFFFFF"/>
+                </a:solidFill>
+                <a:latin typeface="Calibri"/>
+              </a:rPr>
+              <a:t>Thank You!</a:t>
+            </a:r>
+          </a:p>
+        </p:txBody>
+      </p:sp>
+      <p:sp>
+        <p:nvSpPr>
+          <p:cNvPr id="25" name="TextBox 24"/>
+          <p:cNvSpPr txBox="1"/>
+          <p:nvPr/>
+        </p:nvSpPr>
+        <p:spPr>
+          <a:xfrm>
+            <a:off x="5852160" y="5541264"/>
+            <a:ext cx="5532120" cy="768096"/>
+          </a:xfrm>
+          <a:prstGeom prst="rect">
+            <a:avLst/>
+          </a:prstGeom>
+          <a:noFill/>
+        </p:spPr>
+        <p:txBody>
+          <a:bodyPr wrap="square" anchor="ctr" lIns="36576" rIns="36576" tIns="18288" bIns="18288">
+            <a:spAutoFit/>
+          </a:bodyPr>
+          <a:lstStyle/>
+          <a:p>
             <a:pPr algn="r"/>
             <a:r>
-              <a:rPr sz="1080" b="1">
-                <a:solidFill>
-                  <a:srgbClr val="F59E0B"/>
-                </a:solidFill>
-                <a:latin typeface="Calibri"/>
-              </a:rPr>
-              <a:t>Routes:  /  ·  /comics/{id}  ·  /download/{id}  ·  /docs</a:t>
+              <a:rPr sz="1300" b="1">
+                <a:solidFill>
+                  <a:srgbClr val="2DD4BF"/>
+                </a:solidFill>
+                <a:latin typeface="Calibri"/>
+              </a:rPr>
+              <a:t>ComicCraft  •  AI Comic Story Creator</a:t>
             </a:r>
           </a:p>
         </p:txBody>
@@ -7629,7 +7477,7 @@
                 </a:solidFill>
                 <a:latin typeface="Calibri"/>
               </a:rPr>
-              <a:t>Abstract &amp; Project Overview</a:t>
+              <a:t>Introduction &amp; Abstract</a:t>
             </a:r>
           </a:p>
         </p:txBody>
@@ -7664,7 +7512,7 @@
                 </a:solidFill>
                 <a:latin typeface="Calibri"/>
               </a:rPr>
-              <a:t>Turning a compact creative brief into a structured, illustrated, downloadable comic book</a:t>
+              <a:t>What ComicCraft is and how it creates a complete comic from one short idea</a:t>
             </a:r>
           </a:p>
         </p:txBody>
@@ -7721,7 +7569,7 @@
         <p:spPr>
           <a:xfrm>
             <a:off x="548640" y="6510528"/>
-            <a:ext cx="7772400" cy="228600"/>
+            <a:ext cx="7315200" cy="228600"/>
           </a:xfrm>
           <a:prstGeom prst="rect">
             <a:avLst/>
@@ -7742,7 +7590,7 @@
                 </a:solidFill>
                 <a:latin typeface="Calibri"/>
               </a:rPr>
-              <a:t>ComicCraft – AI Comic Story Creator Using Gemini Models  |  Naan Mudhalvan Project</a:t>
+              <a:t>ComicCraft — AI Comic Story Creator</a:t>
             </a:r>
           </a:p>
         </p:txBody>
@@ -7756,7 +7604,7 @@
         <p:spPr>
           <a:xfrm>
             <a:off x="548640" y="1207008"/>
-            <a:ext cx="5806440" cy="5074920"/>
+            <a:ext cx="5760720" cy="5029200"/>
           </a:xfrm>
           <a:prstGeom prst="roundRect">
             <a:avLst>
@@ -7803,7 +7651,7 @@
         <p:spPr>
           <a:xfrm>
             <a:off x="548640" y="1207008"/>
-            <a:ext cx="5806440" cy="91440"/>
+            <a:ext cx="5760720" cy="91440"/>
           </a:xfrm>
           <a:prstGeom prst="rect">
             <a:avLst/>
@@ -7845,8 +7693,8 @@
         </p:nvSpPr>
         <p:spPr>
           <a:xfrm>
-            <a:off x="822960" y="1426464"/>
-            <a:ext cx="5257800" cy="365760"/>
+            <a:off x="822960" y="1444752"/>
+            <a:ext cx="5212080" cy="347472"/>
           </a:xfrm>
           <a:prstGeom prst="rect">
             <a:avLst/>
@@ -7867,7 +7715,7 @@
                 </a:solidFill>
                 <a:latin typeface="Calibri"/>
               </a:rPr>
-              <a:t>EXECUTIVE ABSTRACT</a:t>
+              <a:t>PROJECT ABSTRACT</a:t>
             </a:r>
           </a:p>
         </p:txBody>
@@ -7880,8 +7728,8 @@
         </p:nvSpPr>
         <p:spPr>
           <a:xfrm>
-            <a:off x="804672" y="1847088"/>
-            <a:ext cx="5303520" cy="4297680"/>
+            <a:off x="804672" y="1883664"/>
+            <a:ext cx="5257800" cy="4160520"/>
           </a:xfrm>
           <a:prstGeom prst="rect">
             <a:avLst/>
@@ -7896,60 +7744,60 @@
           <a:p>
             <a:pPr>
               <a:lnSpc>
-                <a:spcPct val="118000"/>
+                <a:spcPct val="122000"/>
               </a:lnSpc>
               <a:spcAft>
-                <a:spcPts val="1000"/>
+                <a:spcPts val="1100"/>
               </a:spcAft>
             </a:pPr>
             <a:r>
-              <a:rPr sz="1250" b="1">
+              <a:rPr sz="1300" b="1">
                 <a:solidFill>
                   <a:srgbClr val="0D9488"/>
                 </a:solidFill>
                 <a:latin typeface="Calibri"/>
               </a:rPr>
-              <a:t>▪ </a:t>
-            </a:r>
-            <a:r>
-              <a:rPr sz="1250" b="1">
+              <a:t>▪  </a:t>
+            </a:r>
+            <a:r>
+              <a:rPr sz="1300" b="1">
                 <a:solidFill>
                   <a:srgbClr val="0F172A"/>
                 </a:solidFill>
                 <a:latin typeface="Calibri"/>
               </a:rPr>
-              <a:t>Compact Creative Brief: </a:t>
-            </a:r>
-            <a:r>
-              <a:rPr sz="1250" b="0">
+              <a:t>Simple User Input: </a:t>
+            </a:r>
+            <a:r>
+              <a:rPr sz="1300">
                 <a:solidFill>
                   <a:srgbClr val="334155"/>
                 </a:solidFill>
                 <a:latin typeface="Calibri"/>
               </a:rPr>
-              <a:t>Users enter a story idea, main character, setting, tone, art style, and panel count (3–8 panels) via Web UI or REST JSON API.</a:t>
+              <a:t>User gives a short story idea, character name, setting, tone, art style, and panel count (3 to 8 panels).</a:t>
             </a:r>
           </a:p>
           <a:p>
             <a:pPr>
               <a:lnSpc>
-                <a:spcPct val="118000"/>
+                <a:spcPct val="122000"/>
               </a:lnSpc>
               <a:spcAft>
-                <a:spcPts val="1000"/>
+                <a:spcPts val="1100"/>
               </a:spcAft>
             </a:pPr>
             <a:r>
-              <a:rPr sz="1250" b="1">
+              <a:rPr sz="1300" b="1">
                 <a:solidFill>
                   <a:srgbClr val="0D9488"/>
                 </a:solidFill>
                 <a:latin typeface="Calibri"/>
               </a:rPr>
-              <a:t>▪ </a:t>
-            </a:r>
-            <a:r>
-              <a:rPr sz="1250" b="1">
+              <a:t>▪  </a:t>
+            </a:r>
+            <a:r>
+              <a:rPr sz="1300" b="1">
                 <a:solidFill>
                   <a:srgbClr val="0F172A"/>
                 </a:solidFill>
@@ -7958,124 +7806,124 @@
               <a:t>Two-Stage Gemini AI: </a:t>
             </a:r>
             <a:r>
-              <a:rPr sz="1250" b="0">
+              <a:rPr sz="1300">
                 <a:solidFill>
                   <a:srgbClr val="334155"/>
                 </a:solidFill>
                 <a:latin typeface="Calibri"/>
               </a:rPr>
-              <a:t>Stage 1 creates a JSON outline and Character Bible; Stage 2 expands it into captions, narration, dialogue, and image prompts.</a:t>
+              <a:t>First plans the story outline and Character Bible, then writes panel captions, narration, and dialogues.</a:t>
             </a:r>
           </a:p>
           <a:p>
             <a:pPr>
               <a:lnSpc>
-                <a:spcPct val="118000"/>
+                <a:spcPct val="122000"/>
               </a:lnSpc>
               <a:spcAft>
-                <a:spcPts val="1000"/>
+                <a:spcPts val="1100"/>
               </a:spcAft>
             </a:pPr>
             <a:r>
-              <a:rPr sz="1250" b="1">
+              <a:rPr sz="1300" b="1">
                 <a:solidFill>
                   <a:srgbClr val="0D9488"/>
                 </a:solidFill>
                 <a:latin typeface="Calibri"/>
               </a:rPr>
-              <a:t>▪ </a:t>
-            </a:r>
-            <a:r>
-              <a:rPr sz="1250" b="1">
+              <a:t>▪  </a:t>
+            </a:r>
+            <a:r>
+              <a:rPr sz="1300" b="1">
                 <a:solidFill>
                   <a:srgbClr val="0F172A"/>
                 </a:solidFill>
                 <a:latin typeface="Calibri"/>
               </a:rPr>
-              <a:t>Schema-Validated Data: </a:t>
-            </a:r>
-            <a:r>
-              <a:rPr sz="1250" b="0">
+              <a:t>Validated JSON Data: </a:t>
+            </a:r>
+            <a:r>
+              <a:rPr sz="1300">
                 <a:solidFill>
                   <a:srgbClr val="334155"/>
                 </a:solidFill>
                 <a:latin typeface="Calibri"/>
               </a:rPr>
-              <a:t>All inputs and AI JSON responses are strictly validated using Pydantic v2 models instead of fragile text splitting.</a:t>
+              <a:t>Uses Pydantic v2 to check all AI outputs so panel count and order are always accurate.</a:t>
             </a:r>
           </a:p>
           <a:p>
             <a:pPr>
               <a:lnSpc>
-                <a:spcPct val="118000"/>
+                <a:spcPct val="122000"/>
               </a:lnSpc>
               <a:spcAft>
-                <a:spcPts val="1000"/>
+                <a:spcPts val="1100"/>
               </a:spcAft>
             </a:pPr>
             <a:r>
-              <a:rPr sz="1250" b="1">
+              <a:rPr sz="1300" b="1">
                 <a:solidFill>
                   <a:srgbClr val="0D9488"/>
                 </a:solidFill>
                 <a:latin typeface="Calibri"/>
               </a:rPr>
-              <a:t>▪ </a:t>
-            </a:r>
-            <a:r>
-              <a:rPr sz="1250" b="1">
+              <a:t>▪  </a:t>
+            </a:r>
+            <a:r>
+              <a:rPr sz="1300" b="1">
                 <a:solidFill>
                   <a:srgbClr val="0F172A"/>
                 </a:solidFill>
                 <a:latin typeface="Calibri"/>
               </a:rPr>
-              <a:t>Pluggable Artwork &amp; PDF: </a:t>
-            </a:r>
-            <a:r>
-              <a:rPr sz="1250" b="0">
+              <a:t>Panel Artwork &amp; PDF: </a:t>
+            </a:r>
+            <a:r>
+              <a:rPr sz="1300">
                 <a:solidFill>
                   <a:srgbClr val="334155"/>
                 </a:solidFill>
                 <a:latin typeface="Calibri"/>
               </a:rPr>
-              <a:t>Generates per-panel PNGs (Placeholder, Hugging Face SDXL, or Local Diffusers) and compiles a Unicode A4 PDF via fpdf2.</a:t>
+              <a:t>Generates one PNG image per panel and exports a clean A4 Comic Book PDF using fpdf2.</a:t>
             </a:r>
           </a:p>
           <a:p>
             <a:pPr>
               <a:lnSpc>
-                <a:spcPct val="118000"/>
+                <a:spcPct val="122000"/>
               </a:lnSpc>
               <a:spcAft>
-                <a:spcPts val="1000"/>
+                <a:spcPts val="1100"/>
               </a:spcAft>
             </a:pPr>
             <a:r>
-              <a:rPr sz="1250" b="1">
+              <a:rPr sz="1300" b="1">
                 <a:solidFill>
                   <a:srgbClr val="0D9488"/>
                 </a:solidFill>
                 <a:latin typeface="Calibri"/>
               </a:rPr>
-              <a:t>▪ </a:t>
-            </a:r>
-            <a:r>
-              <a:rPr sz="1250" b="1">
+              <a:t>▪  </a:t>
+            </a:r>
+            <a:r>
+              <a:rPr sz="1300" b="1">
                 <a:solidFill>
                   <a:srgbClr val="0F172A"/>
                 </a:solidFill>
                 <a:latin typeface="Calibri"/>
               </a:rPr>
-              <a:t>100% Offline Resilience: </a:t>
-            </a:r>
-            <a:r>
-              <a:rPr sz="1250" b="0">
+              <a:t>Offline Ready: </a:t>
+            </a:r>
+            <a:r>
+              <a:rPr sz="1300">
                 <a:solidFill>
                   <a:srgbClr val="334155"/>
                 </a:solidFill>
                 <a:latin typeface="Calibri"/>
               </a:rPr>
-              <a:t>Includes exponential-backoff retries, fallback models, and an offline deterministic Demo Mode requiring zero API keys.</a:t>
+              <a:t>Includes a built-in Demo Mode and Placeholder Art so the full app works even without API keys.</a:t>
             </a:r>
           </a:p>
         </p:txBody>
@@ -8088,7 +7936,7 @@
         </p:nvSpPr>
         <p:spPr>
           <a:xfrm>
-            <a:off x="6629400" y="1188720"/>
+            <a:off x="6601968" y="1207008"/>
             <a:ext cx="4937760" cy="329184"/>
           </a:xfrm>
           <a:prstGeom prst="rect">
@@ -8110,7 +7958,7 @@
                 </a:solidFill>
                 <a:latin typeface="Calibri"/>
               </a:rPr>
-              <a:t>FOUR-STAGE GENERATION WORKFLOW</a:t>
+              <a:t>FOUR-STEP PIPELINE</a:t>
             </a:r>
           </a:p>
         </p:txBody>
@@ -8123,8 +7971,8 @@
         </p:nvSpPr>
         <p:spPr>
           <a:xfrm>
-            <a:off x="6629400" y="1591056"/>
-            <a:ext cx="5010912" cy="1078992"/>
+            <a:off x="6601968" y="1609344"/>
+            <a:ext cx="5038344" cy="1060704"/>
           </a:xfrm>
           <a:prstGeom prst="roundRect">
             <a:avLst>
@@ -8170,8 +8018,8 @@
         </p:nvSpPr>
         <p:spPr>
           <a:xfrm>
-            <a:off x="6629400" y="1591056"/>
-            <a:ext cx="91440" cy="1078992"/>
+            <a:off x="6601968" y="1609344"/>
+            <a:ext cx="91440" cy="1060704"/>
           </a:xfrm>
           <a:prstGeom prst="rect">
             <a:avLst/>
@@ -8213,7 +8061,7 @@
         </p:nvSpPr>
         <p:spPr>
           <a:xfrm>
-            <a:off x="6876288" y="1810512"/>
+            <a:off x="6858000" y="1837943"/>
             <a:ext cx="603504" cy="603504"/>
           </a:xfrm>
           <a:prstGeom prst="roundRect">
@@ -8260,7 +8108,7 @@
         </p:nvSpPr>
         <p:spPr>
           <a:xfrm>
-            <a:off x="6876288" y="1810512"/>
+            <a:off x="6858000" y="1837943"/>
             <a:ext cx="603504" cy="603504"/>
           </a:xfrm>
           <a:prstGeom prst="rect">
@@ -8295,8 +8143,8 @@
         </p:nvSpPr>
         <p:spPr>
           <a:xfrm>
-            <a:off x="7626096" y="1719072"/>
-            <a:ext cx="3840480" cy="310896"/>
+            <a:off x="7626096" y="1773936"/>
+            <a:ext cx="3840480" cy="292608"/>
           </a:xfrm>
           <a:prstGeom prst="rect">
             <a:avLst/>
@@ -8311,13 +8159,13 @@
           <a:p>
             <a:pPr algn="l"/>
             <a:r>
-              <a:rPr sz="1300" b="1">
+              <a:rPr sz="1400" b="1">
                 <a:solidFill>
                   <a:srgbClr val="0F172A"/>
                 </a:solidFill>
                 <a:latin typeface="Calibri"/>
               </a:rPr>
-              <a:t>PLAN  •  Story Outline &amp; Character Bible</a:t>
+              <a:t>PLAN</a:t>
             </a:r>
           </a:p>
         </p:txBody>
@@ -8330,8 +8178,8 @@
         </p:nvSpPr>
         <p:spPr>
           <a:xfrm>
-            <a:off x="7626096" y="2048256"/>
-            <a:ext cx="3840480" cy="530352"/>
+            <a:off x="7626096" y="2084832"/>
+            <a:ext cx="3840480" cy="457200"/>
           </a:xfrm>
           <a:prstGeom prst="rect">
             <a:avLst/>
@@ -8346,13 +8194,13 @@
           <a:p>
             <a:pPr algn="l"/>
             <a:r>
-              <a:rPr sz="1150" b="0">
+              <a:rPr sz="1200" b="0">
                 <a:solidFill>
                   <a:srgbClr val="334155"/>
                 </a:solidFill>
                 <a:latin typeface="Calibri"/>
               </a:rPr>
-              <a:t>Gemini Outline model plans exact N sequential panels and locks hero visual traits in JSON.</a:t>
+              <a:t>Creates comic title, Character Bible, and panel scenes.</a:t>
             </a:r>
           </a:p>
         </p:txBody>
@@ -8365,8 +8213,8 @@
         </p:nvSpPr>
         <p:spPr>
           <a:xfrm>
-            <a:off x="6629400" y="2779776"/>
-            <a:ext cx="5010912" cy="1078992"/>
+            <a:off x="6601968" y="2788920"/>
+            <a:ext cx="5038344" cy="1060704"/>
           </a:xfrm>
           <a:prstGeom prst="roundRect">
             <a:avLst>
@@ -8412,8 +8260,8 @@
         </p:nvSpPr>
         <p:spPr>
           <a:xfrm>
-            <a:off x="6629400" y="2779776"/>
-            <a:ext cx="91440" cy="1078992"/>
+            <a:off x="6601968" y="2788920"/>
+            <a:ext cx="91440" cy="1060704"/>
           </a:xfrm>
           <a:prstGeom prst="rect">
             <a:avLst/>
@@ -8455,7 +8303,7 @@
         </p:nvSpPr>
         <p:spPr>
           <a:xfrm>
-            <a:off x="6876288" y="2999232"/>
+            <a:off x="6858000" y="3017520"/>
             <a:ext cx="603504" cy="603504"/>
           </a:xfrm>
           <a:prstGeom prst="roundRect">
@@ -8502,7 +8350,7 @@
         </p:nvSpPr>
         <p:spPr>
           <a:xfrm>
-            <a:off x="6876288" y="2999232"/>
+            <a:off x="6858000" y="3017520"/>
             <a:ext cx="603504" cy="603504"/>
           </a:xfrm>
           <a:prstGeom prst="rect">
@@ -8537,8 +8385,8 @@
         </p:nvSpPr>
         <p:spPr>
           <a:xfrm>
-            <a:off x="7626096" y="2907792"/>
-            <a:ext cx="3840480" cy="310896"/>
+            <a:off x="7626096" y="2953512"/>
+            <a:ext cx="3840480" cy="292608"/>
           </a:xfrm>
           <a:prstGeom prst="rect">
             <a:avLst/>
@@ -8553,13 +8401,13 @@
           <a:p>
             <a:pPr algn="l"/>
             <a:r>
-              <a:rPr sz="1300" b="1">
+              <a:rPr sz="1400" b="1">
                 <a:solidFill>
                   <a:srgbClr val="0F172A"/>
                 </a:solidFill>
                 <a:latin typeface="Calibri"/>
               </a:rPr>
-              <a:t>WRITE  •  Full Comic Script</a:t>
+              <a:t>WRITE</a:t>
             </a:r>
           </a:p>
         </p:txBody>
@@ -8572,8 +8420,8 @@
         </p:nvSpPr>
         <p:spPr>
           <a:xfrm>
-            <a:off x="7626096" y="3236976"/>
-            <a:ext cx="3840480" cy="530352"/>
+            <a:off x="7626096" y="3264408"/>
+            <a:ext cx="3840480" cy="457200"/>
           </a:xfrm>
           <a:prstGeom prst="rect">
             <a:avLst/>
@@ -8588,13 +8436,13 @@
           <a:p>
             <a:pPr algn="l"/>
             <a:r>
-              <a:rPr sz="1150" b="0">
+              <a:rPr sz="1200" b="0">
                 <a:solidFill>
                   <a:srgbClr val="334155"/>
                 </a:solidFill>
                 <a:latin typeface="Calibri"/>
               </a:rPr>
-              <a:t>Gemini Story model writes panel captions, narration, 0–3 dialogue lines, and art prompts.</a:t>
+              <a:t>Writes panel captions, narration, and character dialogues.</a:t>
             </a:r>
           </a:p>
         </p:txBody>
@@ -8607,8 +8455,8 @@
         </p:nvSpPr>
         <p:spPr>
           <a:xfrm>
-            <a:off x="6629400" y="3968496"/>
-            <a:ext cx="5010912" cy="1078992"/>
+            <a:off x="6601968" y="3968496"/>
+            <a:ext cx="5038344" cy="1060704"/>
           </a:xfrm>
           <a:prstGeom prst="roundRect">
             <a:avLst>
@@ -8654,8 +8502,8 @@
         </p:nvSpPr>
         <p:spPr>
           <a:xfrm>
-            <a:off x="6629400" y="3968496"/>
-            <a:ext cx="91440" cy="1078992"/>
+            <a:off x="6601968" y="3968496"/>
+            <a:ext cx="91440" cy="1060704"/>
           </a:xfrm>
           <a:prstGeom prst="rect">
             <a:avLst/>
@@ -8697,7 +8545,7 @@
         </p:nvSpPr>
         <p:spPr>
           <a:xfrm>
-            <a:off x="6876288" y="4187952"/>
+            <a:off x="6858000" y="4197096"/>
             <a:ext cx="603504" cy="603504"/>
           </a:xfrm>
           <a:prstGeom prst="roundRect">
@@ -8744,7 +8592,7 @@
         </p:nvSpPr>
         <p:spPr>
           <a:xfrm>
-            <a:off x="6876288" y="4187952"/>
+            <a:off x="6858000" y="4197096"/>
             <a:ext cx="603504" cy="603504"/>
           </a:xfrm>
           <a:prstGeom prst="rect">
@@ -8779,8 +8627,8 @@
         </p:nvSpPr>
         <p:spPr>
           <a:xfrm>
-            <a:off x="7626096" y="4096511"/>
-            <a:ext cx="3840480" cy="310896"/>
+            <a:off x="7626096" y="4133087"/>
+            <a:ext cx="3840480" cy="292608"/>
           </a:xfrm>
           <a:prstGeom prst="rect">
             <a:avLst/>
@@ -8795,13 +8643,13 @@
           <a:p>
             <a:pPr algn="l"/>
             <a:r>
-              <a:rPr sz="1300" b="1">
+              <a:rPr sz="1400" b="1">
                 <a:solidFill>
                   <a:srgbClr val="0F172A"/>
                 </a:solidFill>
                 <a:latin typeface="Calibri"/>
               </a:rPr>
-              <a:t>ILLUSTRATE  •  Seeded Panel Artwork</a:t>
+              <a:t>ILLUSTRATE</a:t>
             </a:r>
           </a:p>
         </p:txBody>
@@ -8814,8 +8662,8 @@
         </p:nvSpPr>
         <p:spPr>
           <a:xfrm>
-            <a:off x="7626096" y="4425696"/>
-            <a:ext cx="3840480" cy="530352"/>
+            <a:off x="7626096" y="4443983"/>
+            <a:ext cx="3840480" cy="457200"/>
           </a:xfrm>
           <a:prstGeom prst="rect">
             <a:avLst/>
@@ -8830,13 +8678,13 @@
           <a:p>
             <a:pPr algn="l"/>
             <a:r>
-              <a:rPr sz="1150" b="0">
+              <a:rPr sz="1200" b="0">
                 <a:solidFill>
                   <a:srgbClr val="334155"/>
                 </a:solidFill>
                 <a:latin typeface="Calibri"/>
               </a:rPr>
-              <a:t>SHA-256 deterministic seed produces 1 PNG per panel via Placeholder, HF SDXL, or Diffusers.</a:t>
+              <a:t>Generates one consistent PNG image for every panel.</a:t>
             </a:r>
           </a:p>
         </p:txBody>
@@ -8849,8 +8697,8 @@
         </p:nvSpPr>
         <p:spPr>
           <a:xfrm>
-            <a:off x="6629400" y="5157216"/>
-            <a:ext cx="5010912" cy="1078992"/>
+            <a:off x="6601968" y="5148072"/>
+            <a:ext cx="5038344" cy="1060704"/>
           </a:xfrm>
           <a:prstGeom prst="roundRect">
             <a:avLst>
@@ -8896,8 +8744,8 @@
         </p:nvSpPr>
         <p:spPr>
           <a:xfrm>
-            <a:off x="6629400" y="5157216"/>
-            <a:ext cx="91440" cy="1078992"/>
+            <a:off x="6601968" y="5148072"/>
+            <a:ext cx="91440" cy="1060704"/>
           </a:xfrm>
           <a:prstGeom prst="rect">
             <a:avLst/>
@@ -8939,7 +8787,7 @@
         </p:nvSpPr>
         <p:spPr>
           <a:xfrm>
-            <a:off x="6876288" y="5376672"/>
+            <a:off x="6858000" y="5376672"/>
             <a:ext cx="603504" cy="603504"/>
           </a:xfrm>
           <a:prstGeom prst="roundRect">
@@ -8986,7 +8834,7 @@
         </p:nvSpPr>
         <p:spPr>
           <a:xfrm>
-            <a:off x="6876288" y="5376672"/>
+            <a:off x="6858000" y="5376672"/>
             <a:ext cx="603504" cy="603504"/>
           </a:xfrm>
           <a:prstGeom prst="rect">
@@ -9021,8 +8869,8 @@
         </p:nvSpPr>
         <p:spPr>
           <a:xfrm>
-            <a:off x="7626096" y="5285231"/>
-            <a:ext cx="3840480" cy="310896"/>
+            <a:off x="7626096" y="5312664"/>
+            <a:ext cx="3840480" cy="292608"/>
           </a:xfrm>
           <a:prstGeom prst="rect">
             <a:avLst/>
@@ -9037,13 +8885,13 @@
           <a:p>
             <a:pPr algn="l"/>
             <a:r>
-              <a:rPr sz="1300" b="1">
+              <a:rPr sz="1400" b="1">
                 <a:solidFill>
                   <a:srgbClr val="0F172A"/>
                 </a:solidFill>
                 <a:latin typeface="Calibri"/>
               </a:rPr>
-              <a:t>PUBLISH  •  Web Preview &amp; A4 PDF</a:t>
+              <a:t>PUBLISH</a:t>
             </a:r>
           </a:p>
         </p:txBody>
@@ -9056,8 +8904,8 @@
         </p:nvSpPr>
         <p:spPr>
           <a:xfrm>
-            <a:off x="7626096" y="5614416"/>
-            <a:ext cx="3840480" cy="530352"/>
+            <a:off x="7626096" y="5623560"/>
+            <a:ext cx="3840480" cy="457200"/>
           </a:xfrm>
           <a:prstGeom prst="rect">
             <a:avLst/>
@@ -9072,13 +8920,13 @@
           <a:p>
             <a:pPr algn="l"/>
             <a:r>
-              <a:rPr sz="1150" b="0">
+              <a:rPr sz="1200" b="0">
                 <a:solidFill>
                   <a:srgbClr val="334155"/>
                 </a:solidFill>
                 <a:latin typeface="Calibri"/>
               </a:rPr>
-              <a:t>Builds Cover + Panel PDF (fpdf2) and saves atomic comic.json inside a UUID workspace.</a:t>
+              <a:t>Shows responsive web preview and builds an A4 PDF.</a:t>
             </a:r>
           </a:p>
         </p:txBody>
@@ -9305,7 +9153,7 @@
                 </a:solidFill>
                 <a:latin typeface="Calibri"/>
               </a:rPr>
-              <a:t>Problem Statement &amp; Core Objectives</a:t>
+              <a:t>Problem Statement &amp; Objectives</a:t>
             </a:r>
           </a:p>
         </p:txBody>
@@ -9340,7 +9188,7 @@
                 </a:solidFill>
                 <a:latin typeface="Calibri"/>
               </a:rPr>
-              <a:t>Why manual or naive AI comic scripts fail — and the engineering goals ComicCraft achieves</a:t>
+              <a:t>Challenges in comic creation and how ComicCraft solves them</a:t>
             </a:r>
           </a:p>
         </p:txBody>
@@ -9397,7 +9245,7 @@
         <p:spPr>
           <a:xfrm>
             <a:off x="548640" y="6510528"/>
-            <a:ext cx="7772400" cy="228600"/>
+            <a:ext cx="7315200" cy="228600"/>
           </a:xfrm>
           <a:prstGeom prst="rect">
             <a:avLst/>
@@ -9418,7 +9266,7 @@
                 </a:solidFill>
                 <a:latin typeface="Calibri"/>
               </a:rPr>
-              <a:t>ComicCraft – AI Comic Story Creator Using Gemini Models  |  Naan Mudhalvan Project</a:t>
+              <a:t>ComicCraft — AI Comic Story Creator</a:t>
             </a:r>
           </a:p>
         </p:txBody>
@@ -9431,7 +9279,7 @@
         </p:nvSpPr>
         <p:spPr>
           <a:xfrm>
-            <a:off x="548640" y="1170432"/>
+            <a:off x="548640" y="1188720"/>
             <a:ext cx="5394960" cy="420624"/>
           </a:xfrm>
           <a:prstGeom prst="roundRect">
@@ -9476,7 +9324,7 @@
         </p:nvSpPr>
         <p:spPr>
           <a:xfrm>
-            <a:off x="731520" y="1170432"/>
+            <a:off x="731520" y="1188720"/>
             <a:ext cx="5029200" cy="420624"/>
           </a:xfrm>
           <a:prstGeom prst="rect">
@@ -9498,7 +9346,7 @@
                 </a:solidFill>
                 <a:latin typeface="Calibri"/>
               </a:rPr>
-              <a:t>PROBLEMS IN EXISTING / NAIVE APPROACHES</a:t>
+              <a:t>PROBLEM STATEMENT</a:t>
             </a:r>
           </a:p>
         </p:txBody>
@@ -9511,8 +9359,8 @@
         </p:nvSpPr>
         <p:spPr>
           <a:xfrm>
-            <a:off x="548640" y="1719072"/>
-            <a:ext cx="5394960" cy="1051560"/>
+            <a:off x="548640" y="1737360"/>
+            <a:ext cx="5394960" cy="1024128"/>
           </a:xfrm>
           <a:prstGeom prst="roundRect">
             <a:avLst>
@@ -9558,8 +9406,8 @@
         </p:nvSpPr>
         <p:spPr>
           <a:xfrm>
-            <a:off x="548640" y="1719072"/>
-            <a:ext cx="91440" cy="1051560"/>
+            <a:off x="548640" y="1737360"/>
+            <a:ext cx="91440" cy="1024128"/>
           </a:xfrm>
           <a:prstGeom prst="rect">
             <a:avLst/>
@@ -9601,7 +9449,7 @@
         </p:nvSpPr>
         <p:spPr>
           <a:xfrm>
-            <a:off x="786384" y="1810512"/>
+            <a:off x="786384" y="1847088"/>
             <a:ext cx="4983480" cy="292608"/>
           </a:xfrm>
           <a:prstGeom prst="rect">
@@ -9617,13 +9465,13 @@
           <a:p>
             <a:pPr algn="l"/>
             <a:r>
-              <a:rPr sz="1300" b="1">
+              <a:rPr sz="1350" b="1">
                 <a:solidFill>
                   <a:srgbClr val="E11D48"/>
                 </a:solidFill>
                 <a:latin typeface="Calibri"/>
               </a:rPr>
-              <a:t>1. Multi-Skill Bottleneck</a:t>
+              <a:t>1. Needs Multiple Skills</a:t>
             </a:r>
           </a:p>
         </p:txBody>
@@ -9636,8 +9484,8 @@
         </p:nvSpPr>
         <p:spPr>
           <a:xfrm>
-            <a:off x="786384" y="2103120"/>
-            <a:ext cx="4983480" cy="585216"/>
+            <a:off x="786384" y="2157984"/>
+            <a:ext cx="4983480" cy="512064"/>
           </a:xfrm>
           <a:prstGeom prst="rect">
             <a:avLst/>
@@ -9652,13 +9500,13 @@
           <a:p>
             <a:pPr algn="l"/>
             <a:r>
-              <a:rPr sz="1150" b="0">
+              <a:rPr sz="1200" b="0">
                 <a:solidFill>
                   <a:srgbClr val="334155"/>
                 </a:solidFill>
                 <a:latin typeface="Calibri"/>
               </a:rPr>
-              <a:t>Creating a comic manually requires separate writing, illustration, and page-layout skills, causing beginners to abandon projects.</a:t>
+              <a:t>Creating a comic manually needs story writing, drawing, and page layout skills.</a:t>
             </a:r>
           </a:p>
         </p:txBody>
@@ -9672,7 +9520,7 @@
         <p:spPr>
           <a:xfrm>
             <a:off x="548640" y="2871215"/>
-            <a:ext cx="5394960" cy="1051560"/>
+            <a:ext cx="5394960" cy="1024128"/>
           </a:xfrm>
           <a:prstGeom prst="roundRect">
             <a:avLst>
@@ -9719,7 +9567,7 @@
         <p:spPr>
           <a:xfrm>
             <a:off x="548640" y="2871215"/>
-            <a:ext cx="91440" cy="1051560"/>
+            <a:ext cx="91440" cy="1024128"/>
           </a:xfrm>
           <a:prstGeom prst="rect">
             <a:avLst/>
@@ -9761,7 +9609,7 @@
         </p:nvSpPr>
         <p:spPr>
           <a:xfrm>
-            <a:off x="786384" y="2962656"/>
+            <a:off x="786384" y="2980944"/>
             <a:ext cx="4983480" cy="292608"/>
           </a:xfrm>
           <a:prstGeom prst="rect">
@@ -9777,13 +9625,13 @@
           <a:p>
             <a:pPr algn="l"/>
             <a:r>
-              <a:rPr sz="1300" b="1">
+              <a:rPr sz="1350" b="1">
                 <a:solidFill>
                   <a:srgbClr val="E11D48"/>
                 </a:solidFill>
                 <a:latin typeface="Calibri"/>
               </a:rPr>
-              <a:t>2. Brittle Plain-Text Parsing</a:t>
+              <a:t>2. Unstructured AI Text</a:t>
             </a:r>
           </a:p>
         </p:txBody>
@@ -9796,8 +9644,8 @@
         </p:nvSpPr>
         <p:spPr>
           <a:xfrm>
-            <a:off x="786384" y="3255263"/>
-            <a:ext cx="4983480" cy="585216"/>
+            <a:off x="786384" y="3291839"/>
+            <a:ext cx="4983480" cy="512064"/>
           </a:xfrm>
           <a:prstGeom prst="rect">
             <a:avLst/>
@@ -9812,13 +9660,13 @@
           <a:p>
             <a:pPr algn="l"/>
             <a:r>
-              <a:rPr sz="1150" b="0">
+              <a:rPr sz="1200" b="0">
                 <a:solidFill>
                   <a:srgbClr val="334155"/>
                 </a:solidFill>
                 <a:latin typeface="Calibri"/>
               </a:rPr>
-              <a:t>Naive AI scripts split free-form chat text on markers like '**Panel' — minor formatting drift crashes the parser.</a:t>
+              <a:t>Normal AI chat replies return plain text, which breaks easily when splitting into panels.</a:t>
             </a:r>
           </a:p>
         </p:txBody>
@@ -9831,8 +9679,8 @@
         </p:nvSpPr>
         <p:spPr>
           <a:xfrm>
-            <a:off x="548640" y="4023359"/>
-            <a:ext cx="5394960" cy="1051560"/>
+            <a:off x="548640" y="4005072"/>
+            <a:ext cx="5394960" cy="1024128"/>
           </a:xfrm>
           <a:prstGeom prst="roundRect">
             <a:avLst>
@@ -9878,8 +9726,8 @@
         </p:nvSpPr>
         <p:spPr>
           <a:xfrm>
-            <a:off x="548640" y="4023359"/>
-            <a:ext cx="91440" cy="1051560"/>
+            <a:off x="548640" y="4005072"/>
+            <a:ext cx="91440" cy="1024128"/>
           </a:xfrm>
           <a:prstGeom prst="rect">
             <a:avLst/>
@@ -9921,7 +9769,7 @@
         </p:nvSpPr>
         <p:spPr>
           <a:xfrm>
-            <a:off x="786384" y="4114799"/>
+            <a:off x="786384" y="4114800"/>
             <a:ext cx="4983480" cy="292608"/>
           </a:xfrm>
           <a:prstGeom prst="rect">
@@ -9937,13 +9785,13 @@
           <a:p>
             <a:pPr algn="l"/>
             <a:r>
-              <a:rPr sz="1300" b="1">
+              <a:rPr sz="1350" b="1">
                 <a:solidFill>
                   <a:srgbClr val="E11D48"/>
                 </a:solidFill>
                 <a:latin typeface="Calibri"/>
               </a:rPr>
-              <a:t>3. Character Visual Drift</a:t>
+              <a:t>3. Inconsistent Characters</a:t>
             </a:r>
           </a:p>
         </p:txBody>
@@ -9956,8 +9804,8 @@
         </p:nvSpPr>
         <p:spPr>
           <a:xfrm>
-            <a:off x="786384" y="4407407"/>
-            <a:ext cx="4983480" cy="585216"/>
+            <a:off x="786384" y="4425696"/>
+            <a:ext cx="4983480" cy="512064"/>
           </a:xfrm>
           <a:prstGeom prst="rect">
             <a:avLst/>
@@ -9972,13 +9820,13 @@
           <a:p>
             <a:pPr algn="l"/>
             <a:r>
-              <a:rPr sz="1150" b="0">
+              <a:rPr sz="1200" b="0">
                 <a:solidFill>
                   <a:srgbClr val="334155"/>
                 </a:solidFill>
                 <a:latin typeface="Calibri"/>
               </a:rPr>
-              <a:t>Generating panel images independently causes the main character's face, clothes, and colors to change every panel.</a:t>
+              <a:t>Independent image prompts make the hero's face and outfit change in every panel.</a:t>
             </a:r>
           </a:p>
         </p:txBody>
@@ -9991,8 +9839,8 @@
         </p:nvSpPr>
         <p:spPr>
           <a:xfrm>
-            <a:off x="548640" y="5175503"/>
-            <a:ext cx="5394960" cy="1051560"/>
+            <a:off x="548640" y="5138928"/>
+            <a:ext cx="5394960" cy="1024128"/>
           </a:xfrm>
           <a:prstGeom prst="roundRect">
             <a:avLst>
@@ -10038,8 +9886,8 @@
         </p:nvSpPr>
         <p:spPr>
           <a:xfrm>
-            <a:off x="548640" y="5175503"/>
-            <a:ext cx="91440" cy="1051560"/>
+            <a:off x="548640" y="5138928"/>
+            <a:ext cx="91440" cy="1024128"/>
           </a:xfrm>
           <a:prstGeom prst="rect">
             <a:avLst/>
@@ -10081,7 +9929,7 @@
         </p:nvSpPr>
         <p:spPr>
           <a:xfrm>
-            <a:off x="786384" y="5266943"/>
+            <a:off x="786384" y="5248656"/>
             <a:ext cx="4983480" cy="292608"/>
           </a:xfrm>
           <a:prstGeom prst="rect">
@@ -10097,13 +9945,13 @@
           <a:p>
             <a:pPr algn="l"/>
             <a:r>
-              <a:rPr sz="1300" b="1">
+              <a:rPr sz="1350" b="1">
                 <a:solidFill>
                   <a:srgbClr val="E11D48"/>
                 </a:solidFill>
                 <a:latin typeface="Calibri"/>
               </a:rPr>
-              <a:t>4. Hard Failures &amp; Paid Key Lock-In</a:t>
+              <a:t>4. API &amp; Key Failures</a:t>
             </a:r>
           </a:p>
         </p:txBody>
@@ -10116,8 +9964,8 @@
         </p:nvSpPr>
         <p:spPr>
           <a:xfrm>
-            <a:off x="786384" y="5559551"/>
-            <a:ext cx="4983480" cy="585216"/>
+            <a:off x="786384" y="5559552"/>
+            <a:ext cx="4983480" cy="512064"/>
           </a:xfrm>
           <a:prstGeom prst="rect">
             <a:avLst/>
@@ -10132,13 +9980,13 @@
           <a:p>
             <a:pPr algn="l"/>
             <a:r>
-              <a:rPr sz="1150" b="0">
+              <a:rPr sz="1200" b="0">
                 <a:solidFill>
                   <a:srgbClr val="334155"/>
                 </a:solidFill>
                 <a:latin typeface="Calibri"/>
               </a:rPr>
-              <a:t>API rate-limits (429), retired model names (404), or missing paid credentials break the entire application.</a:t>
+              <a:t>Rate limits, model changes, or missing API keys stop normal AI apps from working.</a:t>
             </a:r>
           </a:p>
         </p:txBody>
@@ -10151,7 +9999,7 @@
         </p:nvSpPr>
         <p:spPr>
           <a:xfrm>
-            <a:off x="6245352" y="1170432"/>
+            <a:off x="6245352" y="1188720"/>
             <a:ext cx="5394960" cy="420624"/>
           </a:xfrm>
           <a:prstGeom prst="roundRect">
@@ -10196,7 +10044,7 @@
         </p:nvSpPr>
         <p:spPr>
           <a:xfrm>
-            <a:off x="6428232" y="1170432"/>
+            <a:off x="6428232" y="1188720"/>
             <a:ext cx="5029200" cy="420624"/>
           </a:xfrm>
           <a:prstGeom prst="rect">
@@ -10218,7 +10066,7 @@
                 </a:solidFill>
                 <a:latin typeface="Calibri"/>
               </a:rPr>
-              <a:t>COMICCRAFT PROJECT OBJECTIVES</a:t>
+              <a:t>PROJECT OBJECTIVES</a:t>
             </a:r>
           </a:p>
         </p:txBody>
@@ -10231,8 +10079,8 @@
         </p:nvSpPr>
         <p:spPr>
           <a:xfrm>
-            <a:off x="6245352" y="1719072"/>
-            <a:ext cx="5394960" cy="1051560"/>
+            <a:off x="6245352" y="1737360"/>
+            <a:ext cx="5394960" cy="1024128"/>
           </a:xfrm>
           <a:prstGeom prst="roundRect">
             <a:avLst>
@@ -10278,8 +10126,8 @@
         </p:nvSpPr>
         <p:spPr>
           <a:xfrm>
-            <a:off x="6245352" y="1719072"/>
-            <a:ext cx="91440" cy="1051560"/>
+            <a:off x="6245352" y="1737360"/>
+            <a:ext cx="91440" cy="1024128"/>
           </a:xfrm>
           <a:prstGeom prst="rect">
             <a:avLst/>
@@ -10321,7 +10169,7 @@
         </p:nvSpPr>
         <p:spPr>
           <a:xfrm>
-            <a:off x="6483096" y="1810512"/>
+            <a:off x="6483096" y="1847088"/>
             <a:ext cx="4983480" cy="292608"/>
           </a:xfrm>
           <a:prstGeom prst="rect">
@@ -10337,13 +10185,13 @@
           <a:p>
             <a:pPr algn="l"/>
             <a:r>
-              <a:rPr sz="1300" b="1">
+              <a:rPr sz="1350" b="1">
                 <a:solidFill>
                   <a:srgbClr val="0D9488"/>
                 </a:solidFill>
                 <a:latin typeface="Calibri"/>
               </a:rPr>
-              <a:t>1. Unified Single-Brief Studio</a:t>
+              <a:t>1. One-Stop Comic Studio</a:t>
             </a:r>
           </a:p>
         </p:txBody>
@@ -10356,8 +10204,8 @@
         </p:nvSpPr>
         <p:spPr>
           <a:xfrm>
-            <a:off x="6483096" y="2103120"/>
-            <a:ext cx="4983480" cy="585216"/>
+            <a:off x="6483096" y="2157984"/>
+            <a:ext cx="4983480" cy="512064"/>
           </a:xfrm>
           <a:prstGeom prst="rect">
             <a:avLst/>
@@ -10372,13 +10220,13 @@
           <a:p>
             <a:pPr algn="l"/>
             <a:r>
-              <a:rPr sz="1150" b="0">
+              <a:rPr sz="1200" b="0">
                 <a:solidFill>
                   <a:srgbClr val="334155"/>
                 </a:solidFill>
                 <a:latin typeface="Calibri"/>
               </a:rPr>
-              <a:t>Generate complete 3–8 panel comics from one browser form or versioned REST JSON API (/api/v1/comics).</a:t>
+              <a:t>Convert one story brief into a complete 3–8 panel comic via Web UI or JSON API.</a:t>
             </a:r>
           </a:p>
         </p:txBody>
@@ -10392,7 +10240,7 @@
         <p:spPr>
           <a:xfrm>
             <a:off x="6245352" y="2871215"/>
-            <a:ext cx="5394960" cy="1051560"/>
+            <a:ext cx="5394960" cy="1024128"/>
           </a:xfrm>
           <a:prstGeom prst="roundRect">
             <a:avLst>
@@ -10439,7 +10287,7 @@
         <p:spPr>
           <a:xfrm>
             <a:off x="6245352" y="2871215"/>
-            <a:ext cx="91440" cy="1051560"/>
+            <a:ext cx="91440" cy="1024128"/>
           </a:xfrm>
           <a:prstGeom prst="rect">
             <a:avLst/>
@@ -10481,7 +10329,7 @@
         </p:nvSpPr>
         <p:spPr>
           <a:xfrm>
-            <a:off x="6483096" y="2962656"/>
+            <a:off x="6483096" y="2980944"/>
             <a:ext cx="4983480" cy="292608"/>
           </a:xfrm>
           <a:prstGeom prst="rect">
@@ -10497,13 +10345,13 @@
           <a:p>
             <a:pPr algn="l"/>
             <a:r>
-              <a:rPr sz="1300" b="1">
+              <a:rPr sz="1350" b="1">
                 <a:solidFill>
                   <a:srgbClr val="0D9488"/>
                 </a:solidFill>
                 <a:latin typeface="Calibri"/>
               </a:rPr>
-              <a:t>2. Strict JSON Schema Validation</a:t>
+              <a:t>2. Strict JSON Validation</a:t>
             </a:r>
           </a:p>
         </p:txBody>
@@ -10516,8 +10364,8 @@
         </p:nvSpPr>
         <p:spPr>
           <a:xfrm>
-            <a:off x="6483096" y="3255263"/>
-            <a:ext cx="4983480" cy="585216"/>
+            <a:off x="6483096" y="3291839"/>
+            <a:ext cx="4983480" cy="512064"/>
           </a:xfrm>
           <a:prstGeom prst="rect">
             <a:avLst/>
@@ -10532,13 +10380,13 @@
           <a:p>
             <a:pPr algn="l"/>
             <a:r>
-              <a:rPr sz="1150" b="0">
+              <a:rPr sz="1200" b="0">
                 <a:solidFill>
                   <a:srgbClr val="334155"/>
                 </a:solidFill>
                 <a:latin typeface="Calibri"/>
               </a:rPr>
-              <a:t>Use Gemini JSON mode parsed into Pydantic v2 contracts that enforce exact panel counts and numbering.</a:t>
+              <a:t>Use Gemini JSON mode and Pydantic schemas so panel structure never breaks.</a:t>
             </a:r>
           </a:p>
         </p:txBody>
@@ -10551,8 +10399,8 @@
         </p:nvSpPr>
         <p:spPr>
           <a:xfrm>
-            <a:off x="6245352" y="4023359"/>
-            <a:ext cx="5394960" cy="1051560"/>
+            <a:off x="6245352" y="4005072"/>
+            <a:ext cx="5394960" cy="1024128"/>
           </a:xfrm>
           <a:prstGeom prst="roundRect">
             <a:avLst>
@@ -10598,8 +10446,8 @@
         </p:nvSpPr>
         <p:spPr>
           <a:xfrm>
-            <a:off x="6245352" y="4023359"/>
-            <a:ext cx="91440" cy="1051560"/>
+            <a:off x="6245352" y="4005072"/>
+            <a:ext cx="91440" cy="1024128"/>
           </a:xfrm>
           <a:prstGeom prst="rect">
             <a:avLst/>
@@ -10641,7 +10489,7 @@
         </p:nvSpPr>
         <p:spPr>
           <a:xfrm>
-            <a:off x="6483096" y="4114799"/>
+            <a:off x="6483096" y="4114800"/>
             <a:ext cx="4983480" cy="292608"/>
           </a:xfrm>
           <a:prstGeom prst="rect">
@@ -10657,13 +10505,13 @@
           <a:p>
             <a:pPr algn="l"/>
             <a:r>
-              <a:rPr sz="1300" b="1">
+              <a:rPr sz="1350" b="1">
                 <a:solidFill>
                   <a:srgbClr val="0D9488"/>
                 </a:solidFill>
                 <a:latin typeface="Calibri"/>
               </a:rPr>
-              <a:t>3. Character Bible Continuity</a:t>
+              <a:t>3. Character Continuity</a:t>
             </a:r>
           </a:p>
         </p:txBody>
@@ -10676,8 +10524,8 @@
         </p:nvSpPr>
         <p:spPr>
           <a:xfrm>
-            <a:off x="6483096" y="4407407"/>
-            <a:ext cx="4983480" cy="585216"/>
+            <a:off x="6483096" y="4425696"/>
+            <a:ext cx="4983480" cy="512064"/>
           </a:xfrm>
           <a:prstGeom prst="rect">
             <a:avLst/>
@@ -10692,13 +10540,13 @@
           <a:p>
             <a:pPr algn="l"/>
             <a:r>
-              <a:rPr sz="1150" b="0">
+              <a:rPr sz="1200" b="0">
                 <a:solidFill>
                   <a:srgbClr val="334155"/>
                 </a:solidFill>
                 <a:latin typeface="Calibri"/>
               </a:rPr>
-              <a:t>Lock hero appearance in Stage 1 and repeat visual traits + negative prompts across every panel image.</a:t>
+              <a:t>Keep the hero visually consistent across all panels using a Character Bible.</a:t>
             </a:r>
           </a:p>
         </p:txBody>
@@ -10711,8 +10559,8 @@
         </p:nvSpPr>
         <p:spPr>
           <a:xfrm>
-            <a:off x="6245352" y="5175503"/>
-            <a:ext cx="5394960" cy="1051560"/>
+            <a:off x="6245352" y="5138928"/>
+            <a:ext cx="5394960" cy="1024128"/>
           </a:xfrm>
           <a:prstGeom prst="roundRect">
             <a:avLst>
@@ -10758,8 +10606,8 @@
         </p:nvSpPr>
         <p:spPr>
           <a:xfrm>
-            <a:off x="6245352" y="5175503"/>
-            <a:ext cx="91440" cy="1051560"/>
+            <a:off x="6245352" y="5138928"/>
+            <a:ext cx="91440" cy="1024128"/>
           </a:xfrm>
           <a:prstGeom prst="rect">
             <a:avLst/>
@@ -10801,7 +10649,7 @@
         </p:nvSpPr>
         <p:spPr>
           <a:xfrm>
-            <a:off x="6483096" y="5266943"/>
+            <a:off x="6483096" y="5248656"/>
             <a:ext cx="4983480" cy="292608"/>
           </a:xfrm>
           <a:prstGeom prst="rect">
@@ -10817,13 +10665,13 @@
           <a:p>
             <a:pPr algn="l"/>
             <a:r>
-              <a:rPr sz="1300" b="1">
+              <a:rPr sz="1350" b="1">
                 <a:solidFill>
                   <a:srgbClr val="0D9488"/>
                 </a:solidFill>
                 <a:latin typeface="Calibri"/>
               </a:rPr>
-              <a:t>4. Graceful Offline &amp; Fallback Support</a:t>
+              <a:t>4. Always-Working Fallback</a:t>
             </a:r>
           </a:p>
         </p:txBody>
@@ -10836,8 +10684,8 @@
         </p:nvSpPr>
         <p:spPr>
           <a:xfrm>
-            <a:off x="6483096" y="5559551"/>
-            <a:ext cx="4983480" cy="585216"/>
+            <a:off x="6483096" y="5559552"/>
+            <a:ext cx="4983480" cy="512064"/>
           </a:xfrm>
           <a:prstGeom prst="rect">
             <a:avLst/>
@@ -10852,13 +10700,13 @@
           <a:p>
             <a:pPr algn="l"/>
             <a:r>
-              <a:rPr sz="1150" b="0">
+              <a:rPr sz="1200" b="0">
                 <a:solidFill>
                   <a:srgbClr val="334155"/>
                 </a:solidFill>
                 <a:latin typeface="Calibri"/>
               </a:rPr>
-              <a:t>Provide retries, fallback model chains, offline Demo Writer, and Pillow Placeholder art for 100% uptime.</a:t>
+              <a:t>Support automatic retries and an Offline Demo Mode that needs no API keys.</a:t>
             </a:r>
           </a:p>
         </p:txBody>
@@ -11120,7 +10968,7 @@
                 </a:solidFill>
                 <a:latin typeface="Calibri"/>
               </a:rPr>
-              <a:t>Direct architectural comparison between conventional/fragile scripts and ComicCraft</a:t>
+              <a:t>How ComicCraft improves upon manual methods and basic AI scripts</a:t>
             </a:r>
           </a:p>
         </p:txBody>
@@ -11177,7 +11025,7 @@
         <p:spPr>
           <a:xfrm>
             <a:off x="548640" y="6510528"/>
-            <a:ext cx="7772400" cy="228600"/>
+            <a:ext cx="7315200" cy="228600"/>
           </a:xfrm>
           <a:prstGeom prst="rect">
             <a:avLst/>
@@ -11198,7 +11046,7 @@
                 </a:solidFill>
                 <a:latin typeface="Calibri"/>
               </a:rPr>
-              <a:t>ComicCraft – AI Comic Story Creator Using Gemini Models  |  Naan Mudhalvan Project</a:t>
+              <a:t>ComicCraft — AI Comic Story Creator</a:t>
             </a:r>
           </a:p>
         </p:txBody>
@@ -11212,8 +11060,8 @@
           <p:nvPr/>
         </p:nvGraphicFramePr>
         <p:xfrm>
-          <a:off x="548640" y="1207008"/>
-          <a:ext cx="11091672" cy="4343400"/>
+          <a:off x="548640" y="1243584"/>
+          <a:ext cx="11091672" cy="4251960"/>
         </p:xfrm>
         <a:graphic>
           <a:graphicData uri="http://schemas.openxmlformats.org/drawingml/2006/table">
@@ -11226,29 +11074,24 @@
                 <a:gridCol w="4334256"/>
                 <a:gridCol w="4517136"/>
               </a:tblGrid>
-              <a:tr h="723900">
+              <a:tr h="708660">
                 <a:tc>
                   <a:txBody>
                     <a:bodyPr/>
                     <a:lstStyle/>
                     <a:p>
-                      <a:pPr>
-                        <a:lnSpc>
-                          <a:spcPct val="115000"/>
-                        </a:lnSpc>
-                      </a:pPr>
                       <a:r>
-                        <a:rPr sz="1300" b="1">
+                        <a:rPr sz="1350" b="1">
                           <a:solidFill>
                             <a:srgbClr val="FFFFFF"/>
                           </a:solidFill>
                           <a:latin typeface="Calibri"/>
                         </a:rPr>
-                        <a:t>Dimension</a:t>
+                        <a:t>Feature</a:t>
                       </a:r>
                     </a:p>
                   </a:txBody>
-                  <a:tcPr anchor="ctr" marL="128016" marR="128016" marT="73152" marB="73152">
+                  <a:tcPr anchor="ctr" marL="146304" marR="146304" marT="73152" marB="73152">
                     <a:solidFill>
                       <a:srgbClr val="0F172A"/>
                     </a:solidFill>
@@ -11259,23 +11102,18 @@
                     <a:bodyPr/>
                     <a:lstStyle/>
                     <a:p>
-                      <a:pPr>
-                        <a:lnSpc>
-                          <a:spcPct val="115000"/>
-                        </a:lnSpc>
-                      </a:pPr>
                       <a:r>
-                        <a:rPr sz="1300" b="1">
+                        <a:rPr sz="1350" b="1">
                           <a:solidFill>
                             <a:srgbClr val="FFFFFF"/>
                           </a:solidFill>
                           <a:latin typeface="Calibri"/>
                         </a:rPr>
-                        <a:t>Existing / Naive AI System</a:t>
+                        <a:t>Existing System</a:t>
                       </a:r>
                     </a:p>
                   </a:txBody>
-                  <a:tcPr anchor="ctr" marL="128016" marR="128016" marT="73152" marB="73152">
+                  <a:tcPr anchor="ctr" marL="146304" marR="146304" marT="73152" marB="73152">
                     <a:solidFill>
                       <a:srgbClr val="0F172A"/>
                     </a:solidFill>
@@ -11286,13 +11124,8 @@
                     <a:bodyPr/>
                     <a:lstStyle/>
                     <a:p>
-                      <a:pPr>
-                        <a:lnSpc>
-                          <a:spcPct val="115000"/>
-                        </a:lnSpc>
-                      </a:pPr>
                       <a:r>
-                        <a:rPr sz="1300" b="1">
+                        <a:rPr sz="1350" b="1">
                           <a:solidFill>
                             <a:srgbClr val="FFFFFF"/>
                           </a:solidFill>
@@ -11302,36 +11135,31 @@
                       </a:r>
                     </a:p>
                   </a:txBody>
-                  <a:tcPr anchor="ctr" marL="128016" marR="128016" marT="73152" marB="73152">
+                  <a:tcPr anchor="ctr" marL="146304" marR="146304" marT="73152" marB="73152">
                     <a:solidFill>
                       <a:srgbClr val="0D9488"/>
                     </a:solidFill>
                   </a:tcPr>
                 </a:tc>
               </a:tr>
-              <a:tr h="723900">
+              <a:tr h="708660">
                 <a:tc>
                   <a:txBody>
                     <a:bodyPr/>
                     <a:lstStyle/>
                     <a:p>
-                      <a:pPr>
-                        <a:lnSpc>
-                          <a:spcPct val="115000"/>
-                        </a:lnSpc>
-                      </a:pPr>
                       <a:r>
-                        <a:rPr sz="1250" b="1">
+                        <a:rPr sz="1300" b="1">
                           <a:solidFill>
                             <a:srgbClr val="0F172A"/>
                           </a:solidFill>
                           <a:latin typeface="Calibri"/>
                         </a:rPr>
-                        <a:t>Workflow Pipeline</a:t>
+                        <a:t>Workflow</a:t>
                       </a:r>
                     </a:p>
                   </a:txBody>
-                  <a:tcPr anchor="ctr" marL="128016" marR="128016" marT="73152" marB="73152">
+                  <a:tcPr anchor="ctr" marL="146304" marR="146304" marT="73152" marB="73152">
                     <a:solidFill>
                       <a:srgbClr val="FFFFFF"/>
                     </a:solidFill>
@@ -11342,23 +11170,18 @@
                     <a:bodyPr/>
                     <a:lstStyle/>
                     <a:p>
-                      <a:pPr>
-                        <a:lnSpc>
-                          <a:spcPct val="115000"/>
-                        </a:lnSpc>
-                      </a:pPr>
                       <a:r>
-                        <a:rPr sz="1200">
+                        <a:rPr sz="1250">
                           <a:solidFill>
                             <a:srgbClr val="64748B"/>
                           </a:solidFill>
                           <a:latin typeface="Calibri"/>
                         </a:rPr>
-                        <a:t>Disconnected tools for script writing, illustration, and manual PDF layout.</a:t>
+                        <a:t>Separate tools for writing, drawing, and layout.</a:t>
                       </a:r>
                     </a:p>
                   </a:txBody>
-                  <a:tcPr anchor="ctr" marL="128016" marR="128016" marT="73152" marB="73152">
+                  <a:tcPr anchor="ctr" marL="146304" marR="146304" marT="73152" marB="73152">
                     <a:solidFill>
                       <a:srgbClr val="FFFFFF"/>
                     </a:solidFill>
@@ -11369,40 +11192,6 @@
                     <a:bodyPr/>
                     <a:lstStyle/>
                     <a:p>
-                      <a:pPr>
-                        <a:lnSpc>
-                          <a:spcPct val="115000"/>
-                        </a:lnSpc>
-                      </a:pPr>
-                      <a:r>
-                        <a:rPr sz="1200" b="1">
-                          <a:solidFill>
-                            <a:srgbClr val="0F172A"/>
-                          </a:solidFill>
-                          <a:latin typeface="Calibri"/>
-                        </a:rPr>
-                        <a:t>Single integrated FastAPI pipeline from user brief to preview and A4 PDF.</a:t>
-                      </a:r>
-                    </a:p>
-                  </a:txBody>
-                  <a:tcPr anchor="ctr" marL="128016" marR="128016" marT="73152" marB="73152">
-                    <a:solidFill>
-                      <a:srgbClr val="F0FDFA"/>
-                    </a:solidFill>
-                  </a:tcPr>
-                </a:tc>
-              </a:tr>
-              <a:tr h="723900">
-                <a:tc>
-                  <a:txBody>
-                    <a:bodyPr/>
-                    <a:lstStyle/>
-                    <a:p>
-                      <a:pPr>
-                        <a:lnSpc>
-                          <a:spcPct val="115000"/>
-                        </a:lnSpc>
-                      </a:pPr>
                       <a:r>
                         <a:rPr sz="1250" b="1">
                           <a:solidFill>
@@ -11410,11 +11199,35 @@
                           </a:solidFill>
                           <a:latin typeface="Calibri"/>
                         </a:rPr>
-                        <a:t>AI Output Parsing</a:t>
+                        <a:t>Single web app from story prompt to A4 PDF.</a:t>
                       </a:r>
                     </a:p>
                   </a:txBody>
-                  <a:tcPr anchor="ctr" marL="128016" marR="128016" marT="73152" marB="73152">
+                  <a:tcPr anchor="ctr" marL="146304" marR="146304" marT="73152" marB="73152">
+                    <a:solidFill>
+                      <a:srgbClr val="F0FDFA"/>
+                    </a:solidFill>
+                  </a:tcPr>
+                </a:tc>
+              </a:tr>
+              <a:tr h="708660">
+                <a:tc>
+                  <a:txBody>
+                    <a:bodyPr/>
+                    <a:lstStyle/>
+                    <a:p>
+                      <a:r>
+                        <a:rPr sz="1300" b="1">
+                          <a:solidFill>
+                            <a:srgbClr val="0F172A"/>
+                          </a:solidFill>
+                          <a:latin typeface="Calibri"/>
+                        </a:rPr>
+                        <a:t>AI Output</a:t>
+                      </a:r>
+                    </a:p>
+                  </a:txBody>
+                  <a:tcPr anchor="ctr" marL="146304" marR="146304" marT="73152" marB="73152">
                     <a:solidFill>
                       <a:srgbClr val="F1F5F9"/>
                     </a:solidFill>
@@ -11425,23 +11238,18 @@
                     <a:bodyPr/>
                     <a:lstStyle/>
                     <a:p>
-                      <a:pPr>
-                        <a:lnSpc>
-                          <a:spcPct val="115000"/>
-                        </a:lnSpc>
-                      </a:pPr>
                       <a:r>
-                        <a:rPr sz="1200">
+                        <a:rPr sz="1250">
                           <a:solidFill>
                             <a:srgbClr val="64748B"/>
                           </a:solidFill>
                           <a:latin typeface="Calibri"/>
                         </a:rPr>
-                        <a:t>Free-form prose split by string markers; breaks on slight format changes.</a:t>
+                        <a:t>Plain text output that breaks parsers easily.</a:t>
                       </a:r>
                     </a:p>
                   </a:txBody>
-                  <a:tcPr anchor="ctr" marL="128016" marR="128016" marT="73152" marB="73152">
+                  <a:tcPr anchor="ctr" marL="146304" marR="146304" marT="73152" marB="73152">
                     <a:solidFill>
                       <a:srgbClr val="F8FAFC"/>
                     </a:solidFill>
@@ -11452,40 +11260,6 @@
                     <a:bodyPr/>
                     <a:lstStyle/>
                     <a:p>
-                      <a:pPr>
-                        <a:lnSpc>
-                          <a:spcPct val="115000"/>
-                        </a:lnSpc>
-                      </a:pPr>
-                      <a:r>
-                        <a:rPr sz="1200" b="1">
-                          <a:solidFill>
-                            <a:srgbClr val="0F172A"/>
-                          </a:solidFill>
-                          <a:latin typeface="Calibri"/>
-                        </a:rPr>
-                        <a:t>Gemini JSON mode validated strictly by Pydantic v2 (ComicOutline &amp; ComicScript).</a:t>
-                      </a:r>
-                    </a:p>
-                  </a:txBody>
-                  <a:tcPr anchor="ctr" marL="128016" marR="128016" marT="73152" marB="73152">
-                    <a:solidFill>
-                      <a:srgbClr val="FFFFFF"/>
-                    </a:solidFill>
-                  </a:tcPr>
-                </a:tc>
-              </a:tr>
-              <a:tr h="723900">
-                <a:tc>
-                  <a:txBody>
-                    <a:bodyPr/>
-                    <a:lstStyle/>
-                    <a:p>
-                      <a:pPr>
-                        <a:lnSpc>
-                          <a:spcPct val="115000"/>
-                        </a:lnSpc>
-                      </a:pPr>
                       <a:r>
                         <a:rPr sz="1250" b="1">
                           <a:solidFill>
@@ -11493,11 +11267,35 @@
                           </a:solidFill>
                           <a:latin typeface="Calibri"/>
                         </a:rPr>
-                        <a:t>Visual Continuity</a:t>
+                        <a:t>Structured JSON output validated by Pydantic v2.</a:t>
                       </a:r>
                     </a:p>
                   </a:txBody>
-                  <a:tcPr anchor="ctr" marL="128016" marR="128016" marT="73152" marB="73152">
+                  <a:tcPr anchor="ctr" marL="146304" marR="146304" marT="73152" marB="73152">
+                    <a:solidFill>
+                      <a:srgbClr val="FFFFFF"/>
+                    </a:solidFill>
+                  </a:tcPr>
+                </a:tc>
+              </a:tr>
+              <a:tr h="708660">
+                <a:tc>
+                  <a:txBody>
+                    <a:bodyPr/>
+                    <a:lstStyle/>
+                    <a:p>
+                      <a:r>
+                        <a:rPr sz="1300" b="1">
+                          <a:solidFill>
+                            <a:srgbClr val="0F172A"/>
+                          </a:solidFill>
+                          <a:latin typeface="Calibri"/>
+                        </a:rPr>
+                        <a:t>Character Look</a:t>
+                      </a:r>
+                    </a:p>
+                  </a:txBody>
+                  <a:tcPr anchor="ctr" marL="146304" marR="146304" marT="73152" marB="73152">
                     <a:solidFill>
                       <a:srgbClr val="FFFFFF"/>
                     </a:solidFill>
@@ -11508,23 +11306,18 @@
                     <a:bodyPr/>
                     <a:lstStyle/>
                     <a:p>
-                      <a:pPr>
-                        <a:lnSpc>
-                          <a:spcPct val="115000"/>
-                        </a:lnSpc>
-                      </a:pPr>
                       <a:r>
-                        <a:rPr sz="1200">
+                        <a:rPr sz="1250">
                           <a:solidFill>
                             <a:srgbClr val="64748B"/>
                           </a:solidFill>
                           <a:latin typeface="Calibri"/>
                         </a:rPr>
-                        <a:t>Ad-hoc per-panel prompts cause hero's face and outfit to drift.</a:t>
+                        <a:t>Character face and clothes change every panel.</a:t>
                       </a:r>
                     </a:p>
                   </a:txBody>
-                  <a:tcPr anchor="ctr" marL="128016" marR="128016" marT="73152" marB="73152">
+                  <a:tcPr anchor="ctr" marL="146304" marR="146304" marT="73152" marB="73152">
                     <a:solidFill>
                       <a:srgbClr val="FFFFFF"/>
                     </a:solidFill>
@@ -11535,42 +11328,32 @@
                     <a:bodyPr/>
                     <a:lstStyle/>
                     <a:p>
-                      <a:pPr>
-                        <a:lnSpc>
-                          <a:spcPct val="115000"/>
-                        </a:lnSpc>
-                      </a:pPr>
                       <a:r>
-                        <a:rPr sz="1200" b="1">
+                        <a:rPr sz="1250" b="1">
                           <a:solidFill>
                             <a:srgbClr val="0F172A"/>
                           </a:solidFill>
                           <a:latin typeface="Calibri"/>
                         </a:rPr>
-                        <a:t>Stage-1 Character Bible repeated in every panel prompt + negative prompts.</a:t>
+                        <a:t>Fixed Character Bible repeated in every panel.</a:t>
                       </a:r>
                     </a:p>
                   </a:txBody>
-                  <a:tcPr anchor="ctr" marL="128016" marR="128016" marT="73152" marB="73152">
+                  <a:tcPr anchor="ctr" marL="146304" marR="146304" marT="73152" marB="73152">
                     <a:solidFill>
                       <a:srgbClr val="F0FDFA"/>
                     </a:solidFill>
                   </a:tcPr>
                 </a:tc>
               </a:tr>
-              <a:tr h="723900">
+              <a:tr h="708660">
                 <a:tc>
                   <a:txBody>
                     <a:bodyPr/>
                     <a:lstStyle/>
                     <a:p>
-                      <a:pPr>
-                        <a:lnSpc>
-                          <a:spcPct val="115000"/>
-                        </a:lnSpc>
-                      </a:pPr>
                       <a:r>
-                        <a:rPr sz="1250" b="1">
+                        <a:rPr sz="1300" b="1">
                           <a:solidFill>
                             <a:srgbClr val="0F172A"/>
                           </a:solidFill>
@@ -11580,7 +11363,7 @@
                       </a:r>
                     </a:p>
                   </a:txBody>
-                  <a:tcPr anchor="ctr" marL="128016" marR="128016" marT="73152" marB="73152">
+                  <a:tcPr anchor="ctr" marL="146304" marR="146304" marT="73152" marB="73152">
                     <a:solidFill>
                       <a:srgbClr val="F1F5F9"/>
                     </a:solidFill>
@@ -11591,23 +11374,18 @@
                     <a:bodyPr/>
                     <a:lstStyle/>
                     <a:p>
-                      <a:pPr>
-                        <a:lnSpc>
-                          <a:spcPct val="115000"/>
-                        </a:lnSpc>
-                      </a:pPr>
                       <a:r>
-                        <a:rPr sz="1200">
+                        <a:rPr sz="1250">
                           <a:solidFill>
                             <a:srgbClr val="64748B"/>
                           </a:solidFill>
                           <a:latin typeface="Calibri"/>
                         </a:rPr>
-                        <a:t>Single 429 rate-limit, 404 model rename, or missing key crashes the app.</a:t>
+                        <a:t>Crashes on API errors or without internet.</a:t>
                       </a:r>
                     </a:p>
                   </a:txBody>
-                  <a:tcPr anchor="ctr" marL="128016" marR="128016" marT="73152" marB="73152">
+                  <a:tcPr anchor="ctr" marL="146304" marR="146304" marT="73152" marB="73152">
                     <a:solidFill>
                       <a:srgbClr val="F8FAFC"/>
                     </a:solidFill>
@@ -11618,40 +11396,6 @@
                     <a:bodyPr/>
                     <a:lstStyle/>
                     <a:p>
-                      <a:pPr>
-                        <a:lnSpc>
-                          <a:spcPct val="115000"/>
-                        </a:lnSpc>
-                      </a:pPr>
-                      <a:r>
-                        <a:rPr sz="1200" b="1">
-                          <a:solidFill>
-                            <a:srgbClr val="0F172A"/>
-                          </a:solidFill>
-                          <a:latin typeface="Calibri"/>
-                        </a:rPr>
-                        <a:t>Exponential backoff + fallback model chain + offline Demo &amp; Placeholder modes.</a:t>
-                      </a:r>
-                    </a:p>
-                  </a:txBody>
-                  <a:tcPr anchor="ctr" marL="128016" marR="128016" marT="73152" marB="73152">
-                    <a:solidFill>
-                      <a:srgbClr val="FFFFFF"/>
-                    </a:solidFill>
-                  </a:tcPr>
-                </a:tc>
-              </a:tr>
-              <a:tr h="723900">
-                <a:tc>
-                  <a:txBody>
-                    <a:bodyPr/>
-                    <a:lstStyle/>
-                    <a:p>
-                      <a:pPr>
-                        <a:lnSpc>
-                          <a:spcPct val="115000"/>
-                        </a:lnSpc>
-                      </a:pPr>
                       <a:r>
                         <a:rPr sz="1250" b="1">
                           <a:solidFill>
@@ -11659,11 +11403,35 @@
                           </a:solidFill>
                           <a:latin typeface="Calibri"/>
                         </a:rPr>
-                        <a:t>Storage &amp; Security</a:t>
+                        <a:t>Auto-retry + fallback models + Offline Demo Mode.</a:t>
                       </a:r>
                     </a:p>
                   </a:txBody>
-                  <a:tcPr anchor="ctr" marL="128016" marR="128016" marT="73152" marB="73152">
+                  <a:tcPr anchor="ctr" marL="146304" marR="146304" marT="73152" marB="73152">
+                    <a:solidFill>
+                      <a:srgbClr val="FFFFFF"/>
+                    </a:solidFill>
+                  </a:tcPr>
+                </a:tc>
+              </a:tr>
+              <a:tr h="708660">
+                <a:tc>
+                  <a:txBody>
+                    <a:bodyPr/>
+                    <a:lstStyle/>
+                    <a:p>
+                      <a:r>
+                        <a:rPr sz="1300" b="1">
+                          <a:solidFill>
+                            <a:srgbClr val="0F172A"/>
+                          </a:solidFill>
+                          <a:latin typeface="Calibri"/>
+                        </a:rPr>
+                        <a:t>Output &amp; Save</a:t>
+                      </a:r>
+                    </a:p>
+                  </a:txBody>
+                  <a:tcPr anchor="ctr" marL="146304" marR="146304" marT="73152" marB="73152">
                     <a:solidFill>
                       <a:srgbClr val="FFFFFF"/>
                     </a:solidFill>
@@ -11674,23 +11442,18 @@
                     <a:bodyPr/>
                     <a:lstStyle/>
                     <a:p>
-                      <a:pPr>
-                        <a:lnSpc>
-                          <a:spcPct val="115000"/>
-                        </a:lnSpc>
-                      </a:pPr>
                       <a:r>
-                        <a:rPr sz="1200">
+                        <a:rPr sz="1250">
                           <a:solidFill>
                             <a:srgbClr val="64748B"/>
                           </a:solidFill>
                           <a:latin typeface="Calibri"/>
                         </a:rPr>
-                        <a:t>Unsafe prompt filenames, overwrites, and no reopenable state.</a:t>
+                        <a:t>Manual PDF arrangement; files get overwritten.</a:t>
                       </a:r>
                     </a:p>
                   </a:txBody>
-                  <a:tcPr anchor="ctr" marL="128016" marR="128016" marT="73152" marB="73152">
+                  <a:tcPr anchor="ctr" marL="146304" marR="146304" marT="73152" marB="73152">
                     <a:solidFill>
                       <a:srgbClr val="FFFFFF"/>
                     </a:solidFill>
@@ -11701,23 +11464,18 @@
                     <a:bodyPr/>
                     <a:lstStyle/>
                     <a:p>
-                      <a:pPr>
-                        <a:lnSpc>
-                          <a:spcPct val="115000"/>
-                        </a:lnSpc>
-                      </a:pPr>
                       <a:r>
-                        <a:rPr sz="1200" b="1">
+                        <a:rPr sz="1250" b="1">
                           <a:solidFill>
                             <a:srgbClr val="0F172A"/>
                           </a:solidFill>
                           <a:latin typeface="Calibri"/>
                         </a:rPr>
-                        <a:t>32-hex UUID workspace, regex path guard, and atomic comic.json manifest.</a:t>
+                        <a:t>Auto A4 PDF + saved in unique UUID folders.</a:t>
                       </a:r>
                     </a:p>
                   </a:txBody>
-                  <a:tcPr anchor="ctr" marL="128016" marR="128016" marT="73152" marB="73152">
+                  <a:tcPr anchor="ctr" marL="146304" marR="146304" marT="73152" marB="73152">
                     <a:solidFill>
                       <a:srgbClr val="F0FDFA"/>
                     </a:solidFill>
@@ -11736,8 +11494,8 @@
         </p:nvSpPr>
         <p:spPr>
           <a:xfrm>
-            <a:off x="548640" y="5724144"/>
-            <a:ext cx="11091672" cy="603504"/>
+            <a:off x="548640" y="5705856"/>
+            <a:ext cx="11091672" cy="585216"/>
           </a:xfrm>
           <a:prstGeom prst="roundRect">
             <a:avLst>
@@ -11783,8 +11541,8 @@
         </p:nvSpPr>
         <p:spPr>
           <a:xfrm>
-            <a:off x="777240" y="5724144"/>
-            <a:ext cx="10652760" cy="603504"/>
+            <a:off x="777240" y="5705856"/>
+            <a:ext cx="10652760" cy="585216"/>
           </a:xfrm>
           <a:prstGeom prst="rect">
             <a:avLst/>
@@ -11799,13 +11557,13 @@
           <a:p>
             <a:pPr algn="l"/>
             <a:r>
-              <a:rPr sz="1250" b="1">
+              <a:rPr sz="1300" b="1">
                 <a:solidFill>
                   <a:srgbClr val="B45309"/>
                 </a:solidFill>
                 <a:latin typeface="Calibri"/>
               </a:rPr>
-              <a:t>Key Engineering Upgrade:  Every AI response is treated as schema-validated structured JSON data — never fragile prose — with honest provider badges and warnings.</a:t>
+              <a:t>Core Advantage:  Combines AI story planning, consistent character prompts, and automatic PDF creation in one place.</a:t>
             </a:r>
           </a:p>
         </p:txBody>
@@ -12032,7 +11790,7 @@
                 </a:solidFill>
                 <a:latin typeface="Calibri"/>
               </a:rPr>
-              <a:t>Technology Stack &amp; System Requirements</a:t>
+              <a:t>Technology Stack &amp; Requirements</a:t>
             </a:r>
           </a:p>
         </p:txBody>
@@ -12067,7 +11825,7 @@
                 </a:solidFill>
                 <a:latin typeface="Calibri"/>
               </a:rPr>
-              <a:t>Verified open-source libraries, AI SDKs, and lightweight runtime specifications</a:t>
+              <a:t>Tools, libraries, and basic system specifications used to build ComicCraft</a:t>
             </a:r>
           </a:p>
         </p:txBody>
@@ -12124,7 +11882,7 @@
         <p:spPr>
           <a:xfrm>
             <a:off x="548640" y="6510528"/>
-            <a:ext cx="7772400" cy="228600"/>
+            <a:ext cx="7315200" cy="228600"/>
           </a:xfrm>
           <a:prstGeom prst="rect">
             <a:avLst/>
@@ -12145,7 +11903,7 @@
                 </a:solidFill>
                 <a:latin typeface="Calibri"/>
               </a:rPr>
-              <a:t>ComicCraft – AI Comic Story Creator Using Gemini Models  |  Naan Mudhalvan Project</a:t>
+              <a:t>ComicCraft — AI Comic Story Creator</a:t>
             </a:r>
           </a:p>
         </p:txBody>
@@ -12158,8 +11916,8 @@
         </p:nvSpPr>
         <p:spPr>
           <a:xfrm>
-            <a:off x="548640" y="1207008"/>
-            <a:ext cx="3529584" cy="1965960"/>
+            <a:off x="548640" y="1225296"/>
+            <a:ext cx="3529584" cy="1938528"/>
           </a:xfrm>
           <a:prstGeom prst="roundRect">
             <a:avLst>
@@ -12205,7 +11963,7 @@
         </p:nvSpPr>
         <p:spPr>
           <a:xfrm>
-            <a:off x="548640" y="1207008"/>
+            <a:off x="548640" y="1225296"/>
             <a:ext cx="3529584" cy="82296"/>
           </a:xfrm>
           <a:prstGeom prst="rect">
@@ -12248,7 +12006,7 @@
         </p:nvSpPr>
         <p:spPr>
           <a:xfrm>
-            <a:off x="749808" y="1389888"/>
+            <a:off x="749808" y="1426464"/>
             <a:ext cx="3127248" cy="256032"/>
           </a:xfrm>
           <a:prstGeom prst="rect">
@@ -12264,13 +12022,13 @@
           <a:p>
             <a:pPr algn="l"/>
             <a:r>
-              <a:rPr sz="1050" b="1">
+              <a:rPr sz="1100" b="1">
                 <a:solidFill>
                   <a:srgbClr val="2563EB"/>
                 </a:solidFill>
                 <a:latin typeface="Calibri"/>
               </a:rPr>
-              <a:t>BACKEND &amp; SERVER</a:t>
+              <a:t>BACKEND</a:t>
             </a:r>
           </a:p>
         </p:txBody>
@@ -12283,8 +12041,8 @@
         </p:nvSpPr>
         <p:spPr>
           <a:xfrm>
-            <a:off x="749808" y="1645920"/>
-            <a:ext cx="3127248" cy="347472"/>
+            <a:off x="749808" y="1700784"/>
+            <a:ext cx="3127248" cy="329184"/>
           </a:xfrm>
           <a:prstGeom prst="rect">
             <a:avLst/>
@@ -12299,7 +12057,7 @@
           <a:p>
             <a:pPr algn="l"/>
             <a:r>
-              <a:rPr sz="1220" b="1">
+              <a:rPr sz="1250" b="1">
                 <a:solidFill>
                   <a:srgbClr val="0F172A"/>
                 </a:solidFill>
@@ -12318,8 +12076,8 @@
         </p:nvSpPr>
         <p:spPr>
           <a:xfrm>
-            <a:off x="749808" y="2048256"/>
-            <a:ext cx="3127248" cy="987552"/>
+            <a:off x="749808" y="2084832"/>
+            <a:ext cx="3127248" cy="914400"/>
           </a:xfrm>
           <a:prstGeom prst="rect">
             <a:avLst/>
@@ -12334,13 +12092,13 @@
           <a:p>
             <a:pPr algn="l"/>
             <a:r>
-              <a:rPr sz="1150" b="0">
+              <a:rPr sz="1200" b="0">
                 <a:solidFill>
                   <a:srgbClr val="334155"/>
                 </a:solidFill>
                 <a:latin typeface="Calibri"/>
               </a:rPr>
-              <a:t>High-speed ASGI web framework with automatic Swagger /docs and run_in_threadpool() for blocking tasks.</a:t>
+              <a:t>Handles web routes, REST JSON endpoints, and interactive API docs (/docs).</a:t>
             </a:r>
           </a:p>
         </p:txBody>
@@ -12353,8 +12111,8 @@
         </p:nvSpPr>
         <p:spPr>
           <a:xfrm>
-            <a:off x="4325112" y="1207008"/>
-            <a:ext cx="3529584" cy="1965960"/>
+            <a:off x="4325112" y="1225296"/>
+            <a:ext cx="3529584" cy="1938528"/>
           </a:xfrm>
           <a:prstGeom prst="roundRect">
             <a:avLst>
@@ -12400,7 +12158,7 @@
         </p:nvSpPr>
         <p:spPr>
           <a:xfrm>
-            <a:off x="4325112" y="1207008"/>
+            <a:off x="4325112" y="1225296"/>
             <a:ext cx="3529584" cy="82296"/>
           </a:xfrm>
           <a:prstGeom prst="rect">
@@ -12443,7 +12201,7 @@
         </p:nvSpPr>
         <p:spPr>
           <a:xfrm>
-            <a:off x="4526279" y="1389888"/>
+            <a:off x="4526279" y="1426464"/>
             <a:ext cx="3127248" cy="256032"/>
           </a:xfrm>
           <a:prstGeom prst="rect">
@@ -12459,13 +12217,13 @@
           <a:p>
             <a:pPr algn="l"/>
             <a:r>
-              <a:rPr sz="1050" b="1">
+              <a:rPr sz="1100" b="1">
                 <a:solidFill>
                   <a:srgbClr val="0D9488"/>
                 </a:solidFill>
                 <a:latin typeface="Calibri"/>
               </a:rPr>
-              <a:t>VALIDATION &amp; CONFIG</a:t>
+              <a:t>VALIDATION</a:t>
             </a:r>
           </a:p>
         </p:txBody>
@@ -12478,8 +12236,8 @@
         </p:nvSpPr>
         <p:spPr>
           <a:xfrm>
-            <a:off x="4526279" y="1645920"/>
-            <a:ext cx="3127248" cy="347472"/>
+            <a:off x="4526279" y="1700784"/>
+            <a:ext cx="3127248" cy="329184"/>
           </a:xfrm>
           <a:prstGeom prst="rect">
             <a:avLst/>
@@ -12494,13 +12252,13 @@
           <a:p>
             <a:pPr algn="l"/>
             <a:r>
-              <a:rPr sz="1220" b="1">
+              <a:rPr sz="1250" b="1">
                 <a:solidFill>
                   <a:srgbClr val="0F172A"/>
                 </a:solidFill>
                 <a:latin typeface="Calibri"/>
               </a:rPr>
-              <a:t>Pydantic v2 · pydantic-settings</a:t>
+              <a:t>Pydantic v2 · .env Settings</a:t>
             </a:r>
           </a:p>
         </p:txBody>
@@ -12513,8 +12271,8 @@
         </p:nvSpPr>
         <p:spPr>
           <a:xfrm>
-            <a:off x="4526279" y="2048256"/>
-            <a:ext cx="3127248" cy="987552"/>
+            <a:off x="4526279" y="2084832"/>
+            <a:ext cx="3127248" cy="914400"/>
           </a:xfrm>
           <a:prstGeom prst="rect">
             <a:avLst/>
@@ -12529,13 +12287,13 @@
           <a:p>
             <a:pPr algn="l"/>
             <a:r>
-              <a:rPr sz="1150" b="0">
+              <a:rPr sz="1200" b="0">
                 <a:solidFill>
                   <a:srgbClr val="334155"/>
                 </a:solidFill>
                 <a:latin typeface="Calibri"/>
               </a:rPr>
-              <a:t>Validates form/JSON inputs, AI JSON contracts, and loads .env API keys securely into SecretStr fields.</a:t>
+              <a:t>Validates form inputs, AI JSON structure, and protects API keys safely.</a:t>
             </a:r>
           </a:p>
         </p:txBody>
@@ -12548,8 +12306,8 @@
         </p:nvSpPr>
         <p:spPr>
           <a:xfrm>
-            <a:off x="8101583" y="1207008"/>
-            <a:ext cx="3529584" cy="1965960"/>
+            <a:off x="8101583" y="1225296"/>
+            <a:ext cx="3529584" cy="1938528"/>
           </a:xfrm>
           <a:prstGeom prst="roundRect">
             <a:avLst>
@@ -12595,7 +12353,7 @@
         </p:nvSpPr>
         <p:spPr>
           <a:xfrm>
-            <a:off x="8101583" y="1207008"/>
+            <a:off x="8101583" y="1225296"/>
             <a:ext cx="3529584" cy="82296"/>
           </a:xfrm>
           <a:prstGeom prst="rect">
@@ -12638,7 +12396,7 @@
         </p:nvSpPr>
         <p:spPr>
           <a:xfrm>
-            <a:off x="8302752" y="1389888"/>
+            <a:off x="8302752" y="1426464"/>
             <a:ext cx="3127248" cy="256032"/>
           </a:xfrm>
           <a:prstGeom prst="rect">
@@ -12654,13 +12412,13 @@
           <a:p>
             <a:pPr algn="l"/>
             <a:r>
-              <a:rPr sz="1050" b="1">
+              <a:rPr sz="1100" b="1">
                 <a:solidFill>
                   <a:srgbClr val="4F46E5"/>
                 </a:solidFill>
                 <a:latin typeface="Calibri"/>
               </a:rPr>
-              <a:t>AI STORY ENGINE</a:t>
+              <a:t>AI STORY</a:t>
             </a:r>
           </a:p>
         </p:txBody>
@@ -12673,8 +12431,8 @@
         </p:nvSpPr>
         <p:spPr>
           <a:xfrm>
-            <a:off x="8302752" y="1645920"/>
-            <a:ext cx="3127248" cy="347472"/>
+            <a:off x="8302752" y="1700784"/>
+            <a:ext cx="3127248" cy="329184"/>
           </a:xfrm>
           <a:prstGeom prst="rect">
             <a:avLst/>
@@ -12689,13 +12447,13 @@
           <a:p>
             <a:pPr algn="l"/>
             <a:r>
-              <a:rPr sz="1220" b="1">
+              <a:rPr sz="1250" b="1">
                 <a:solidFill>
                   <a:srgbClr val="0F172A"/>
                 </a:solidFill>
                 <a:latin typeface="Calibri"/>
               </a:rPr>
-              <a:t>Google Gemini · google-genai SDK</a:t>
+              <a:t>Google Gemini API (google-genai)</a:t>
             </a:r>
           </a:p>
         </p:txBody>
@@ -12708,8 +12466,8 @@
         </p:nvSpPr>
         <p:spPr>
           <a:xfrm>
-            <a:off x="8302752" y="2048256"/>
-            <a:ext cx="3127248" cy="987552"/>
+            <a:off x="8302752" y="2084832"/>
+            <a:ext cx="3127248" cy="914400"/>
           </a:xfrm>
           <a:prstGeom prst="rect">
             <a:avLst/>
@@ -12724,13 +12482,13 @@
           <a:p>
             <a:pPr algn="l"/>
             <a:r>
-              <a:rPr sz="1150" b="0">
+              <a:rPr sz="1200" b="0">
                 <a:solidFill>
                   <a:srgbClr val="334155"/>
                 </a:solidFill>
                 <a:latin typeface="Calibri"/>
               </a:rPr>
-              <a:t>Two-stage JSON generation (Outline -&gt; Story models) plus deterministic offline DemoStoryProvider.</a:t>
+              <a:t>Generates structured JSON story outlines and full panel scripts in two stages.</a:t>
             </a:r>
           </a:p>
         </p:txBody>
@@ -12743,8 +12501,8 @@
         </p:nvSpPr>
         <p:spPr>
           <a:xfrm>
-            <a:off x="548640" y="3410712"/>
-            <a:ext cx="3529584" cy="1965960"/>
+            <a:off x="548640" y="3401568"/>
+            <a:ext cx="3529584" cy="1938528"/>
           </a:xfrm>
           <a:prstGeom prst="roundRect">
             <a:avLst>
@@ -12790,7 +12548,7 @@
         </p:nvSpPr>
         <p:spPr>
           <a:xfrm>
-            <a:off x="548640" y="3410712"/>
+            <a:off x="548640" y="3401568"/>
             <a:ext cx="3529584" cy="82296"/>
           </a:xfrm>
           <a:prstGeom prst="rect">
@@ -12833,7 +12591,7 @@
         </p:nvSpPr>
         <p:spPr>
           <a:xfrm>
-            <a:off x="749808" y="3593592"/>
+            <a:off x="749808" y="3602736"/>
             <a:ext cx="3127248" cy="256032"/>
           </a:xfrm>
           <a:prstGeom prst="rect">
@@ -12849,13 +12607,13 @@
           <a:p>
             <a:pPr algn="l"/>
             <a:r>
-              <a:rPr sz="1050" b="1">
+              <a:rPr sz="1100" b="1">
                 <a:solidFill>
                   <a:srgbClr val="F59E0B"/>
                 </a:solidFill>
                 <a:latin typeface="Calibri"/>
               </a:rPr>
-              <a:t>IMAGE PROVIDERS</a:t>
+              <a:t>PANEL ARTWORK</a:t>
             </a:r>
           </a:p>
         </p:txBody>
@@ -12868,8 +12626,8 @@
         </p:nvSpPr>
         <p:spPr>
           <a:xfrm>
-            <a:off x="749808" y="3849624"/>
-            <a:ext cx="3127248" cy="347472"/>
+            <a:off x="749808" y="3877056"/>
+            <a:ext cx="3127248" cy="329184"/>
           </a:xfrm>
           <a:prstGeom prst="rect">
             <a:avLst/>
@@ -12884,13 +12642,13 @@
           <a:p>
             <a:pPr algn="l"/>
             <a:r>
-              <a:rPr sz="1220" b="1">
+              <a:rPr sz="1250" b="1">
                 <a:solidFill>
                   <a:srgbClr val="0F172A"/>
                 </a:solidFill>
                 <a:latin typeface="Calibri"/>
               </a:rPr>
-              <a:t>Pillow · HuggingFace · Diffusers</a:t>
+              <a:t>Pillow · Hugging Face · Diffusers</a:t>
             </a:r>
           </a:p>
         </p:txBody>
@@ -12903,8 +12661,8 @@
         </p:nvSpPr>
         <p:spPr>
           <a:xfrm>
-            <a:off x="749808" y="4251960"/>
-            <a:ext cx="3127248" cy="987552"/>
+            <a:off x="749808" y="4261104"/>
+            <a:ext cx="3127248" cy="914400"/>
           </a:xfrm>
           <a:prstGeom prst="rect">
             <a:avLst/>
@@ -12919,13 +12677,13 @@
           <a:p>
             <a:pPr algn="l"/>
             <a:r>
-              <a:rPr sz="1150" b="0">
+              <a:rPr sz="1200" b="0">
                 <a:solidFill>
                   <a:srgbClr val="334155"/>
                 </a:solidFill>
                 <a:latin typeface="Calibri"/>
               </a:rPr>
-              <a:t>Pluggable protocol supporting local Placeholder PNGs, Cloud SDXL inference, and lazy Local Stable Diffusion.</a:t>
+              <a:t>Creates local Placeholder PNGs, Cloud SDXL images, or Local Stable Diffusion art.</a:t>
             </a:r>
           </a:p>
         </p:txBody>
@@ -12938,8 +12696,8 @@
         </p:nvSpPr>
         <p:spPr>
           <a:xfrm>
-            <a:off x="4325112" y="3410712"/>
-            <a:ext cx="3529584" cy="1965960"/>
+            <a:off x="4325112" y="3401568"/>
+            <a:ext cx="3529584" cy="1938528"/>
           </a:xfrm>
           <a:prstGeom prst="roundRect">
             <a:avLst>
@@ -12985,7 +12743,7 @@
         </p:nvSpPr>
         <p:spPr>
           <a:xfrm>
-            <a:off x="4325112" y="3410712"/>
+            <a:off x="4325112" y="3401568"/>
             <a:ext cx="3529584" cy="82296"/>
           </a:xfrm>
           <a:prstGeom prst="rect">
@@ -13028,7 +12786,7 @@
         </p:nvSpPr>
         <p:spPr>
           <a:xfrm>
-            <a:off x="4526279" y="3593592"/>
+            <a:off x="4526279" y="3602736"/>
             <a:ext cx="3127248" cy="256032"/>
           </a:xfrm>
           <a:prstGeom prst="rect">
@@ -13044,13 +12802,13 @@
           <a:p>
             <a:pPr algn="l"/>
             <a:r>
-              <a:rPr sz="1050" b="1">
+              <a:rPr sz="1100" b="1">
                 <a:solidFill>
                   <a:srgbClr val="E11D48"/>
                 </a:solidFill>
                 <a:latin typeface="Calibri"/>
               </a:rPr>
-              <a:t>PDF &amp; FRONTEND UI</a:t>
+              <a:t>FRONTEND UI</a:t>
             </a:r>
           </a:p>
         </p:txBody>
@@ -13063,8 +12821,8 @@
         </p:nvSpPr>
         <p:spPr>
           <a:xfrm>
-            <a:off x="4526279" y="3849624"/>
-            <a:ext cx="3127248" cy="347472"/>
+            <a:off x="4526279" y="3877056"/>
+            <a:ext cx="3127248" cy="329184"/>
           </a:xfrm>
           <a:prstGeom prst="rect">
             <a:avLst/>
@@ -13079,13 +12837,13 @@
           <a:p>
             <a:pPr algn="l"/>
             <a:r>
-              <a:rPr sz="1220" b="1">
+              <a:rPr sz="1250" b="1">
                 <a:solidFill>
                   <a:srgbClr val="0F172A"/>
                 </a:solidFill>
                 <a:latin typeface="Calibri"/>
               </a:rPr>
-              <a:t>fpdf2 + DejaVu · Jinja2 + JS</a:t>
+              <a:t>HTML5 · CSS3 · JS · Jinja2</a:t>
             </a:r>
           </a:p>
         </p:txBody>
@@ -13098,8 +12856,8 @@
         </p:nvSpPr>
         <p:spPr>
           <a:xfrm>
-            <a:off x="4526279" y="4251960"/>
-            <a:ext cx="3127248" cy="987552"/>
+            <a:off x="4526279" y="4261104"/>
+            <a:ext cx="3127248" cy="914400"/>
           </a:xfrm>
           <a:prstGeom prst="rect">
             <a:avLst/>
@@ -13114,13 +12872,13 @@
           <a:p>
             <a:pPr algn="l"/>
             <a:r>
-              <a:rPr sz="1150" b="0">
+              <a:rPr sz="1200" b="0">
                 <a:solidFill>
                   <a:srgbClr val="334155"/>
                 </a:solidFill>
                 <a:latin typeface="Calibri"/>
               </a:rPr>
-              <a:t>Unicode-safe A4 PDF builder (cover + panel pages) and responsive framework-free HTML5/CSS3/JS UI.</a:t>
+              <a:t>Clean responsive creation form, loading overlay, and comic panel preview.</a:t>
             </a:r>
           </a:p>
         </p:txBody>
@@ -13133,8 +12891,8 @@
         </p:nvSpPr>
         <p:spPr>
           <a:xfrm>
-            <a:off x="8101583" y="3410712"/>
-            <a:ext cx="3529584" cy="1965960"/>
+            <a:off x="8101583" y="3401568"/>
+            <a:ext cx="3529584" cy="1938528"/>
           </a:xfrm>
           <a:prstGeom prst="roundRect">
             <a:avLst>
@@ -13180,7 +12938,7 @@
         </p:nvSpPr>
         <p:spPr>
           <a:xfrm>
-            <a:off x="8101583" y="3410712"/>
+            <a:off x="8101583" y="3401568"/>
             <a:ext cx="3529584" cy="82296"/>
           </a:xfrm>
           <a:prstGeom prst="rect">
@@ -13223,7 +12981,7 @@
         </p:nvSpPr>
         <p:spPr>
           <a:xfrm>
-            <a:off x="8302752" y="3593592"/>
+            <a:off x="8302752" y="3602736"/>
             <a:ext cx="3127248" cy="256032"/>
           </a:xfrm>
           <a:prstGeom prst="rect">
@@ -13239,13 +12997,13 @@
           <a:p>
             <a:pPr algn="l"/>
             <a:r>
-              <a:rPr sz="1050" b="1">
+              <a:rPr sz="1100" b="1">
                 <a:solidFill>
                   <a:srgbClr val="0F172A"/>
                 </a:solidFill>
                 <a:latin typeface="Calibri"/>
               </a:rPr>
-              <a:t>TESTING &amp; DEVOPS</a:t>
+              <a:t>PDF &amp; STORAGE</a:t>
             </a:r>
           </a:p>
         </p:txBody>
@@ -13258,8 +13016,8 @@
         </p:nvSpPr>
         <p:spPr>
           <a:xfrm>
-            <a:off x="8302752" y="3849624"/>
-            <a:ext cx="3127248" cy="347472"/>
+            <a:off x="8302752" y="3877056"/>
+            <a:ext cx="3127248" cy="329184"/>
           </a:xfrm>
           <a:prstGeom prst="rect">
             <a:avLst/>
@@ -13274,13 +13032,13 @@
           <a:p>
             <a:pPr algn="l"/>
             <a:r>
-              <a:rPr sz="1220" b="1">
+              <a:rPr sz="1250" b="1">
                 <a:solidFill>
                   <a:srgbClr val="0F172A"/>
                 </a:solidFill>
                 <a:latin typeface="Calibri"/>
               </a:rPr>
-              <a:t>pytest (11 Tests) · Ruff · Docker</a:t>
+              <a:t>fpdf2 · DejaVu Fonts · UUID Storage</a:t>
             </a:r>
           </a:p>
         </p:txBody>
@@ -13293,8 +13051,8 @@
         </p:nvSpPr>
         <p:spPr>
           <a:xfrm>
-            <a:off x="8302752" y="4251960"/>
-            <a:ext cx="3127248" cy="987552"/>
+            <a:off x="8302752" y="4261104"/>
+            <a:ext cx="3127248" cy="914400"/>
           </a:xfrm>
           <a:prstGeom prst="rect">
             <a:avLst/>
@@ -13309,13 +13067,13 @@
           <a:p>
             <a:pPr algn="l"/>
             <a:r>
-              <a:rPr sz="1150" b="0">
+              <a:rPr sz="1200" b="0">
                 <a:solidFill>
                   <a:srgbClr val="334155"/>
                 </a:solidFill>
                 <a:latin typeface="Calibri"/>
               </a:rPr>
-              <a:t>~80% offline test coverage (zero paid API calls), clean static linting, and Docker Compose packaging.</a:t>
+              <a:t>Exports Unicode A4 PDFs and saves each comic in its own local UUID folder.</a:t>
             </a:r>
           </a:p>
         </p:txBody>
@@ -13329,7 +13087,7 @@
         <p:spPr>
           <a:xfrm>
             <a:off x="548640" y="5559552"/>
-            <a:ext cx="11091672" cy="768096"/>
+            <a:ext cx="11091672" cy="731520"/>
           </a:xfrm>
           <a:prstGeom prst="roundRect">
             <a:avLst>
@@ -13374,7 +13132,7 @@
         <p:spPr>
           <a:xfrm>
             <a:off x="804672" y="5632704"/>
-            <a:ext cx="10607040" cy="292608"/>
+            <a:ext cx="10607040" cy="256032"/>
           </a:xfrm>
           <a:prstGeom prst="rect">
             <a:avLst/>
@@ -13395,7 +13153,7 @@
                 </a:solidFill>
                 <a:latin typeface="Calibri"/>
               </a:rPr>
-              <a:t>MINIMUM SYSTEM REQUIREMENTS (RUNS FULLY OFFLINE WITHOUT GPU)</a:t>
+              <a:t>MINIMUM SYSTEM REQUIREMENTS</a:t>
             </a:r>
           </a:p>
         </p:txBody>
@@ -13408,8 +13166,8 @@
         </p:nvSpPr>
         <p:spPr>
           <a:xfrm>
-            <a:off x="804672" y="5907024"/>
-            <a:ext cx="10607040" cy="310896"/>
+            <a:off x="804672" y="5897880"/>
+            <a:ext cx="10607040" cy="292608"/>
           </a:xfrm>
           <a:prstGeom prst="rect">
             <a:avLst/>
@@ -13424,13 +13182,13 @@
           <a:p>
             <a:pPr algn="l"/>
             <a:r>
-              <a:rPr sz="1150" b="0">
+              <a:rPr sz="1200" b="0">
                 <a:solidFill>
                   <a:srgbClr val="FFFFFF"/>
                 </a:solidFill>
                 <a:latin typeface="Calibri"/>
               </a:rPr>
-              <a:t>OS: Windows / Linux / macOS / Android Termux   •   CPU: Core i3 / Ryzen 3+   •   RAM: 4 GB (8 GB rec.)   •   Disk: ~250 MB   •   Database: None (Local UUID Filesystem)</a:t>
+              <a:t>Python 3.11+   •   Modern Web Browser   •   4 GB RAM   •   250 MB Disk Space   •   No GPU or External Database Required</a:t>
             </a:r>
           </a:p>
         </p:txBody>
@@ -13692,7 +13450,7 @@
                 </a:solidFill>
                 <a:latin typeface="Calibri"/>
               </a:rPr>
-              <a:t>Layered service-oriented architecture from client request to persisted UUID comic workspace</a:t>
+              <a:t>Clean modular flow from user input to web preview and A4 PDF file</a:t>
             </a:r>
           </a:p>
         </p:txBody>
@@ -13749,7 +13507,7 @@
         <p:spPr>
           <a:xfrm>
             <a:off x="548640" y="6510528"/>
-            <a:ext cx="7772400" cy="228600"/>
+            <a:ext cx="7315200" cy="228600"/>
           </a:xfrm>
           <a:prstGeom prst="rect">
             <a:avLst/>
@@ -13770,7 +13528,7 @@
                 </a:solidFill>
                 <a:latin typeface="Calibri"/>
               </a:rPr>
-              <a:t>ComicCraft – AI Comic Story Creator Using Gemini Models  |  Naan Mudhalvan Project</a:t>
+              <a:t>ComicCraft — AI Comic Story Creator</a:t>
             </a:r>
           </a:p>
         </p:txBody>
@@ -13783,8 +13541,8 @@
         </p:nvSpPr>
         <p:spPr>
           <a:xfrm>
-            <a:off x="548640" y="1170432"/>
-            <a:ext cx="3547872" cy="768096"/>
+            <a:off x="548640" y="1207008"/>
+            <a:ext cx="3547872" cy="749808"/>
           </a:xfrm>
           <a:prstGeom prst="roundRect">
             <a:avLst>
@@ -13830,7 +13588,7 @@
         </p:nvSpPr>
         <p:spPr>
           <a:xfrm>
-            <a:off x="676656" y="1234440"/>
+            <a:off x="676656" y="1280160"/>
             <a:ext cx="3291840" cy="292608"/>
           </a:xfrm>
           <a:prstGeom prst="rect">
@@ -13846,13 +13604,13 @@
           <a:p>
             <a:pPr algn="ctr"/>
             <a:r>
-              <a:rPr sz="1250" b="1">
+              <a:rPr sz="1300" b="1">
                 <a:solidFill>
                   <a:srgbClr val="2563EB"/>
                 </a:solidFill>
                 <a:latin typeface="Calibri"/>
               </a:rPr>
-              <a:t>Web Browser Client</a:t>
+              <a:t>Web Browser UI</a:t>
             </a:r>
           </a:p>
         </p:txBody>
@@ -13865,8 +13623,8 @@
         </p:nvSpPr>
         <p:spPr>
           <a:xfrm>
-            <a:off x="676656" y="1527048"/>
-            <a:ext cx="3291840" cy="329184"/>
+            <a:off x="676656" y="1572768"/>
+            <a:ext cx="3291840" cy="292608"/>
           </a:xfrm>
           <a:prstGeom prst="rect">
             <a:avLst/>
@@ -13881,13 +13639,13 @@
           <a:p>
             <a:pPr algn="ctr"/>
             <a:r>
-              <a:rPr sz="1019" b="0">
+              <a:rPr sz="1100" b="0">
                 <a:solidFill>
                   <a:srgbClr val="334155"/>
                 </a:solidFill>
                 <a:latin typeface="Calibri"/>
               </a:rPr>
-              <a:t>Jinja2 Form (GET /, POST /generate)  •  Preview &amp; Download</a:t>
+              <a:t>Story Form &amp; Comic Preview</a:t>
             </a:r>
           </a:p>
         </p:txBody>
@@ -13900,7 +13658,7 @@
         </p:nvSpPr>
         <p:spPr>
           <a:xfrm>
-            <a:off x="2139696" y="1920240"/>
+            <a:off x="2139696" y="1947672"/>
             <a:ext cx="365760" cy="256032"/>
           </a:xfrm>
           <a:prstGeom prst="rect">
@@ -13935,8 +13693,8 @@
         </p:nvSpPr>
         <p:spPr>
           <a:xfrm>
-            <a:off x="4320540" y="1170432"/>
-            <a:ext cx="3547872" cy="768096"/>
+            <a:off x="4320540" y="1207008"/>
+            <a:ext cx="3547872" cy="749808"/>
           </a:xfrm>
           <a:prstGeom prst="roundRect">
             <a:avLst>
@@ -13982,7 +13740,7 @@
         </p:nvSpPr>
         <p:spPr>
           <a:xfrm>
-            <a:off x="4448555" y="1234440"/>
+            <a:off x="4448555" y="1280160"/>
             <a:ext cx="3291840" cy="292608"/>
           </a:xfrm>
           <a:prstGeom prst="rect">
@@ -13998,13 +13756,13 @@
           <a:p>
             <a:pPr algn="ctr"/>
             <a:r>
-              <a:rPr sz="1250" b="1">
+              <a:rPr sz="1300" b="1">
                 <a:solidFill>
                   <a:srgbClr val="2563EB"/>
                 </a:solidFill>
                 <a:latin typeface="Calibri"/>
               </a:rPr>
-              <a:t>REST JSON API Client</a:t>
+              <a:t>REST JSON API</a:t>
             </a:r>
           </a:p>
         </p:txBody>
@@ -14017,8 +13775,8 @@
         </p:nvSpPr>
         <p:spPr>
           <a:xfrm>
-            <a:off x="4448555" y="1527048"/>
-            <a:ext cx="3291840" cy="329184"/>
+            <a:off x="4448555" y="1572768"/>
+            <a:ext cx="3291840" cy="292608"/>
           </a:xfrm>
           <a:prstGeom prst="rect">
             <a:avLst/>
@@ -14033,13 +13791,13 @@
           <a:p>
             <a:pPr algn="ctr"/>
             <a:r>
-              <a:rPr sz="1019" b="0">
+              <a:rPr sz="1100" b="0">
                 <a:solidFill>
                   <a:srgbClr val="334155"/>
                 </a:solidFill>
                 <a:latin typeface="Calibri"/>
               </a:rPr>
-              <a:t>POST /api/v1/comics  •  GET /api/v1/comics/{id}</a:t>
+              <a:t>POST /api/v1/comics</a:t>
             </a:r>
           </a:p>
         </p:txBody>
@@ -14052,7 +13810,7 @@
         </p:nvSpPr>
         <p:spPr>
           <a:xfrm>
-            <a:off x="5911596" y="1920240"/>
+            <a:off x="5911596" y="1947672"/>
             <a:ext cx="365760" cy="256032"/>
           </a:xfrm>
           <a:prstGeom prst="rect">
@@ -14087,8 +13845,8 @@
         </p:nvSpPr>
         <p:spPr>
           <a:xfrm>
-            <a:off x="8092440" y="1170432"/>
-            <a:ext cx="3547872" cy="768096"/>
+            <a:off x="8092440" y="1207008"/>
+            <a:ext cx="3547872" cy="749808"/>
           </a:xfrm>
           <a:prstGeom prst="roundRect">
             <a:avLst>
@@ -14134,7 +13892,7 @@
         </p:nvSpPr>
         <p:spPr>
           <a:xfrm>
-            <a:off x="8220456" y="1234440"/>
+            <a:off x="8220456" y="1280160"/>
             <a:ext cx="3291840" cy="292608"/>
           </a:xfrm>
           <a:prstGeom prst="rect">
@@ -14150,13 +13908,13 @@
           <a:p>
             <a:pPr algn="ctr"/>
             <a:r>
-              <a:rPr sz="1250" b="1">
+              <a:rPr sz="1300" b="1">
                 <a:solidFill>
                   <a:srgbClr val="2563EB"/>
                 </a:solidFill>
                 <a:latin typeface="Calibri"/>
               </a:rPr>
-              <a:t>DevOps &amp; Diagnostics</a:t>
+              <a:t>Health &amp; Docs</a:t>
             </a:r>
           </a:p>
         </p:txBody>
@@ -14169,8 +13927,8 @@
         </p:nvSpPr>
         <p:spPr>
           <a:xfrm>
-            <a:off x="8220456" y="1527048"/>
-            <a:ext cx="3291840" cy="329184"/>
+            <a:off x="8220456" y="1572768"/>
+            <a:ext cx="3291840" cy="292608"/>
           </a:xfrm>
           <a:prstGeom prst="rect">
             <a:avLst/>
@@ -14185,13 +13943,13 @@
           <a:p>
             <a:pPr algn="ctr"/>
             <a:r>
-              <a:rPr sz="1019" b="0">
+              <a:rPr sz="1100" b="0">
                 <a:solidFill>
                   <a:srgbClr val="334155"/>
                 </a:solidFill>
                 <a:latin typeface="Calibri"/>
               </a:rPr>
-              <a:t>GET /health Probe  •  Interactive OpenAPI /docs</a:t>
+              <a:t>GET /health  •  Swagger /docs</a:t>
             </a:r>
           </a:p>
         </p:txBody>
@@ -14204,7 +13962,7 @@
         </p:nvSpPr>
         <p:spPr>
           <a:xfrm>
-            <a:off x="9683496" y="1920240"/>
+            <a:off x="9683496" y="1947672"/>
             <a:ext cx="365760" cy="256032"/>
           </a:xfrm>
           <a:prstGeom prst="rect">
@@ -14239,8 +13997,8 @@
         </p:nvSpPr>
         <p:spPr>
           <a:xfrm>
-            <a:off x="548640" y="2176272"/>
-            <a:ext cx="11091672" cy="749808"/>
+            <a:off x="548640" y="2194560"/>
+            <a:ext cx="11091672" cy="713232"/>
           </a:xfrm>
           <a:prstGeom prst="roundRect">
             <a:avLst>
@@ -14284,8 +14042,8 @@
         </p:nvSpPr>
         <p:spPr>
           <a:xfrm>
-            <a:off x="731520" y="2240280"/>
-            <a:ext cx="10725912" cy="310896"/>
+            <a:off x="731520" y="2267712"/>
+            <a:ext cx="10725912" cy="292608"/>
           </a:xfrm>
           <a:prstGeom prst="rect">
             <a:avLst/>
@@ -14300,13 +14058,13 @@
           <a:p>
             <a:pPr algn="ctr"/>
             <a:r>
-              <a:rPr sz="1300" b="1">
+              <a:rPr sz="1350" b="1">
                 <a:solidFill>
                   <a:srgbClr val="F59E0B"/>
                 </a:solidFill>
                 <a:latin typeface="Calibri"/>
               </a:rPr>
-              <a:t>FASTAPI APPLICATION LAYER  (app/main.py &amp; app/routes.py)</a:t>
+              <a:t>FASTAPI BACKEND &amp; PYDANTIC INPUT VALIDATION</a:t>
             </a:r>
           </a:p>
         </p:txBody>
@@ -14319,8 +14077,8 @@
         </p:nvSpPr>
         <p:spPr>
           <a:xfrm>
-            <a:off x="731520" y="2551176"/>
-            <a:ext cx="10725912" cy="292608"/>
+            <a:off x="731520" y="2560320"/>
+            <a:ext cx="10725912" cy="256032"/>
           </a:xfrm>
           <a:prstGeom prst="rect">
             <a:avLst/>
@@ -14335,13 +14093,13 @@
           <a:p>
             <a:pPr algn="ctr"/>
             <a:r>
-              <a:rPr sz="1100" b="0">
+              <a:rPr sz="1150" b="0">
                 <a:solidFill>
                   <a:srgbClr val="E2E8F0"/>
                 </a:solidFill>
                 <a:latin typeface="Calibri"/>
               </a:rPr>
-              <a:t>Pydantic ComicPrompt Validation   •   Security Headers (nosniff, SAMEORIGIN)   •   Async-Safe run_in_threadpool()   •   Error Handlers</a:t>
+              <a:t>Validates Story Brief (3–8 Panels), Routes Requests &amp; Handles Errors Cleanly</a:t>
             </a:r>
           </a:p>
         </p:txBody>
@@ -14354,7 +14112,7 @@
         </p:nvSpPr>
         <p:spPr>
           <a:xfrm>
-            <a:off x="5907024" y="2916936"/>
+            <a:off x="5907024" y="2907792"/>
             <a:ext cx="365760" cy="256032"/>
           </a:xfrm>
           <a:prstGeom prst="rect">
@@ -14389,8 +14147,8 @@
         </p:nvSpPr>
         <p:spPr>
           <a:xfrm>
-            <a:off x="2423160" y="3163824"/>
-            <a:ext cx="7342631" cy="749808"/>
+            <a:off x="2423160" y="3154680"/>
+            <a:ext cx="7342631" cy="713232"/>
           </a:xfrm>
           <a:prstGeom prst="roundRect">
             <a:avLst>
@@ -14437,7 +14195,7 @@
         <p:spPr>
           <a:xfrm>
             <a:off x="2606040" y="3218688"/>
-            <a:ext cx="6976872" cy="310896"/>
+            <a:ext cx="6976872" cy="292608"/>
           </a:xfrm>
           <a:prstGeom prst="rect">
             <a:avLst/>
@@ -14452,13 +14210,13 @@
           <a:p>
             <a:pPr algn="ctr"/>
             <a:r>
-              <a:rPr sz="1300" b="1">
+              <a:rPr sz="1350" b="1">
                 <a:solidFill>
                   <a:srgbClr val="B45309"/>
                 </a:solidFill>
                 <a:latin typeface="Calibri"/>
               </a:rPr>
-              <a:t>COMIC SERVICE ORCHESTRATOR  (app/services/comic_service.py)</a:t>
+              <a:t>COMIC SERVICE (MAIN PIPELINE CONTROLLER)</a:t>
             </a:r>
           </a:p>
         </p:txBody>
@@ -14471,8 +14229,8 @@
         </p:nvSpPr>
         <p:spPr>
           <a:xfrm>
-            <a:off x="2606040" y="3529584"/>
-            <a:ext cx="6976872" cy="292608"/>
+            <a:off x="2606040" y="3511296"/>
+            <a:ext cx="6976872" cy="256032"/>
           </a:xfrm>
           <a:prstGeom prst="rect">
             <a:avLst/>
@@ -14487,13 +14245,13 @@
           <a:p>
             <a:pPr algn="ctr"/>
             <a:r>
-              <a:rPr sz="1100" b="1">
+              <a:rPr sz="1150" b="1">
                 <a:solidFill>
                   <a:srgbClr val="0F172A"/>
                 </a:solidFill>
                 <a:latin typeface="Calibri"/>
               </a:rPr>
-              <a:t>Creates Workspace  -&gt;  Generates Story  -&gt;  Renders Panel PNGs  -&gt;  Builds PDF  -&gt;  Saves Manifest</a:t>
+              <a:t>Coordinates Story  -&gt;  Panel Artwork  -&gt;  PDF Export  -&gt;  Local Storage</a:t>
             </a:r>
           </a:p>
         </p:txBody>
@@ -14506,7 +14264,7 @@
         </p:nvSpPr>
         <p:spPr>
           <a:xfrm>
-            <a:off x="1673352" y="3913632"/>
+            <a:off x="1673352" y="3877056"/>
             <a:ext cx="365760" cy="256032"/>
           </a:xfrm>
           <a:prstGeom prst="rect">
@@ -14541,8 +14299,8 @@
         </p:nvSpPr>
         <p:spPr>
           <a:xfrm>
-            <a:off x="548640" y="4169663"/>
-            <a:ext cx="2615184" cy="2121408"/>
+            <a:off x="548640" y="4133087"/>
+            <a:ext cx="2615184" cy="2103120"/>
           </a:xfrm>
           <a:prstGeom prst="roundRect">
             <a:avLst>
@@ -14588,7 +14346,7 @@
         </p:nvSpPr>
         <p:spPr>
           <a:xfrm>
-            <a:off x="548640" y="4169663"/>
+            <a:off x="548640" y="4133087"/>
             <a:ext cx="2615184" cy="82296"/>
           </a:xfrm>
           <a:prstGeom prst="rect">
@@ -14631,8 +14389,8 @@
         </p:nvSpPr>
         <p:spPr>
           <a:xfrm>
-            <a:off x="676656" y="4315968"/>
-            <a:ext cx="2359152" cy="292608"/>
+            <a:off x="713232" y="4297680"/>
+            <a:ext cx="2286000" cy="292608"/>
           </a:xfrm>
           <a:prstGeom prst="rect">
             <a:avLst/>
@@ -14647,13 +14405,13 @@
           <a:p>
             <a:pPr algn="l"/>
             <a:r>
-              <a:rPr sz="1250" b="1">
+              <a:rPr sz="1350" b="1">
                 <a:solidFill>
                   <a:srgbClr val="2563EB"/>
                 </a:solidFill>
                 <a:latin typeface="Calibri"/>
               </a:rPr>
-              <a:t>ResilientStoryService</a:t>
+              <a:t>Story Service</a:t>
             </a:r>
           </a:p>
         </p:txBody>
@@ -14666,8 +14424,8 @@
         </p:nvSpPr>
         <p:spPr>
           <a:xfrm>
-            <a:off x="676656" y="4590288"/>
-            <a:ext cx="2359152" cy="237744"/>
+            <a:off x="713232" y="4590288"/>
+            <a:ext cx="2286000" cy="237744"/>
           </a:xfrm>
           <a:prstGeom prst="rect">
             <a:avLst/>
@@ -14682,13 +14440,13 @@
           <a:p>
             <a:pPr algn="l"/>
             <a:r>
-              <a:rPr sz="1000" b="1">
+              <a:rPr sz="1050" b="1">
                 <a:solidFill>
                   <a:srgbClr val="64748B"/>
                 </a:solidFill>
                 <a:latin typeface="Calibri"/>
               </a:rPr>
-              <a:t>services/llm.py</a:t>
+              <a:t>llm.py</a:t>
             </a:r>
           </a:p>
         </p:txBody>
@@ -14701,8 +14459,8 @@
         </p:nvSpPr>
         <p:spPr>
           <a:xfrm>
-            <a:off x="676656" y="4882896"/>
-            <a:ext cx="2359152" cy="1298448"/>
+            <a:off x="713232" y="4901184"/>
+            <a:ext cx="2286000" cy="1188720"/>
           </a:xfrm>
           <a:prstGeom prst="rect">
             <a:avLst/>
@@ -14717,15 +14475,14 @@
           <a:p>
             <a:pPr algn="l"/>
             <a:r>
-              <a:rPr sz="1100" b="0">
+              <a:rPr sz="1200" b="0">
                 <a:solidFill>
                   <a:srgbClr val="0F172A"/>
                 </a:solidFill>
                 <a:latin typeface="Calibri"/>
               </a:rPr>
-              <a:t>• 2-Stage Gemini JSON
-• Retry + Backoff + Jitter
-• Model Fallback Chain
+              <a:t>• 2-Stage Gemini AI
+• Outline + Script JSON
 • Offline Demo Writer</a:t>
             </a:r>
           </a:p>
@@ -14739,7 +14496,7 @@
         </p:nvSpPr>
         <p:spPr>
           <a:xfrm>
-            <a:off x="4498848" y="3913632"/>
+            <a:off x="4498848" y="3877056"/>
             <a:ext cx="365760" cy="256032"/>
           </a:xfrm>
           <a:prstGeom prst="rect">
@@ -14774,8 +14531,8 @@
         </p:nvSpPr>
         <p:spPr>
           <a:xfrm>
-            <a:off x="3374136" y="4169663"/>
-            <a:ext cx="2615184" cy="2121408"/>
+            <a:off x="3374136" y="4133087"/>
+            <a:ext cx="2615184" cy="2103120"/>
           </a:xfrm>
           <a:prstGeom prst="roundRect">
             <a:avLst>
@@ -14821,7 +14578,7 @@
         </p:nvSpPr>
         <p:spPr>
           <a:xfrm>
-            <a:off x="3374136" y="4169663"/>
+            <a:off x="3374136" y="4133087"/>
             <a:ext cx="2615184" cy="82296"/>
           </a:xfrm>
           <a:prstGeom prst="rect">
@@ -14864,8 +14621,8 @@
         </p:nvSpPr>
         <p:spPr>
           <a:xfrm>
-            <a:off x="3502152" y="4315968"/>
-            <a:ext cx="2359152" cy="292608"/>
+            <a:off x="3538728" y="4297680"/>
+            <a:ext cx="2286000" cy="292608"/>
           </a:xfrm>
           <a:prstGeom prst="rect">
             <a:avLst/>
@@ -14880,13 +14637,13 @@
           <a:p>
             <a:pPr algn="l"/>
             <a:r>
-              <a:rPr sz="1250" b="1">
+              <a:rPr sz="1350" b="1">
                 <a:solidFill>
                   <a:srgbClr val="0D9488"/>
                 </a:solidFill>
                 <a:latin typeface="Calibri"/>
               </a:rPr>
-              <a:t>ResilientImageService</a:t>
+              <a:t>Image Service</a:t>
             </a:r>
           </a:p>
         </p:txBody>
@@ -14899,8 +14656,8 @@
         </p:nvSpPr>
         <p:spPr>
           <a:xfrm>
-            <a:off x="3502152" y="4590288"/>
-            <a:ext cx="2359152" cy="237744"/>
+            <a:off x="3538728" y="4590288"/>
+            <a:ext cx="2286000" cy="237744"/>
           </a:xfrm>
           <a:prstGeom prst="rect">
             <a:avLst/>
@@ -14915,13 +14672,13 @@
           <a:p>
             <a:pPr algn="l"/>
             <a:r>
-              <a:rPr sz="1000" b="1">
+              <a:rPr sz="1050" b="1">
                 <a:solidFill>
                   <a:srgbClr val="64748B"/>
                 </a:solidFill>
                 <a:latin typeface="Calibri"/>
               </a:rPr>
-              <a:t>services/images.py</a:t>
+              <a:t>images.py</a:t>
             </a:r>
           </a:p>
         </p:txBody>
@@ -14934,8 +14691,8 @@
         </p:nvSpPr>
         <p:spPr>
           <a:xfrm>
-            <a:off x="3502152" y="4882896"/>
-            <a:ext cx="2359152" cy="1298448"/>
+            <a:off x="3538728" y="4901184"/>
+            <a:ext cx="2286000" cy="1188720"/>
           </a:xfrm>
           <a:prstGeom prst="rect">
             <a:avLst/>
@@ -14950,16 +14707,15 @@
           <a:p>
             <a:pPr algn="l"/>
             <a:r>
-              <a:rPr sz="1100" b="0">
+              <a:rPr sz="1200" b="0">
                 <a:solidFill>
                   <a:srgbClr val="0F172A"/>
                 </a:solidFill>
                 <a:latin typeface="Calibri"/>
               </a:rPr>
-              <a:t>• SHA-256 Panel Seed
-• Pillow Placeholder Art
-• Hugging Face SDXL API
-• Local Diffusers SD v1.5</a:t>
+              <a:t>• Pillow Placeholder
+• Hugging Face SDXL
+• Local Stable Diffusion</a:t>
             </a:r>
           </a:p>
         </p:txBody>
@@ -14972,7 +14728,7 @@
         </p:nvSpPr>
         <p:spPr>
           <a:xfrm>
-            <a:off x="7324344" y="3913632"/>
+            <a:off x="7324344" y="3877056"/>
             <a:ext cx="365760" cy="256032"/>
           </a:xfrm>
           <a:prstGeom prst="rect">
@@ -15007,8 +14763,8 @@
         </p:nvSpPr>
         <p:spPr>
           <a:xfrm>
-            <a:off x="6199631" y="4169663"/>
-            <a:ext cx="2615184" cy="2121408"/>
+            <a:off x="6199631" y="4133087"/>
+            <a:ext cx="2615184" cy="2103120"/>
           </a:xfrm>
           <a:prstGeom prst="roundRect">
             <a:avLst>
@@ -15054,7 +14810,7 @@
         </p:nvSpPr>
         <p:spPr>
           <a:xfrm>
-            <a:off x="6199631" y="4169663"/>
+            <a:off x="6199631" y="4133087"/>
             <a:ext cx="2615184" cy="82296"/>
           </a:xfrm>
           <a:prstGeom prst="rect">
@@ -15097,8 +14853,8 @@
         </p:nvSpPr>
         <p:spPr>
           <a:xfrm>
-            <a:off x="6327647" y="4315968"/>
-            <a:ext cx="2359152" cy="292608"/>
+            <a:off x="6364223" y="4297680"/>
+            <a:ext cx="2286000" cy="292608"/>
           </a:xfrm>
           <a:prstGeom prst="rect">
             <a:avLst/>
@@ -15113,13 +14869,13 @@
           <a:p>
             <a:pPr algn="l"/>
             <a:r>
-              <a:rPr sz="1250" b="1">
+              <a:rPr sz="1350" b="1">
                 <a:solidFill>
                   <a:srgbClr val="4F46E5"/>
                 </a:solidFill>
                 <a:latin typeface="Calibri"/>
               </a:rPr>
-              <a:t>PDFService</a:t>
+              <a:t>PDF Service</a:t>
             </a:r>
           </a:p>
         </p:txBody>
@@ -15132,8 +14888,8 @@
         </p:nvSpPr>
         <p:spPr>
           <a:xfrm>
-            <a:off x="6327647" y="4590288"/>
-            <a:ext cx="2359152" cy="237744"/>
+            <a:off x="6364223" y="4590288"/>
+            <a:ext cx="2286000" cy="237744"/>
           </a:xfrm>
           <a:prstGeom prst="rect">
             <a:avLst/>
@@ -15148,13 +14904,13 @@
           <a:p>
             <a:pPr algn="l"/>
             <a:r>
-              <a:rPr sz="1000" b="1">
+              <a:rPr sz="1050" b="1">
                 <a:solidFill>
                   <a:srgbClr val="64748B"/>
                 </a:solidFill>
                 <a:latin typeface="Calibri"/>
               </a:rPr>
-              <a:t>services/pdf_service.py</a:t>
+              <a:t>pdf_service.py</a:t>
             </a:r>
           </a:p>
         </p:txBody>
@@ -15167,8 +14923,8 @@
         </p:nvSpPr>
         <p:spPr>
           <a:xfrm>
-            <a:off x="6327647" y="4882896"/>
-            <a:ext cx="2359152" cy="1298448"/>
+            <a:off x="6364223" y="4901184"/>
+            <a:ext cx="2286000" cy="1188720"/>
           </a:xfrm>
           <a:prstGeom prst="rect">
             <a:avLst/>
@@ -15183,16 +14939,15 @@
           <a:p>
             <a:pPr algn="l"/>
             <a:r>
-              <a:rPr sz="1100" b="0">
+              <a:rPr sz="1200" b="0">
                 <a:solidFill>
                   <a:srgbClr val="0F172A"/>
                 </a:solidFill>
                 <a:latin typeface="Calibri"/>
               </a:rPr>
-              <a:t>• fpdf2 A4 Layout
-• Dark Styled Cover Page
-• 180×145mm Aspect Fit
-• Bundled DejaVu Fonts</a:t>
+              <a:t>• fpdf2 A4 Builder
+• Styled Cover Page
+• One Page per Panel</a:t>
             </a:r>
           </a:p>
         </p:txBody>
@@ -15205,7 +14960,7 @@
         </p:nvSpPr>
         <p:spPr>
           <a:xfrm>
-            <a:off x="10149840" y="3913632"/>
+            <a:off x="10149840" y="3877056"/>
             <a:ext cx="365760" cy="256032"/>
           </a:xfrm>
           <a:prstGeom prst="rect">
@@ -15240,8 +14995,8 @@
         </p:nvSpPr>
         <p:spPr>
           <a:xfrm>
-            <a:off x="9025128" y="4169663"/>
-            <a:ext cx="2615184" cy="2121408"/>
+            <a:off x="9025128" y="4133087"/>
+            <a:ext cx="2615184" cy="2103120"/>
           </a:xfrm>
           <a:prstGeom prst="roundRect">
             <a:avLst>
@@ -15287,7 +15042,7 @@
         </p:nvSpPr>
         <p:spPr>
           <a:xfrm>
-            <a:off x="9025128" y="4169663"/>
+            <a:off x="9025128" y="4133087"/>
             <a:ext cx="2615184" cy="82296"/>
           </a:xfrm>
           <a:prstGeom prst="rect">
@@ -15330,8 +15085,8 @@
         </p:nvSpPr>
         <p:spPr>
           <a:xfrm>
-            <a:off x="9153144" y="4315968"/>
-            <a:ext cx="2359152" cy="292608"/>
+            <a:off x="9189719" y="4297680"/>
+            <a:ext cx="2286000" cy="292608"/>
           </a:xfrm>
           <a:prstGeom prst="rect">
             <a:avLst/>
@@ -15346,13 +15101,13 @@
           <a:p>
             <a:pPr algn="l"/>
             <a:r>
-              <a:rPr sz="1250" b="1">
+              <a:rPr sz="1350" b="1">
                 <a:solidFill>
                   <a:srgbClr val="0F172A"/>
                 </a:solidFill>
                 <a:latin typeface="Calibri"/>
               </a:rPr>
-              <a:t>ComicRepository</a:t>
+              <a:t>Storage Service</a:t>
             </a:r>
           </a:p>
         </p:txBody>
@@ -15365,8 +15120,8 @@
         </p:nvSpPr>
         <p:spPr>
           <a:xfrm>
-            <a:off x="9153144" y="4590288"/>
-            <a:ext cx="2359152" cy="237744"/>
+            <a:off x="9189719" y="4590288"/>
+            <a:ext cx="2286000" cy="237744"/>
           </a:xfrm>
           <a:prstGeom prst="rect">
             <a:avLst/>
@@ -15381,13 +15136,13 @@
           <a:p>
             <a:pPr algn="l"/>
             <a:r>
-              <a:rPr sz="1000" b="1">
+              <a:rPr sz="1050" b="1">
                 <a:solidFill>
                   <a:srgbClr val="64748B"/>
                 </a:solidFill>
                 <a:latin typeface="Calibri"/>
               </a:rPr>
-              <a:t>services/repository.py</a:t>
+              <a:t>repository.py</a:t>
             </a:r>
           </a:p>
         </p:txBody>
@@ -15400,8 +15155,8 @@
         </p:nvSpPr>
         <p:spPr>
           <a:xfrm>
-            <a:off x="9153144" y="4882896"/>
-            <a:ext cx="2359152" cy="1298448"/>
+            <a:off x="9189719" y="4901184"/>
+            <a:ext cx="2286000" cy="1188720"/>
           </a:xfrm>
           <a:prstGeom prst="rect">
             <a:avLst/>
@@ -15416,16 +15171,15 @@
           <a:p>
             <a:pPr algn="l"/>
             <a:r>
-              <a:rPr sz="1100" b="0">
+              <a:rPr sz="1200" b="0">
                 <a:solidFill>
                   <a:srgbClr val="0F172A"/>
                 </a:solidFill>
                 <a:latin typeface="Calibri"/>
               </a:rPr>
-              <a:t>• storage/comics/&lt;uuid&gt;/
-• Regex ^[a-f0-9]{32}$
-• panels/*.png &amp; comic.pdf
-• Atomic comic.json Save</a:t>
+              <a:t>• Unique UUID Folder
+• Panel PNG Images
+• comic.pdf &amp; comic.json</a:t>
             </a:r>
           </a:p>
         </p:txBody>
@@ -15652,7 +15406,7 @@
                 </a:solidFill>
                 <a:latin typeface="Calibri"/>
               </a:rPr>
-              <a:t>Two-Stage Gemini Workflow &amp; Character Continuity</a:t>
+              <a:t>Two-Stage Gemini AI Workflow</a:t>
             </a:r>
           </a:p>
         </p:txBody>
@@ -15687,7 +15441,7 @@
                 </a:solidFill>
                 <a:latin typeface="Calibri"/>
               </a:rPr>
-              <a:t>How structured JSON generation and a Character Bible keep multi-panel stories coherent</a:t>
+              <a:t>How ComicCraft plans the story first and keeps characters visually consistent</a:t>
             </a:r>
           </a:p>
         </p:txBody>
@@ -15744,7 +15498,7 @@
         <p:spPr>
           <a:xfrm>
             <a:off x="548640" y="6510528"/>
-            <a:ext cx="7772400" cy="228600"/>
+            <a:ext cx="7315200" cy="228600"/>
           </a:xfrm>
           <a:prstGeom prst="rect">
             <a:avLst/>
@@ -15765,7 +15519,7 @@
                 </a:solidFill>
                 <a:latin typeface="Calibri"/>
               </a:rPr>
-              <a:t>ComicCraft – AI Comic Story Creator Using Gemini Models  |  Naan Mudhalvan Project</a:t>
+              <a:t>ComicCraft — AI Comic Story Creator</a:t>
             </a:r>
           </a:p>
         </p:txBody>
@@ -15778,8 +15532,8 @@
         </p:nvSpPr>
         <p:spPr>
           <a:xfrm>
-            <a:off x="548640" y="1234440"/>
-            <a:ext cx="2542032" cy="3246120"/>
+            <a:off x="548640" y="1243584"/>
+            <a:ext cx="2542032" cy="3200400"/>
           </a:xfrm>
           <a:prstGeom prst="roundRect">
             <a:avLst>
@@ -15825,7 +15579,7 @@
         </p:nvSpPr>
         <p:spPr>
           <a:xfrm>
-            <a:off x="548640" y="1234440"/>
+            <a:off x="548640" y="1243584"/>
             <a:ext cx="2542032" cy="384048"/>
           </a:xfrm>
           <a:prstGeom prst="rect">
@@ -15868,7 +15622,7 @@
         </p:nvSpPr>
         <p:spPr>
           <a:xfrm>
-            <a:off x="676656" y="1234440"/>
+            <a:off x="676656" y="1243584"/>
             <a:ext cx="2286000" cy="384048"/>
           </a:xfrm>
           <a:prstGeom prst="rect">
@@ -15884,7 +15638,7 @@
           <a:p>
             <a:pPr algn="ctr"/>
             <a:r>
-              <a:rPr sz="1100" b="1">
+              <a:rPr sz="1150" b="1">
                 <a:solidFill>
                   <a:srgbClr val="FFFFFF"/>
                 </a:solidFill>
@@ -15903,8 +15657,8 @@
         </p:nvSpPr>
         <p:spPr>
           <a:xfrm>
-            <a:off x="694944" y="1719072"/>
-            <a:ext cx="2249424" cy="329184"/>
+            <a:off x="713232" y="1737360"/>
+            <a:ext cx="2212848" cy="329184"/>
           </a:xfrm>
           <a:prstGeom prst="rect">
             <a:avLst/>
@@ -15919,13 +15673,13 @@
           <a:p>
             <a:pPr algn="l"/>
             <a:r>
-              <a:rPr sz="1400" b="1">
+              <a:rPr sz="1450" b="1">
                 <a:solidFill>
                   <a:srgbClr val="0F172A"/>
                 </a:solidFill>
                 <a:latin typeface="Calibri"/>
               </a:rPr>
-              <a:t>Validated Brief</a:t>
+              <a:t>Story Brief</a:t>
             </a:r>
           </a:p>
         </p:txBody>
@@ -15938,8 +15692,8 @@
         </p:nvSpPr>
         <p:spPr>
           <a:xfrm>
-            <a:off x="694944" y="2029968"/>
-            <a:ext cx="2249424" cy="256032"/>
+            <a:off x="713232" y="2066543"/>
+            <a:ext cx="2212848" cy="256032"/>
           </a:xfrm>
           <a:prstGeom prst="rect">
             <a:avLst/>
@@ -15954,13 +15708,13 @@
           <a:p>
             <a:pPr algn="l"/>
             <a:r>
-              <a:rPr sz="1050" b="1">
+              <a:rPr sz="1100" b="1">
                 <a:solidFill>
                   <a:srgbClr val="0F172A"/>
                 </a:solidFill>
                 <a:latin typeface="Calibri"/>
               </a:rPr>
-              <a:t>ComicPrompt</a:t>
+              <a:t>User Input</a:t>
             </a:r>
           </a:p>
         </p:txBody>
@@ -15973,8 +15727,8 @@
         </p:nvSpPr>
         <p:spPr>
           <a:xfrm>
-            <a:off x="694944" y="2359152"/>
-            <a:ext cx="2249424" cy="1965960"/>
+            <a:off x="713232" y="2395728"/>
+            <a:ext cx="2212848" cy="1920240"/>
           </a:xfrm>
           <a:prstGeom prst="rect">
             <a:avLst/>
@@ -15989,17 +15743,17 @@
           <a:p>
             <a:pPr algn="l"/>
             <a:r>
-              <a:rPr sz="1150" b="0">
+              <a:rPr sz="1200" b="0">
                 <a:solidFill>
                   <a:srgbClr val="0F172A"/>
                 </a:solidFill>
                 <a:latin typeface="Calibri"/>
               </a:rPr>
-              <a:t>• Story idea (10–1500 chars)
-• Hero name &amp; setting
-• Tone &amp; art style
-• Panel count: 3 to 8
-• Blocks control chars</a:t>
+              <a:t>• Story idea
+• Main character
+• Setting &amp; tone
+• Art style
+• 3 to 8 panels</a:t>
             </a:r>
           </a:p>
         </p:txBody>
@@ -16047,8 +15801,8 @@
         </p:nvSpPr>
         <p:spPr>
           <a:xfrm>
-            <a:off x="3396996" y="1234440"/>
-            <a:ext cx="2542032" cy="3246120"/>
+            <a:off x="3396996" y="1243584"/>
+            <a:ext cx="2542032" cy="3200400"/>
           </a:xfrm>
           <a:prstGeom prst="roundRect">
             <a:avLst>
@@ -16094,7 +15848,7 @@
         </p:nvSpPr>
         <p:spPr>
           <a:xfrm>
-            <a:off x="3396996" y="1234440"/>
+            <a:off x="3396996" y="1243584"/>
             <a:ext cx="2542032" cy="384048"/>
           </a:xfrm>
           <a:prstGeom prst="rect">
@@ -16137,7 +15891,7 @@
         </p:nvSpPr>
         <p:spPr>
           <a:xfrm>
-            <a:off x="3525012" y="1234440"/>
+            <a:off x="3525012" y="1243584"/>
             <a:ext cx="2286000" cy="384048"/>
           </a:xfrm>
           <a:prstGeom prst="rect">
@@ -16153,7 +15907,7 @@
           <a:p>
             <a:pPr algn="ctr"/>
             <a:r>
-              <a:rPr sz="1100" b="1">
+              <a:rPr sz="1150" b="1">
                 <a:solidFill>
                   <a:srgbClr val="FFFFFF"/>
                 </a:solidFill>
@@ -16172,8 +15926,8 @@
         </p:nvSpPr>
         <p:spPr>
           <a:xfrm>
-            <a:off x="3543300" y="1719072"/>
-            <a:ext cx="2249424" cy="329184"/>
+            <a:off x="3561588" y="1737360"/>
+            <a:ext cx="2212848" cy="329184"/>
           </a:xfrm>
           <a:prstGeom prst="rect">
             <a:avLst/>
@@ -16188,7 +15942,7 @@
           <a:p>
             <a:pPr algn="l"/>
             <a:r>
-              <a:rPr sz="1400" b="1">
+              <a:rPr sz="1450" b="1">
                 <a:solidFill>
                   <a:srgbClr val="0F172A"/>
                 </a:solidFill>
@@ -16207,8 +15961,8 @@
         </p:nvSpPr>
         <p:spPr>
           <a:xfrm>
-            <a:off x="3543300" y="2029968"/>
-            <a:ext cx="2249424" cy="256032"/>
+            <a:off x="3561588" y="2066543"/>
+            <a:ext cx="2212848" cy="256032"/>
           </a:xfrm>
           <a:prstGeom prst="rect">
             <a:avLst/>
@@ -16223,13 +15977,13 @@
           <a:p>
             <a:pPr algn="l"/>
             <a:r>
-              <a:rPr sz="1050" b="1">
+              <a:rPr sz="1100" b="1">
                 <a:solidFill>
                   <a:srgbClr val="2563EB"/>
                 </a:solidFill>
                 <a:latin typeface="Calibri"/>
               </a:rPr>
-              <a:t>gemini-3.5-flash-lite</a:t>
+              <a:t>Gemini Outline Model</a:t>
             </a:r>
           </a:p>
         </p:txBody>
@@ -16242,8 +15996,8 @@
         </p:nvSpPr>
         <p:spPr>
           <a:xfrm>
-            <a:off x="3543300" y="2359152"/>
-            <a:ext cx="2249424" cy="1965960"/>
+            <a:off x="3561588" y="2395728"/>
+            <a:ext cx="2212848" cy="1920240"/>
           </a:xfrm>
           <a:prstGeom prst="rect">
             <a:avLst/>
@@ -16258,17 +16012,16 @@
           <a:p>
             <a:pPr algn="l"/>
             <a:r>
-              <a:rPr sz="1150" b="0">
+              <a:rPr sz="1200" b="0">
                 <a:solidFill>
                   <a:srgbClr val="0F172A"/>
                 </a:solidFill>
                 <a:latin typeface="Calibri"/>
               </a:rPr>
-              <a:t>• JSON MIME mode forced
-• Generates Comic Title
-• Creates Character Bible
-• Plans N sequential scenes
-• Validated by ComicOutline</a:t>
+              <a:t>• Returns strict JSON
+• Creates Comic Title
+• Builds Character Bible
+• Plans N panel scenes</a:t>
             </a:r>
           </a:p>
         </p:txBody>
@@ -16316,8 +16069,8 @@
         </p:nvSpPr>
         <p:spPr>
           <a:xfrm>
-            <a:off x="6245351" y="1234440"/>
-            <a:ext cx="2542032" cy="3246120"/>
+            <a:off x="6245351" y="1243584"/>
+            <a:ext cx="2542032" cy="3200400"/>
           </a:xfrm>
           <a:prstGeom prst="roundRect">
             <a:avLst>
@@ -16363,7 +16116,7 @@
         </p:nvSpPr>
         <p:spPr>
           <a:xfrm>
-            <a:off x="6245351" y="1234440"/>
+            <a:off x="6245351" y="1243584"/>
             <a:ext cx="2542032" cy="384048"/>
           </a:xfrm>
           <a:prstGeom prst="rect">
@@ -16406,7 +16159,7 @@
         </p:nvSpPr>
         <p:spPr>
           <a:xfrm>
-            <a:off x="6373367" y="1234440"/>
+            <a:off x="6373367" y="1243584"/>
             <a:ext cx="2286000" cy="384048"/>
           </a:xfrm>
           <a:prstGeom prst="rect">
@@ -16422,7 +16175,7 @@
           <a:p>
             <a:pPr algn="ctr"/>
             <a:r>
-              <a:rPr sz="1100" b="1">
+              <a:rPr sz="1150" b="1">
                 <a:solidFill>
                   <a:srgbClr val="FFFFFF"/>
                 </a:solidFill>
@@ -16441,8 +16194,8 @@
         </p:nvSpPr>
         <p:spPr>
           <a:xfrm>
-            <a:off x="6391655" y="1719072"/>
-            <a:ext cx="2249424" cy="329184"/>
+            <a:off x="6409943" y="1737360"/>
+            <a:ext cx="2212848" cy="329184"/>
           </a:xfrm>
           <a:prstGeom prst="rect">
             <a:avLst/>
@@ -16457,7 +16210,7 @@
           <a:p>
             <a:pPr algn="l"/>
             <a:r>
-              <a:rPr sz="1400" b="1">
+              <a:rPr sz="1450" b="1">
                 <a:solidFill>
                   <a:srgbClr val="0F172A"/>
                 </a:solidFill>
@@ -16476,8 +16229,8 @@
         </p:nvSpPr>
         <p:spPr>
           <a:xfrm>
-            <a:off x="6391655" y="2029968"/>
-            <a:ext cx="2249424" cy="256032"/>
+            <a:off x="6409943" y="2066543"/>
+            <a:ext cx="2212848" cy="256032"/>
           </a:xfrm>
           <a:prstGeom prst="rect">
             <a:avLst/>
@@ -16492,13 +16245,13 @@
           <a:p>
             <a:pPr algn="l"/>
             <a:r>
-              <a:rPr sz="1050" b="1">
+              <a:rPr sz="1100" b="1">
                 <a:solidFill>
                   <a:srgbClr val="0D9488"/>
                 </a:solidFill>
                 <a:latin typeface="Calibri"/>
               </a:rPr>
-              <a:t>gemini-3.5-flash</a:t>
+              <a:t>Gemini Story Model</a:t>
             </a:r>
           </a:p>
         </p:txBody>
@@ -16511,8 +16264,8 @@
         </p:nvSpPr>
         <p:spPr>
           <a:xfrm>
-            <a:off x="6391655" y="2359152"/>
-            <a:ext cx="2249424" cy="1965960"/>
+            <a:off x="6409943" y="2395728"/>
+            <a:ext cx="2212848" cy="1920240"/>
           </a:xfrm>
           <a:prstGeom prst="rect">
             <a:avLst/>
@@ -16527,17 +16280,16 @@
           <a:p>
             <a:pPr algn="l"/>
             <a:r>
-              <a:rPr sz="1150" b="0">
+              <a:rPr sz="1200" b="0">
                 <a:solidFill>
                   <a:srgbClr val="0F172A"/>
                 </a:solidFill>
                 <a:latin typeface="Calibri"/>
               </a:rPr>
-              <a:t>• Receives approved outline
-• Panel caption &amp; narration
-• 0–3 dialogue lines/panel
-• Repeats Character Bible
-• Validated by ComicScript</a:t>
+              <a:t>• Uses approved outline
+• Writes panel captions
+• Adds narration &amp; dialogue
+• Builds image prompts</a:t>
             </a:r>
           </a:p>
         </p:txBody>
@@ -16585,8 +16337,8 @@
         </p:nvSpPr>
         <p:spPr>
           <a:xfrm>
-            <a:off x="9093707" y="1234440"/>
-            <a:ext cx="2542032" cy="3246120"/>
+            <a:off x="9093707" y="1243584"/>
+            <a:ext cx="2542032" cy="3200400"/>
           </a:xfrm>
           <a:prstGeom prst="roundRect">
             <a:avLst>
@@ -16632,7 +16384,7 @@
         </p:nvSpPr>
         <p:spPr>
           <a:xfrm>
-            <a:off x="9093707" y="1234440"/>
+            <a:off x="9093707" y="1243584"/>
             <a:ext cx="2542032" cy="384048"/>
           </a:xfrm>
           <a:prstGeom prst="rect">
@@ -16675,7 +16427,7 @@
         </p:nvSpPr>
         <p:spPr>
           <a:xfrm>
-            <a:off x="9221724" y="1234440"/>
+            <a:off x="9221724" y="1243584"/>
             <a:ext cx="2286000" cy="384048"/>
           </a:xfrm>
           <a:prstGeom prst="rect">
@@ -16691,7 +16443,7 @@
           <a:p>
             <a:pPr algn="ctr"/>
             <a:r>
-              <a:rPr sz="1100" b="1">
+              <a:rPr sz="1150" b="1">
                 <a:solidFill>
                   <a:srgbClr val="FFFFFF"/>
                 </a:solidFill>
@@ -16710,8 +16462,8 @@
         </p:nvSpPr>
         <p:spPr>
           <a:xfrm>
-            <a:off x="9240011" y="1719072"/>
-            <a:ext cx="2249424" cy="329184"/>
+            <a:off x="9258299" y="1737360"/>
+            <a:ext cx="2212848" cy="329184"/>
           </a:xfrm>
           <a:prstGeom prst="rect">
             <a:avLst/>
@@ -16726,13 +16478,13 @@
           <a:p>
             <a:pPr algn="l"/>
             <a:r>
-              <a:rPr sz="1400" b="1">
+              <a:rPr sz="1450" b="1">
                 <a:solidFill>
                   <a:srgbClr val="0F172A"/>
                 </a:solidFill>
                 <a:latin typeface="Calibri"/>
               </a:rPr>
-              <a:t>Seeded Panel Art</a:t>
+              <a:t>Panel Artwork</a:t>
             </a:r>
           </a:p>
         </p:txBody>
@@ -16745,8 +16497,8 @@
         </p:nvSpPr>
         <p:spPr>
           <a:xfrm>
-            <a:off x="9240011" y="2029968"/>
-            <a:ext cx="2249424" cy="256032"/>
+            <a:off x="9258299" y="2066543"/>
+            <a:ext cx="2212848" cy="256032"/>
           </a:xfrm>
           <a:prstGeom prst="rect">
             <a:avLst/>
@@ -16761,13 +16513,13 @@
           <a:p>
             <a:pPr algn="l"/>
             <a:r>
-              <a:rPr sz="1050" b="1">
+              <a:rPr sz="1100" b="1">
                 <a:solidFill>
                   <a:srgbClr val="B45309"/>
                 </a:solidFill>
                 <a:latin typeface="Calibri"/>
               </a:rPr>
-              <a:t>ImageProvider Protocol</a:t>
+              <a:t>Image Provider</a:t>
             </a:r>
           </a:p>
         </p:txBody>
@@ -16780,8 +16532,8 @@
         </p:nvSpPr>
         <p:spPr>
           <a:xfrm>
-            <a:off x="9240011" y="2359152"/>
-            <a:ext cx="2249424" cy="1965960"/>
+            <a:off x="9258299" y="2395728"/>
+            <a:ext cx="2212848" cy="1920240"/>
           </a:xfrm>
           <a:prstGeom prst="rect">
             <a:avLst/>
@@ -16796,17 +16548,16 @@
           <a:p>
             <a:pPr algn="l"/>
             <a:r>
-              <a:rPr sz="1150" b="0">
+              <a:rPr sz="1200" b="0">
                 <a:solidFill>
                   <a:srgbClr val="0F172A"/>
                 </a:solidFill>
                 <a:latin typeface="Calibri"/>
               </a:rPr>
-              <a:t>• SHA-256 deterministic seed
-• Negative prompts applied
-• No text bubbles inside art
-• Saves panel-1..N.png
-• Feeds PDF &amp; Web preview</a:t>
+              <a:t>• Repeats hero traits
+• Deterministic seed
+• 1 PNG per panel
+• Sent to Preview &amp; PDF</a:t>
             </a:r>
           </a:p>
         </p:txBody>
@@ -16819,8 +16570,8 @@
         </p:nvSpPr>
         <p:spPr>
           <a:xfrm>
-            <a:off x="548640" y="4736592"/>
-            <a:ext cx="5413248" cy="1572768"/>
+            <a:off x="548640" y="4718304"/>
+            <a:ext cx="5413248" cy="1536192"/>
           </a:xfrm>
           <a:prstGeom prst="roundRect">
             <a:avLst>
@@ -16866,8 +16617,8 @@
         </p:nvSpPr>
         <p:spPr>
           <a:xfrm>
-            <a:off x="548640" y="4736592"/>
-            <a:ext cx="91440" cy="1572768"/>
+            <a:off x="548640" y="4718304"/>
+            <a:ext cx="91440" cy="1536192"/>
           </a:xfrm>
           <a:prstGeom prst="rect">
             <a:avLst/>
@@ -16925,13 +16676,13 @@
           <a:p>
             <a:pPr algn="l"/>
             <a:r>
-              <a:rPr sz="1250" b="1">
+              <a:rPr sz="1300" b="1">
                 <a:solidFill>
                   <a:srgbClr val="0D9488"/>
                 </a:solidFill>
                 <a:latin typeface="Calibri"/>
               </a:rPr>
-              <a:t>WHY TWO GEMINI STAGES?</a:t>
+              <a:t>WHY TWO STAGES?</a:t>
             </a:r>
           </a:p>
         </p:txBody>
@@ -16944,8 +16695,8 @@
         </p:nvSpPr>
         <p:spPr>
           <a:xfrm>
-            <a:off x="804672" y="5175504"/>
-            <a:ext cx="4983480" cy="1024128"/>
+            <a:off x="804672" y="5193792"/>
+            <a:ext cx="4983480" cy="914400"/>
           </a:xfrm>
           <a:prstGeom prst="rect">
             <a:avLst/>
@@ -16960,13 +16711,13 @@
           <a:p>
             <a:pPr algn="l"/>
             <a:r>
-              <a:rPr sz="1130" b="0">
+              <a:rPr sz="1200" b="0">
                 <a:solidFill>
                   <a:srgbClr val="334155"/>
                 </a:solidFill>
                 <a:latin typeface="Calibri"/>
               </a:rPr>
-              <a:t>Single-prompt generation mixes story planning with dialogue writing, causing missing panels or broken pacing. Splitting Outline (fast lite model) and Script (story model) guarantees exact panel counts and richer storytelling.</a:t>
+              <a:t>Planning the outline in Stage 1 and writing dialogue in Stage 2 gives better story pacing and guarantees the exact number of panels.</a:t>
             </a:r>
           </a:p>
         </p:txBody>
@@ -16979,8 +16730,8 @@
         </p:nvSpPr>
         <p:spPr>
           <a:xfrm>
-            <a:off x="6227064" y="4736592"/>
-            <a:ext cx="5413248" cy="1572768"/>
+            <a:off x="6227064" y="4718304"/>
+            <a:ext cx="5413248" cy="1536192"/>
           </a:xfrm>
           <a:prstGeom prst="roundRect">
             <a:avLst>
@@ -17026,8 +16777,8 @@
         </p:nvSpPr>
         <p:spPr>
           <a:xfrm>
-            <a:off x="6227064" y="4736592"/>
-            <a:ext cx="91440" cy="1572768"/>
+            <a:off x="6227064" y="4718304"/>
+            <a:ext cx="91440" cy="1536192"/>
           </a:xfrm>
           <a:prstGeom prst="rect">
             <a:avLst/>
@@ -17085,13 +16836,13 @@
           <a:p>
             <a:pPr algn="l"/>
             <a:r>
-              <a:rPr sz="1250" b="1">
+              <a:rPr sz="1300" b="1">
                 <a:solidFill>
                   <a:srgbClr val="2563EB"/>
                 </a:solidFill>
                 <a:latin typeface="Calibri"/>
               </a:rPr>
-              <a:t>HOW CHARACTER CONTINUITY WORKS</a:t>
+              <a:t>WHAT IS THE CHARACTER BIBLE?</a:t>
             </a:r>
           </a:p>
         </p:txBody>
@@ -17104,8 +16855,8 @@
         </p:nvSpPr>
         <p:spPr>
           <a:xfrm>
-            <a:off x="6483096" y="5175504"/>
-            <a:ext cx="4983480" cy="1024128"/>
+            <a:off x="6483096" y="5193792"/>
+            <a:ext cx="4983480" cy="914400"/>
           </a:xfrm>
           <a:prstGeom prst="rect">
             <a:avLst/>
@@ -17120,13 +16871,13 @@
           <a:p>
             <a:pPr algn="l"/>
             <a:r>
-              <a:rPr sz="1130" b="0">
+              <a:rPr sz="1200" b="0">
                 <a:solidFill>
                   <a:srgbClr val="334155"/>
                 </a:solidFill>
                 <a:latin typeface="Calibri"/>
               </a:rPr>
-              <a:t>Stage 1 produces a 'character_bible' (fixed face, hair, outfit, and colors). Stage 2 embeds those exact traits into every panel's image_prompt, while negative prompts ban 'inconsistent clothing' and stray text bubbles.</a:t>
+              <a:t>A fixed visual description of the hero's face, hairstyle, and outfit created in Stage 1 and repeated in every panel's image prompt.</a:t>
             </a:r>
           </a:p>
         </p:txBody>
@@ -17353,7 +17104,7 @@
                 </a:solidFill>
                 <a:latin typeface="Calibri"/>
               </a:rPr>
-              <a:t>Resilience, Graceful Fallbacks &amp; Security</a:t>
+              <a:t>Key Features &amp; Smart Fallback Design</a:t>
             </a:r>
           </a:p>
         </p:txBody>
@@ -17388,7 +17139,7 @@
                 </a:solidFill>
                 <a:latin typeface="Calibri"/>
               </a:rPr>
-              <a:t>Engineered so transient API failures, missing keys, or bad inputs never crash the application</a:t>
+              <a:t>Built for reliable execution both online with AI models and offline in Demo Mode</a:t>
             </a:r>
           </a:p>
         </p:txBody>
@@ -17445,7 +17196,7 @@
         <p:spPr>
           <a:xfrm>
             <a:off x="548640" y="6510528"/>
-            <a:ext cx="7772400" cy="228600"/>
+            <a:ext cx="7315200" cy="228600"/>
           </a:xfrm>
           <a:prstGeom prst="rect">
             <a:avLst/>
@@ -17466,7 +17217,7 @@
                 </a:solidFill>
                 <a:latin typeface="Calibri"/>
               </a:rPr>
-              <a:t>ComicCraft – AI Comic Story Creator Using Gemini Models  |  Naan Mudhalvan Project</a:t>
+              <a:t>ComicCraft — AI Comic Story Creator</a:t>
             </a:r>
           </a:p>
         </p:txBody>
@@ -17479,8 +17230,8 @@
         </p:nvSpPr>
         <p:spPr>
           <a:xfrm>
-            <a:off x="548640" y="1207008"/>
-            <a:ext cx="3529584" cy="5102352"/>
+            <a:off x="548640" y="1225296"/>
+            <a:ext cx="3529584" cy="5010912"/>
           </a:xfrm>
           <a:prstGeom prst="roundRect">
             <a:avLst>
@@ -17526,7 +17277,7 @@
         </p:nvSpPr>
         <p:spPr>
           <a:xfrm>
-            <a:off x="548640" y="1207008"/>
+            <a:off x="548640" y="1225296"/>
             <a:ext cx="3529584" cy="457200"/>
           </a:xfrm>
           <a:prstGeom prst="rect">
@@ -17569,7 +17320,7 @@
         </p:nvSpPr>
         <p:spPr>
           <a:xfrm>
-            <a:off x="676656" y="1207008"/>
+            <a:off x="676656" y="1225296"/>
             <a:ext cx="3273552" cy="457200"/>
           </a:xfrm>
           <a:prstGeom prst="rect">
@@ -17585,13 +17336,13 @@
           <a:p>
             <a:pPr algn="ctr"/>
             <a:r>
-              <a:rPr sz="1150" b="1">
+              <a:rPr sz="1200" b="1">
                 <a:solidFill>
                   <a:srgbClr val="FFFFFF"/>
                 </a:solidFill>
                 <a:latin typeface="Calibri"/>
               </a:rPr>
-              <a:t>1. SMART GEMINI RETRY &amp; FALLBACK</a:t>
+              <a:t>1. SMART AI FALLBACKS</a:t>
             </a:r>
           </a:p>
         </p:txBody>
@@ -17604,8 +17355,8 @@
         </p:nvSpPr>
         <p:spPr>
           <a:xfrm>
-            <a:off x="713232" y="1810512"/>
-            <a:ext cx="3200400" cy="4343400"/>
+            <a:off x="731520" y="1865376"/>
+            <a:ext cx="3163824" cy="4206240"/>
           </a:xfrm>
           <a:prstGeom prst="rect">
             <a:avLst/>
@@ -17620,112 +17371,112 @@
           <a:p>
             <a:pPr>
               <a:lnSpc>
-                <a:spcPct val="118000"/>
+                <a:spcPct val="122000"/>
               </a:lnSpc>
               <a:spcAft>
-                <a:spcPts val="1200"/>
+                <a:spcPts val="1400"/>
               </a:spcAft>
             </a:pPr>
             <a:r>
-              <a:rPr sz="1180" b="1">
-                <a:solidFill>
-                  <a:srgbClr val="0D9488"/>
-                </a:solidFill>
-                <a:latin typeface="Calibri"/>
-              </a:rPr>
-              <a:t>▪ </a:t>
-            </a:r>
-            <a:r>
-              <a:rPr sz="1180" b="1">
+              <a:rPr sz="1230" b="1">
+                <a:solidFill>
+                  <a:srgbClr val="B45309"/>
+                </a:solidFill>
+                <a:latin typeface="Calibri"/>
+              </a:rPr>
+              <a:t>▪  </a:t>
+            </a:r>
+            <a:r>
+              <a:rPr sz="1230" b="1">
                 <a:solidFill>
                   <a:srgbClr val="0F172A"/>
                 </a:solidFill>
                 <a:latin typeface="Calibri"/>
               </a:rPr>
-              <a:t>Transient 429 / 5xx Errors: </a:t>
-            </a:r>
-            <a:r>
-              <a:rPr sz="1180" b="0">
+              <a:t>Auto Retry: </a:t>
+            </a:r>
+            <a:r>
+              <a:rPr sz="1230">
                 <a:solidFill>
                   <a:srgbClr val="334155"/>
                 </a:solidFill>
                 <a:latin typeface="Calibri"/>
               </a:rPr>
-              <a:t>Retries up to GEMINI_RETRY_ATTEMPTS using bounded exponential backoff (base × 2^attempt) plus random jitter.</a:t>
+              <a:t>Automatically retries temporary API errors (429 / 503) using exponential backoff.</a:t>
             </a:r>
           </a:p>
           <a:p>
             <a:pPr>
               <a:lnSpc>
-                <a:spcPct val="118000"/>
+                <a:spcPct val="122000"/>
               </a:lnSpc>
               <a:spcAft>
-                <a:spcPts val="1200"/>
+                <a:spcPts val="1400"/>
               </a:spcAft>
             </a:pPr>
             <a:r>
-              <a:rPr sz="1180" b="1">
-                <a:solidFill>
-                  <a:srgbClr val="0D9488"/>
-                </a:solidFill>
-                <a:latin typeface="Calibri"/>
-              </a:rPr>
-              <a:t>▪ </a:t>
-            </a:r>
-            <a:r>
-              <a:rPr sz="1180" b="1">
+              <a:rPr sz="1230" b="1">
+                <a:solidFill>
+                  <a:srgbClr val="B45309"/>
+                </a:solidFill>
+                <a:latin typeface="Calibri"/>
+              </a:rPr>
+              <a:t>▪  </a:t>
+            </a:r>
+            <a:r>
+              <a:rPr sz="1230" b="1">
                 <a:solidFill>
                   <a:srgbClr val="0F172A"/>
                 </a:solidFill>
                 <a:latin typeface="Calibri"/>
               </a:rPr>
-              <a:t>400 / 404 Invalid Model IDs: </a:t>
-            </a:r>
-            <a:r>
-              <a:rPr sz="1180" b="0">
+              <a:t>Backup Models: </a:t>
+            </a:r>
+            <a:r>
+              <a:rPr sz="1230">
                 <a:solidFill>
                   <a:srgbClr val="334155"/>
                 </a:solidFill>
                 <a:latin typeface="Calibri"/>
               </a:rPr>
-              <a:t>Skips waiting and switches immediately to configured fallback Gemini models in .env.</a:t>
+              <a:t>Switches immediately to fallback Gemini models if a primary model is unavailable.</a:t>
             </a:r>
           </a:p>
           <a:p>
             <a:pPr>
               <a:lnSpc>
-                <a:spcPct val="118000"/>
+                <a:spcPct val="122000"/>
               </a:lnSpc>
               <a:spcAft>
-                <a:spcPts val="1200"/>
+                <a:spcPts val="1400"/>
               </a:spcAft>
             </a:pPr>
             <a:r>
-              <a:rPr sz="1180" b="1">
-                <a:solidFill>
-                  <a:srgbClr val="0D9488"/>
-                </a:solidFill>
-                <a:latin typeface="Calibri"/>
-              </a:rPr>
-              <a:t>▪ </a:t>
-            </a:r>
-            <a:r>
-              <a:rPr sz="1180" b="1">
+              <a:rPr sz="1230" b="1">
+                <a:solidFill>
+                  <a:srgbClr val="B45309"/>
+                </a:solidFill>
+                <a:latin typeface="Calibri"/>
+              </a:rPr>
+              <a:t>▪  </a:t>
+            </a:r>
+            <a:r>
+              <a:rPr sz="1230" b="1">
                 <a:solidFill>
                   <a:srgbClr val="0F172A"/>
                 </a:solidFill>
                 <a:latin typeface="Calibri"/>
               </a:rPr>
-              <a:t>Offline Story Fallback: </a:t>
-            </a:r>
-            <a:r>
-              <a:rPr sz="1180" b="0">
+              <a:t>Offline Demo Mode: </a:t>
+            </a:r>
+            <a:r>
+              <a:rPr sz="1230">
                 <a:solidFill>
                   <a:srgbClr val="334155"/>
                 </a:solidFill>
                 <a:latin typeface="Calibri"/>
               </a:rPr>
-              <a:t>If all live models fail and ALLOW_AI_FALLBACK=true, DemoStoryProvider completes the comic with a visible warning.</a:t>
+              <a:t>Generates complete demo stories offline when no Gemini API key is configured.</a:t>
             </a:r>
           </a:p>
         </p:txBody>
@@ -17738,8 +17489,8 @@
         </p:nvSpPr>
         <p:spPr>
           <a:xfrm>
-            <a:off x="4329683" y="1207008"/>
-            <a:ext cx="3529584" cy="5102352"/>
+            <a:off x="4329683" y="1225296"/>
+            <a:ext cx="3529584" cy="5010912"/>
           </a:xfrm>
           <a:prstGeom prst="roundRect">
             <a:avLst>
@@ -17785,7 +17536,7 @@
         </p:nvSpPr>
         <p:spPr>
           <a:xfrm>
-            <a:off x="4329683" y="1207008"/>
+            <a:off x="4329683" y="1225296"/>
             <a:ext cx="3529584" cy="457200"/>
           </a:xfrm>
           <a:prstGeom prst="rect">
@@ -17828,7 +17579,7 @@
         </p:nvSpPr>
         <p:spPr>
           <a:xfrm>
-            <a:off x="4457699" y="1207008"/>
+            <a:off x="4457699" y="1225296"/>
             <a:ext cx="3273552" cy="457200"/>
           </a:xfrm>
           <a:prstGeom prst="rect">
@@ -17844,13 +17595,13 @@
           <a:p>
             <a:pPr algn="ctr"/>
             <a:r>
-              <a:rPr sz="1150" b="1">
+              <a:rPr sz="1200" b="1">
                 <a:solidFill>
                   <a:srgbClr val="FFFFFF"/>
                 </a:solidFill>
                 <a:latin typeface="Calibri"/>
               </a:rPr>
-              <a:t>2. PER-PANEL IMAGE PROTECTION</a:t>
+              <a:t>2. FLEXIBLE IMAGE MODES</a:t>
             </a:r>
           </a:p>
         </p:txBody>
@@ -17863,8 +17614,8 @@
         </p:nvSpPr>
         <p:spPr>
           <a:xfrm>
-            <a:off x="4494275" y="1810512"/>
-            <a:ext cx="3200400" cy="4343400"/>
+            <a:off x="4512564" y="1865376"/>
+            <a:ext cx="3163824" cy="4206240"/>
           </a:xfrm>
           <a:prstGeom prst="rect">
             <a:avLst/>
@@ -17879,112 +17630,112 @@
           <a:p>
             <a:pPr>
               <a:lnSpc>
-                <a:spcPct val="118000"/>
+                <a:spcPct val="122000"/>
               </a:lnSpc>
               <a:spcAft>
-                <a:spcPts val="1200"/>
+                <a:spcPts val="1400"/>
               </a:spcAft>
             </a:pPr>
             <a:r>
-              <a:rPr sz="1180" b="1">
+              <a:rPr sz="1230" b="1">
                 <a:solidFill>
                   <a:srgbClr val="0D9488"/>
                 </a:solidFill>
                 <a:latin typeface="Calibri"/>
               </a:rPr>
-              <a:t>▪ </a:t>
-            </a:r>
-            <a:r>
-              <a:rPr sz="1180" b="1">
+              <a:t>▪  </a:t>
+            </a:r>
+            <a:r>
+              <a:rPr sz="1230" b="1">
                 <a:solidFill>
                   <a:srgbClr val="0F172A"/>
                 </a:solidFill>
                 <a:latin typeface="Calibri"/>
               </a:rPr>
-              <a:t>Pluggable Provider Layer: </a:t>
-            </a:r>
-            <a:r>
-              <a:rPr sz="1180" b="0">
+              <a:t>Three Providers: </a:t>
+            </a:r>
+            <a:r>
+              <a:rPr sz="1230">
                 <a:solidFill>
                   <a:srgbClr val="334155"/>
                 </a:solidFill>
                 <a:latin typeface="Calibri"/>
               </a:rPr>
-              <a:t>Supports Placeholder (Pillow), Hugging Face Hosted SDXL, and lazy-loaded Local Stable Diffusion.</a:t>
+              <a:t>Supports Pillow Placeholder, Hugging Face Cloud SDXL, and Local Stable Diffusion.</a:t>
             </a:r>
           </a:p>
           <a:p>
             <a:pPr>
               <a:lnSpc>
-                <a:spcPct val="118000"/>
+                <a:spcPct val="122000"/>
               </a:lnSpc>
               <a:spcAft>
-                <a:spcPts val="1200"/>
+                <a:spcPts val="1400"/>
               </a:spcAft>
             </a:pPr>
             <a:r>
-              <a:rPr sz="1180" b="1">
+              <a:rPr sz="1230" b="1">
                 <a:solidFill>
                   <a:srgbClr val="0D9488"/>
                 </a:solidFill>
                 <a:latin typeface="Calibri"/>
               </a:rPr>
-              <a:t>▪ </a:t>
-            </a:r>
-            <a:r>
-              <a:rPr sz="1180" b="1">
+              <a:t>▪  </a:t>
+            </a:r>
+            <a:r>
+              <a:rPr sz="1230" b="1">
                 <a:solidFill>
                   <a:srgbClr val="0F172A"/>
                 </a:solidFill>
                 <a:latin typeface="Calibri"/>
               </a:rPr>
-              <a:t>Panel-Level Isolation: </a:t>
-            </a:r>
-            <a:r>
-              <a:rPr sz="1180" b="0">
+              <a:t>Per-Panel Protection: </a:t>
+            </a:r>
+            <a:r>
+              <a:rPr sz="1230">
                 <a:solidFill>
                   <a:srgbClr val="334155"/>
                 </a:solidFill>
                 <a:latin typeface="Calibri"/>
               </a:rPr>
-              <a:t>If panel #3 fails on Hugging Face, the whole comic is NOT lost—only panel #3 falls back to a labeled Placeholder PNG.</a:t>
+              <a:t>If one panel image fails, only that panel uses a placeholder—the comic still finishes.</a:t>
             </a:r>
           </a:p>
           <a:p>
             <a:pPr>
               <a:lnSpc>
-                <a:spcPct val="118000"/>
+                <a:spcPct val="122000"/>
               </a:lnSpc>
               <a:spcAft>
-                <a:spcPts val="1200"/>
+                <a:spcPts val="1400"/>
               </a:spcAft>
             </a:pPr>
             <a:r>
-              <a:rPr sz="1180" b="1">
+              <a:rPr sz="1230" b="1">
                 <a:solidFill>
                   <a:srgbClr val="0D9488"/>
                 </a:solidFill>
                 <a:latin typeface="Calibri"/>
               </a:rPr>
-              <a:t>▪ </a:t>
-            </a:r>
-            <a:r>
-              <a:rPr sz="1180" b="1">
+              <a:t>▪  </a:t>
+            </a:r>
+            <a:r>
+              <a:rPr sz="1230" b="1">
                 <a:solidFill>
                   <a:srgbClr val="0F172A"/>
                 </a:solidFill>
                 <a:latin typeface="Calibri"/>
               </a:rPr>
-              <a:t>Honest Provider Metadata: </a:t>
-            </a:r>
-            <a:r>
-              <a:rPr sz="1180" b="0">
+              <a:t>Clear Badges: </a:t>
+            </a:r>
+            <a:r>
+              <a:rPr sz="1230">
                 <a:solidFill>
                   <a:srgbClr val="334155"/>
                 </a:solidFill>
                 <a:latin typeface="Calibri"/>
               </a:rPr>
-              <a:t>ProviderInfo records exact models used, image providers, used_fallback=true, and user-visible warnings.</a:t>
+              <a:t>Shows honest provider labels and fallback warnings right on the preview page.</a:t>
             </a:r>
           </a:p>
         </p:txBody>
@@ -17997,8 +17748,8 @@
         </p:nvSpPr>
         <p:spPr>
           <a:xfrm>
-            <a:off x="8110727" y="1207008"/>
-            <a:ext cx="3529584" cy="5102352"/>
+            <a:off x="8110727" y="1225296"/>
+            <a:ext cx="3529584" cy="5010912"/>
           </a:xfrm>
           <a:prstGeom prst="roundRect">
             <a:avLst>
@@ -18044,7 +17795,7 @@
         </p:nvSpPr>
         <p:spPr>
           <a:xfrm>
-            <a:off x="8110727" y="1207008"/>
+            <a:off x="8110727" y="1225296"/>
             <a:ext cx="3529584" cy="457200"/>
           </a:xfrm>
           <a:prstGeom prst="rect">
@@ -18087,7 +17838,7 @@
         </p:nvSpPr>
         <p:spPr>
           <a:xfrm>
-            <a:off x="8238744" y="1207008"/>
+            <a:off x="8238744" y="1225296"/>
             <a:ext cx="3273552" cy="457200"/>
           </a:xfrm>
           <a:prstGeom prst="rect">
@@ -18103,13 +17854,13 @@
           <a:p>
             <a:pPr algn="ctr"/>
             <a:r>
-              <a:rPr sz="1150" b="1">
+              <a:rPr sz="1200" b="1">
                 <a:solidFill>
                   <a:srgbClr val="FFFFFF"/>
                 </a:solidFill>
                 <a:latin typeface="Calibri"/>
               </a:rPr>
-              <a:t>3. STORAGE &amp; SECURITY GUARDS</a:t>
+              <a:t>3. PDF &amp; SAFE STORAGE</a:t>
             </a:r>
           </a:p>
         </p:txBody>
@@ -18122,8 +17873,8 @@
         </p:nvSpPr>
         <p:spPr>
           <a:xfrm>
-            <a:off x="8275319" y="1810512"/>
-            <a:ext cx="3200400" cy="4343400"/>
+            <a:off x="8293607" y="1865376"/>
+            <a:ext cx="3163824" cy="4206240"/>
           </a:xfrm>
           <a:prstGeom prst="rect">
             <a:avLst/>
@@ -18138,112 +17889,112 @@
           <a:p>
             <a:pPr>
               <a:lnSpc>
-                <a:spcPct val="118000"/>
+                <a:spcPct val="122000"/>
               </a:lnSpc>
               <a:spcAft>
-                <a:spcPts val="1200"/>
+                <a:spcPts val="1400"/>
               </a:spcAft>
             </a:pPr>
             <a:r>
-              <a:rPr sz="1180" b="1">
-                <a:solidFill>
-                  <a:srgbClr val="0D9488"/>
-                </a:solidFill>
-                <a:latin typeface="Calibri"/>
-              </a:rPr>
-              <a:t>▪ </a:t>
-            </a:r>
-            <a:r>
-              <a:rPr sz="1180" b="1">
+              <a:rPr sz="1230" b="1">
+                <a:solidFill>
+                  <a:srgbClr val="2563EB"/>
+                </a:solidFill>
+                <a:latin typeface="Calibri"/>
+              </a:rPr>
+              <a:t>▪  </a:t>
+            </a:r>
+            <a:r>
+              <a:rPr sz="1230" b="1">
                 <a:solidFill>
                   <a:srgbClr val="0F172A"/>
                 </a:solidFill>
                 <a:latin typeface="Calibri"/>
               </a:rPr>
-              <a:t>Path Traversal Protection: </a:t>
-            </a:r>
-            <a:r>
-              <a:rPr sz="1180" b="0">
+              <a:t>A4 PDF Export: </a:t>
+            </a:r>
+            <a:r>
+              <a:rPr sz="1230">
                 <a:solidFill>
                   <a:srgbClr val="334155"/>
                 </a:solidFill>
                 <a:latin typeface="Calibri"/>
               </a:rPr>
-              <a:t>Every comic_id must match ^[a-f0-9]{32}$ before any disk read/write, blocking '../' traversal attacks.</a:t>
+              <a:t>Builds a styled cover page and per-panel pages with Unicode DejaVu fonts.</a:t>
             </a:r>
           </a:p>
           <a:p>
             <a:pPr>
               <a:lnSpc>
-                <a:spcPct val="118000"/>
+                <a:spcPct val="122000"/>
               </a:lnSpc>
               <a:spcAft>
-                <a:spcPts val="1200"/>
+                <a:spcPts val="1400"/>
               </a:spcAft>
             </a:pPr>
             <a:r>
-              <a:rPr sz="1180" b="1">
-                <a:solidFill>
-                  <a:srgbClr val="0D9488"/>
-                </a:solidFill>
-                <a:latin typeface="Calibri"/>
-              </a:rPr>
-              <a:t>▪ </a:t>
-            </a:r>
-            <a:r>
-              <a:rPr sz="1180" b="1">
+              <a:rPr sz="1230" b="1">
+                <a:solidFill>
+                  <a:srgbClr val="2563EB"/>
+                </a:solidFill>
+                <a:latin typeface="Calibri"/>
+              </a:rPr>
+              <a:t>▪  </a:t>
+            </a:r>
+            <a:r>
+              <a:rPr sz="1230" b="1">
                 <a:solidFill>
                   <a:srgbClr val="0F172A"/>
                 </a:solidFill>
                 <a:latin typeface="Calibri"/>
               </a:rPr>
-              <a:t>Atomic Manifest Writes: </a:t>
-            </a:r>
-            <a:r>
-              <a:rPr sz="1180" b="0">
+              <a:t>UUID Workspaces: </a:t>
+            </a:r>
+            <a:r>
+              <a:rPr sz="1230">
                 <a:solidFill>
                   <a:srgbClr val="334155"/>
                 </a:solidFill>
                 <a:latin typeface="Calibri"/>
               </a:rPr>
-              <a:t>Writes comic.json.tmp first and atomically replaces comic.json so crashed writes never corrupt saved comics.</a:t>
+              <a:t>Stores every comic safely in its own isolated folder (PNGs, PDF, and JSON).</a:t>
             </a:r>
           </a:p>
           <a:p>
             <a:pPr>
               <a:lnSpc>
-                <a:spcPct val="118000"/>
+                <a:spcPct val="122000"/>
               </a:lnSpc>
               <a:spcAft>
-                <a:spcPts val="1200"/>
+                <a:spcPts val="1400"/>
               </a:spcAft>
             </a:pPr>
             <a:r>
-              <a:rPr sz="1180" b="1">
-                <a:solidFill>
-                  <a:srgbClr val="0D9488"/>
-                </a:solidFill>
-                <a:latin typeface="Calibri"/>
-              </a:rPr>
-              <a:t>▪ </a:t>
-            </a:r>
-            <a:r>
-              <a:rPr sz="1180" b="1">
+              <a:rPr sz="1230" b="1">
+                <a:solidFill>
+                  <a:srgbClr val="2563EB"/>
+                </a:solidFill>
+                <a:latin typeface="Calibri"/>
+              </a:rPr>
+              <a:t>▪  </a:t>
+            </a:r>
+            <a:r>
+              <a:rPr sz="1230" b="1">
                 <a:solidFill>
                   <a:srgbClr val="0F172A"/>
                 </a:solidFill>
                 <a:latin typeface="Calibri"/>
               </a:rPr>
-              <a:t>Secret &amp; Header Hygiene: </a:t>
-            </a:r>
-            <a:r>
-              <a:rPr sz="1180" b="0">
+              <a:t>Reopen Anytime: </a:t>
+            </a:r>
+            <a:r>
+              <a:rPr sz="1230">
                 <a:solidFill>
                   <a:srgbClr val="334155"/>
                 </a:solidFill>
                 <a:latin typeface="Calibri"/>
               </a:rPr>
-              <a:t>API keys stored as Pydantic SecretStr in .env; auto-deletes failed workspaces; sets nosniff &amp; SAMEORIGIN headers.</a:t>
+              <a:t>Saved comics can be viewed at /comics/{id} or downloaded at /download/{id}.</a:t>
             </a:r>
           </a:p>
         </p:txBody>
@@ -18470,7 +18221,7 @@
                 </a:solidFill>
                 <a:latin typeface="Calibri"/>
               </a:rPr>
-              <a:t>Application Output &amp; Live Screenshots</a:t>
+              <a:t>Application Output &amp; Screenshots</a:t>
             </a:r>
           </a:p>
         </p:txBody>
@@ -18505,7 +18256,7 @@
                 </a:solidFill>
                 <a:latin typeface="Calibri"/>
               </a:rPr>
-              <a:t>Verified captures from the running ComicCraft application — Web Studio, Panels &amp; A4 PDF</a:t>
+              <a:t>Real screens from the ComicCraft web studio and exported A4 PDF</a:t>
             </a:r>
           </a:p>
         </p:txBody>
@@ -18562,7 +18313,7 @@
         <p:spPr>
           <a:xfrm>
             <a:off x="548640" y="6510528"/>
-            <a:ext cx="7772400" cy="228600"/>
+            <a:ext cx="7315200" cy="228600"/>
           </a:xfrm>
           <a:prstGeom prst="rect">
             <a:avLst/>
@@ -18583,7 +18334,7 @@
                 </a:solidFill>
                 <a:latin typeface="Calibri"/>
               </a:rPr>
-              <a:t>ComicCraft – AI Comic Story Creator Using Gemini Models  |  Naan Mudhalvan Project</a:t>
+              <a:t>ComicCraft — AI Comic Story Creator</a:t>
             </a:r>
           </a:p>
         </p:txBody>
@@ -18596,8 +18347,8 @@
         </p:nvSpPr>
         <p:spPr>
           <a:xfrm>
-            <a:off x="548640" y="1207008"/>
-            <a:ext cx="3529584" cy="5102352"/>
+            <a:off x="548640" y="1225296"/>
+            <a:ext cx="3529584" cy="5010912"/>
           </a:xfrm>
           <a:prstGeom prst="roundRect">
             <a:avLst>
@@ -18643,7 +18394,7 @@
         </p:nvSpPr>
         <p:spPr>
           <a:xfrm>
-            <a:off x="548640" y="1207008"/>
+            <a:off x="548640" y="1225296"/>
             <a:ext cx="3529584" cy="82296"/>
           </a:xfrm>
           <a:prstGeom prst="rect">
@@ -18686,7 +18437,7 @@
         </p:nvSpPr>
         <p:spPr>
           <a:xfrm>
-            <a:off x="713232" y="1353312"/>
+            <a:off x="713232" y="1371600"/>
             <a:ext cx="3200400" cy="329184"/>
           </a:xfrm>
           <a:prstGeom prst="rect">
@@ -18702,13 +18453,13 @@
           <a:p>
             <a:pPr algn="l"/>
             <a:r>
-              <a:rPr sz="1300" b="1">
+              <a:rPr sz="1350" b="1">
                 <a:solidFill>
                   <a:srgbClr val="0F172A"/>
                 </a:solidFill>
                 <a:latin typeface="Calibri"/>
               </a:rPr>
-              <a:t>1. Interactive Story Brief Form</a:t>
+              <a:t>1. Comic Creation Form</a:t>
             </a:r>
           </a:p>
         </p:txBody>
@@ -18721,8 +18472,8 @@
         </p:nvSpPr>
         <p:spPr>
           <a:xfrm>
-            <a:off x="694944" y="1755648"/>
-            <a:ext cx="3236976" cy="3154680"/>
+            <a:off x="694944" y="1773936"/>
+            <a:ext cx="3236976" cy="3127248"/>
           </a:xfrm>
           <a:prstGeom prst="rect">
             <a:avLst/>
@@ -18774,7 +18525,7 @@
         </p:blipFill>
         <p:spPr>
           <a:xfrm>
-            <a:off x="731520" y="2289365"/>
+            <a:off x="731520" y="2293937"/>
             <a:ext cx="3163824" cy="2087244"/>
           </a:xfrm>
           <a:prstGeom prst="rect">
@@ -18791,7 +18542,7 @@
         <p:spPr>
           <a:xfrm>
             <a:off x="713232" y="5029200"/>
-            <a:ext cx="3200400" cy="1143000"/>
+            <a:ext cx="3200400" cy="1051560"/>
           </a:xfrm>
           <a:prstGeom prst="rect">
             <a:avLst/>
@@ -18806,13 +18557,13 @@
           <a:p>
             <a:pPr algn="l"/>
             <a:r>
-              <a:rPr sz="1120" b="0">
+              <a:rPr sz="1180" b="0">
                 <a:solidFill>
                   <a:srgbClr val="334155"/>
                 </a:solidFill>
                 <a:latin typeface="Calibri"/>
               </a:rPr>
-              <a:t>Grouped sections (Story, Character &amp; World, Style &amp; 3–8 Panels) with live character counter and active mode card.</a:t>
+              <a:t>Clean web form to enter story idea, character, setting, tone, art style, and panel count.</a:t>
             </a:r>
           </a:p>
         </p:txBody>
@@ -18825,8 +18576,8 @@
         </p:nvSpPr>
         <p:spPr>
           <a:xfrm>
-            <a:off x="4329683" y="1207008"/>
-            <a:ext cx="3529584" cy="5102352"/>
+            <a:off x="4329683" y="1225296"/>
+            <a:ext cx="3529584" cy="5010912"/>
           </a:xfrm>
           <a:prstGeom prst="roundRect">
             <a:avLst>
@@ -18872,7 +18623,7 @@
         </p:nvSpPr>
         <p:spPr>
           <a:xfrm>
-            <a:off x="4329683" y="1207008"/>
+            <a:off x="4329683" y="1225296"/>
             <a:ext cx="3529584" cy="82296"/>
           </a:xfrm>
           <a:prstGeom prst="rect">
@@ -18915,7 +18666,7 @@
         </p:nvSpPr>
         <p:spPr>
           <a:xfrm>
-            <a:off x="4494275" y="1353312"/>
+            <a:off x="4494275" y="1371600"/>
             <a:ext cx="3200400" cy="329184"/>
           </a:xfrm>
           <a:prstGeom prst="rect">
@@ -18931,13 +18682,13 @@
           <a:p>
             <a:pPr algn="l"/>
             <a:r>
-              <a:rPr sz="1300" b="1">
+              <a:rPr sz="1350" b="1">
                 <a:solidFill>
                   <a:srgbClr val="0F172A"/>
                 </a:solidFill>
                 <a:latin typeface="Calibri"/>
               </a:rPr>
-              <a:t>2. Generated Comic Panels UI</a:t>
+              <a:t>2. Generated Panels Preview</a:t>
             </a:r>
           </a:p>
         </p:txBody>
@@ -18950,8 +18701,8 @@
         </p:nvSpPr>
         <p:spPr>
           <a:xfrm>
-            <a:off x="4475988" y="1755648"/>
-            <a:ext cx="3236976" cy="3154680"/>
+            <a:off x="4475988" y="1773936"/>
+            <a:ext cx="3236976" cy="3127248"/>
           </a:xfrm>
           <a:prstGeom prst="rect">
             <a:avLst/>
@@ -19003,7 +18754,7 @@
         </p:blipFill>
         <p:spPr>
           <a:xfrm>
-            <a:off x="4512564" y="2289365"/>
+            <a:off x="4512564" y="2293937"/>
             <a:ext cx="3163824" cy="2087244"/>
           </a:xfrm>
           <a:prstGeom prst="rect">
@@ -19020,7 +18771,7 @@
         <p:spPr>
           <a:xfrm>
             <a:off x="4494275" y="5029200"/>
-            <a:ext cx="3200400" cy="1143000"/>
+            <a:ext cx="3200400" cy="1051560"/>
           </a:xfrm>
           <a:prstGeom prst="rect">
             <a:avLst/>
@@ -19035,13 +18786,13 @@
           <a:p>
             <a:pPr algn="l"/>
             <a:r>
-              <a:rPr sz="1120" b="0">
+              <a:rPr sz="1180" b="0">
                 <a:solidFill>
                   <a:srgbClr val="334155"/>
                 </a:solidFill>
                 <a:latin typeface="Calibri"/>
               </a:rPr>
-              <a:t>Alternating responsive cards pairing panel artwork, scene summary, caption, narration, dialogue, and provider badge.</a:t>
+              <a:t>Responsive preview pairing each panel's artwork with its caption, narration, and dialogue.</a:t>
             </a:r>
           </a:p>
         </p:txBody>
@@ -19054,8 +18805,8 @@
         </p:nvSpPr>
         <p:spPr>
           <a:xfrm>
-            <a:off x="8110727" y="1207008"/>
-            <a:ext cx="3529584" cy="5102352"/>
+            <a:off x="8110727" y="1225296"/>
+            <a:ext cx="3529584" cy="5010912"/>
           </a:xfrm>
           <a:prstGeom prst="roundRect">
             <a:avLst>
@@ -19101,7 +18852,7 @@
         </p:nvSpPr>
         <p:spPr>
           <a:xfrm>
-            <a:off x="8110727" y="1207008"/>
+            <a:off x="8110727" y="1225296"/>
             <a:ext cx="3529584" cy="82296"/>
           </a:xfrm>
           <a:prstGeom prst="rect">
@@ -19144,7 +18895,7 @@
         </p:nvSpPr>
         <p:spPr>
           <a:xfrm>
-            <a:off x="8275319" y="1353312"/>
+            <a:off x="8275319" y="1371600"/>
             <a:ext cx="3200400" cy="329184"/>
           </a:xfrm>
           <a:prstGeom prst="rect">
@@ -19160,7 +18911,7 @@
           <a:p>
             <a:pPr algn="l"/>
             <a:r>
-              <a:rPr sz="1300" b="1">
+              <a:rPr sz="1350" b="1">
                 <a:solidFill>
                   <a:srgbClr val="0F172A"/>
                 </a:solidFill>
@@ -19179,8 +18930,8 @@
         </p:nvSpPr>
         <p:spPr>
           <a:xfrm>
-            <a:off x="8257031" y="1755648"/>
-            <a:ext cx="3236976" cy="3154680"/>
+            <a:off x="8257031" y="1773936"/>
+            <a:ext cx="3236976" cy="3127248"/>
           </a:xfrm>
           <a:prstGeom prst="rect">
             <a:avLst/>
@@ -19232,7 +18983,7 @@
         </p:blipFill>
         <p:spPr>
           <a:xfrm>
-            <a:off x="8293607" y="2217965"/>
+            <a:off x="8293607" y="2222537"/>
             <a:ext cx="3163824" cy="2230044"/>
           </a:xfrm>
           <a:prstGeom prst="rect">
@@ -19249,7 +19000,7 @@
         <p:spPr>
           <a:xfrm>
             <a:off x="8275319" y="5029200"/>
-            <a:ext cx="3200400" cy="1143000"/>
+            <a:ext cx="3200400" cy="1051560"/>
           </a:xfrm>
           <a:prstGeom prst="rect">
             <a:avLst/>
@@ -19264,13 +19015,13 @@
           <a:p>
             <a:pPr algn="l"/>
             <a:r>
-              <a:rPr sz="1120" b="0">
+              <a:rPr sz="1180" b="0">
                 <a:solidFill>
                   <a:srgbClr val="334155"/>
                 </a:solidFill>
                 <a:latin typeface="Calibri"/>
               </a:rPr>
-              <a:t>Built with fpdf2 &amp; DejaVu Unicode fonts: styled dark cover page + one aspect-preserved page per panel.</a:t>
+              <a:t>Downloadable A4 PDF book featuring a styled dark cover page and one page per panel.</a:t>
             </a:r>
           </a:p>
         </p:txBody>
